--- a/Nexus_Overview.pptx
+++ b/Nexus_Overview.pptx
@@ -20,7 +20,6 @@
     <p:sldId id="268" r:id="rId19"/>
     <p:sldId id="269" r:id="rId20"/>
     <p:sldId id="270" r:id="rId21"/>
-    <p:sldId id="271" r:id="rId22"/>
   </p:sldIdLst>
   <p:sldSz cx="12191695" cy="6858000" type="screen4x3"/>
   <p:notesSz cx="6858000" cy="9144000"/>
@@ -3099,7 +3098,7 @@
     <p:bg>
       <p:bgPr>
         <a:solidFill>
-          <a:srgbClr val="0B0B1A"/>
+          <a:srgbClr val="1E3A5F"/>
         </a:solidFill>
         <a:effectLst/>
       </p:bgPr>
@@ -3113,20 +3112,20 @@
       <p:grpSpPr/>
       <p:sp>
         <p:nvSpPr>
-          <p:cNvPr id="2" name="Oval 1"/>
+          <p:cNvPr id="2" name="Rectangle 1"/>
           <p:cNvSpPr/>
           <p:nvPr/>
         </p:nvSpPr>
         <p:spPr>
           <a:xfrm>
-            <a:off x="8686800" y="-1371600"/>
-            <a:ext cx="4572000" cy="4572000"/>
-          </a:xfrm>
-          <a:prstGeom prst="ellipse">
+            <a:off x="0" y="0"/>
+            <a:ext cx="12191695" cy="6858000"/>
+          </a:xfrm>
+          <a:prstGeom prst="rect">
             <a:avLst/>
           </a:prstGeom>
           <a:solidFill>
-            <a:srgbClr val="6C63FF"/>
+            <a:srgbClr val="1E3A5F"/>
           </a:solidFill>
           <a:ln>
             <a:noFill/>
@@ -3156,20 +3155,20 @@
       </p:sp>
       <p:sp>
         <p:nvSpPr>
-          <p:cNvPr id="3" name="Oval 2"/>
+          <p:cNvPr id="3" name="Rectangle 2"/>
           <p:cNvSpPr/>
           <p:nvPr/>
         </p:nvSpPr>
         <p:spPr>
           <a:xfrm>
-            <a:off x="9601200" y="3657600"/>
-            <a:ext cx="2286000" cy="2286000"/>
-          </a:xfrm>
-          <a:prstGeom prst="ellipse">
+            <a:off x="731520" y="2743200"/>
+            <a:ext cx="1371600" cy="63500"/>
+          </a:xfrm>
+          <a:prstGeom prst="rect">
             <a:avLst/>
           </a:prstGeom>
           <a:solidFill>
-            <a:srgbClr val="00D4AA"/>
+            <a:srgbClr val="2B6CE6"/>
           </a:solidFill>
           <a:ln>
             <a:noFill/>
@@ -3199,57 +3198,14 @@
       </p:sp>
       <p:sp>
         <p:nvSpPr>
-          <p:cNvPr id="4" name="Oval 3"/>
-          <p:cNvSpPr/>
-          <p:nvPr/>
-        </p:nvSpPr>
-        <p:spPr>
-          <a:xfrm>
-            <a:off x="-914400" y="4572000"/>
-            <a:ext cx="2743200" cy="2743200"/>
-          </a:xfrm>
-          <a:prstGeom prst="ellipse">
-            <a:avLst/>
-          </a:prstGeom>
-          <a:solidFill>
-            <a:srgbClr val="6C63FF"/>
-          </a:solidFill>
-          <a:ln>
-            <a:noFill/>
-          </a:ln>
-        </p:spPr>
-        <p:style>
-          <a:lnRef idx="1">
-            <a:schemeClr val="accent1"/>
-          </a:lnRef>
-          <a:fillRef idx="3">
-            <a:schemeClr val="accent1"/>
-          </a:fillRef>
-          <a:effectRef idx="2">
-            <a:schemeClr val="accent1"/>
-          </a:effectRef>
-          <a:fontRef idx="minor">
-            <a:schemeClr val="lt1"/>
-          </a:fontRef>
-        </p:style>
-        <p:txBody>
-          <a:bodyPr rtlCol="0" anchor="ctr"/>
-          <a:lstStyle/>
-          <a:p>
-            <a:pPr algn="ctr"/>
-          </a:p>
-        </p:txBody>
-      </p:sp>
-      <p:sp>
-        <p:nvSpPr>
-          <p:cNvPr id="5" name="TextBox 4"/>
+          <p:cNvPr id="4" name="TextBox 3"/>
           <p:cNvSpPr txBox="1"/>
           <p:nvPr/>
         </p:nvSpPr>
         <p:spPr>
           <a:xfrm>
-            <a:off x="914400" y="1371600"/>
-            <a:ext cx="7315200" cy="1097280"/>
+            <a:off x="731520" y="1645920"/>
+            <a:ext cx="10058400" cy="1097280"/>
           </a:xfrm>
           <a:prstGeom prst="rect">
             <a:avLst/>
@@ -3263,7 +3219,7 @@
           <a:lstStyle/>
           <a:p>
             <a:pPr algn="l">
-              <a:defRPr sz="8000" b="1">
+              <a:defRPr sz="6400" b="1">
                 <a:solidFill>
                   <a:srgbClr val="FFFFFF"/>
                 </a:solidFill>
@@ -3271,64 +3227,21 @@
               </a:defRPr>
             </a:pPr>
             <a:r>
-              <a:t>NEXUS</a:t>
-            </a:r>
-          </a:p>
-        </p:txBody>
-      </p:sp>
-      <p:sp>
-        <p:nvSpPr>
-          <p:cNvPr id="6" name="Rectangle 5"/>
-          <p:cNvSpPr/>
-          <p:nvPr/>
-        </p:nvSpPr>
-        <p:spPr>
-          <a:xfrm>
-            <a:off x="914400" y="2560320"/>
-            <a:ext cx="1828800" cy="63500"/>
-          </a:xfrm>
-          <a:prstGeom prst="rect">
-            <a:avLst/>
-          </a:prstGeom>
-          <a:solidFill>
-            <a:srgbClr val="00D4AA"/>
-          </a:solidFill>
-          <a:ln>
-            <a:noFill/>
-          </a:ln>
-        </p:spPr>
-        <p:style>
-          <a:lnRef idx="1">
-            <a:schemeClr val="accent1"/>
-          </a:lnRef>
-          <a:fillRef idx="3">
-            <a:schemeClr val="accent1"/>
-          </a:fillRef>
-          <a:effectRef idx="2">
-            <a:schemeClr val="accent1"/>
-          </a:effectRef>
-          <a:fontRef idx="minor">
-            <a:schemeClr val="lt1"/>
-          </a:fontRef>
-        </p:style>
-        <p:txBody>
-          <a:bodyPr rtlCol="0" anchor="ctr"/>
-          <a:lstStyle/>
-          <a:p>
-            <a:pPr algn="ctr"/>
-          </a:p>
-        </p:txBody>
-      </p:sp>
-      <p:sp>
-        <p:nvSpPr>
-          <p:cNvPr id="7" name="TextBox 6"/>
+              <a:t>Nexus</a:t>
+            </a:r>
+          </a:p>
+        </p:txBody>
+      </p:sp>
+      <p:sp>
+        <p:nvSpPr>
+          <p:cNvPr id="5" name="TextBox 4"/>
           <p:cNvSpPr txBox="1"/>
           <p:nvPr/>
         </p:nvSpPr>
         <p:spPr>
           <a:xfrm>
-            <a:off x="914400" y="2926080"/>
-            <a:ext cx="7315200" cy="548640"/>
+            <a:off x="731520" y="3108960"/>
+            <a:ext cx="10058400" cy="548640"/>
           </a:xfrm>
           <a:prstGeom prst="rect">
             <a:avLst/>
@@ -3342,9 +3255,9 @@
           <a:lstStyle/>
           <a:p>
             <a:pPr algn="l">
-              <a:defRPr sz="2400" b="0">
-                <a:solidFill>
-                  <a:srgbClr val="6C63FF"/>
+              <a:defRPr sz="2200" b="0">
+                <a:solidFill>
+                  <a:srgbClr val="90AACC"/>
                 </a:solidFill>
                 <a:latin typeface="Calibri"/>
               </a:defRPr>
@@ -3357,14 +3270,14 @@
       </p:sp>
       <p:sp>
         <p:nvSpPr>
-          <p:cNvPr id="8" name="TextBox 7"/>
+          <p:cNvPr id="6" name="TextBox 5"/>
           <p:cNvSpPr txBox="1"/>
           <p:nvPr/>
         </p:nvSpPr>
         <p:spPr>
           <a:xfrm>
-            <a:off x="914400" y="3840480"/>
-            <a:ext cx="7315200" cy="457200"/>
+            <a:off x="731520" y="3931920"/>
+            <a:ext cx="10058400" cy="365760"/>
           </a:xfrm>
           <a:prstGeom prst="rect">
             <a:avLst/>
@@ -3380,7 +3293,7 @@
             <a:pPr algn="l">
               <a:defRPr sz="1600" b="0">
                 <a:solidFill>
-                  <a:srgbClr val="B0B0C8"/>
+                  <a:srgbClr val="7090B0"/>
                 </a:solidFill>
                 <a:latin typeface="Calibri"/>
               </a:defRPr>
@@ -3393,14 +3306,14 @@
       </p:sp>
       <p:sp>
         <p:nvSpPr>
-          <p:cNvPr id="9" name="TextBox 8"/>
+          <p:cNvPr id="7" name="TextBox 6"/>
           <p:cNvSpPr txBox="1"/>
           <p:nvPr/>
         </p:nvSpPr>
         <p:spPr>
           <a:xfrm>
-            <a:off x="914400" y="5029200"/>
-            <a:ext cx="7315200" cy="365760"/>
+            <a:off x="731520" y="5029200"/>
+            <a:ext cx="10058400" cy="365760"/>
           </a:xfrm>
           <a:prstGeom prst="rect">
             <a:avLst/>
@@ -3416,49 +3329,13 @@
             <a:pPr algn="l">
               <a:defRPr sz="1200" b="0">
                 <a:solidFill>
-                  <a:srgbClr val="6B6B8A"/>
+                  <a:srgbClr val="507090"/>
                 </a:solidFill>
                 <a:latin typeface="Calibri"/>
               </a:defRPr>
             </a:pPr>
             <a:r>
               <a:t>github.com/ShubhamRSY/voice-agents</a:t>
-            </a:r>
-          </a:p>
-        </p:txBody>
-      </p:sp>
-      <p:sp>
-        <p:nvSpPr>
-          <p:cNvPr id="10" name="TextBox 9"/>
-          <p:cNvSpPr txBox="1"/>
-          <p:nvPr/>
-        </p:nvSpPr>
-        <p:spPr>
-          <a:xfrm>
-            <a:off x="10972800" y="6400800"/>
-            <a:ext cx="914400" cy="274320"/>
-          </a:xfrm>
-          <a:prstGeom prst="rect">
-            <a:avLst/>
-          </a:prstGeom>
-          <a:noFill/>
-        </p:spPr>
-        <p:txBody>
-          <a:bodyPr wrap="square">
-            <a:spAutoFit/>
-          </a:bodyPr>
-          <a:lstStyle/>
-          <a:p>
-            <a:pPr algn="r">
-              <a:defRPr sz="1000" b="0">
-                <a:solidFill>
-                  <a:srgbClr val="6B6B8A"/>
-                </a:solidFill>
-                <a:latin typeface="Calibri"/>
-              </a:defRPr>
-            </a:pPr>
-            <a:r>
-              <a:t>01 / 16</a:t>
             </a:r>
           </a:p>
         </p:txBody>
@@ -3477,7 +3354,7 @@
     <p:bg>
       <p:bgPr>
         <a:solidFill>
-          <a:srgbClr val="0B0B1A"/>
+          <a:srgbClr val="FFFFFF"/>
         </a:solidFill>
         <a:effectLst/>
       </p:bgPr>
@@ -3491,56 +3368,20 @@
       <p:grpSpPr/>
       <p:sp>
         <p:nvSpPr>
-          <p:cNvPr id="2" name="TextBox 1"/>
-          <p:cNvSpPr txBox="1"/>
-          <p:nvPr/>
-        </p:nvSpPr>
-        <p:spPr>
-          <a:xfrm>
-            <a:off x="731520" y="274320"/>
-            <a:ext cx="5486400" cy="365760"/>
-          </a:xfrm>
-          <a:prstGeom prst="rect">
-            <a:avLst/>
-          </a:prstGeom>
-          <a:noFill/>
-        </p:spPr>
-        <p:txBody>
-          <a:bodyPr wrap="square">
-            <a:spAutoFit/>
-          </a:bodyPr>
-          <a:lstStyle/>
-          <a:p>
-            <a:pPr algn="l">
-              <a:defRPr sz="1200" b="1">
-                <a:solidFill>
-                  <a:srgbClr val="00D4AA"/>
-                </a:solidFill>
-                <a:latin typeface="Calibri"/>
-              </a:defRPr>
-            </a:pPr>
-            <a:r>
-              <a:t>FRONTEND</a:t>
-            </a:r>
-          </a:p>
-        </p:txBody>
-      </p:sp>
-      <p:sp>
-        <p:nvSpPr>
-          <p:cNvPr id="3" name="Rectangle 2"/>
+          <p:cNvPr id="2" name="Rectangle 1"/>
           <p:cNvSpPr/>
           <p:nvPr/>
         </p:nvSpPr>
         <p:spPr>
           <a:xfrm>
-            <a:off x="731520" y="640080"/>
-            <a:ext cx="1097280" cy="50800"/>
+            <a:off x="0" y="0"/>
+            <a:ext cx="12191695" cy="1463040"/>
           </a:xfrm>
           <a:prstGeom prst="rect">
             <a:avLst/>
           </a:prstGeom>
           <a:solidFill>
-            <a:srgbClr val="00D4AA"/>
+            <a:srgbClr val="1E3A5F"/>
           </a:solidFill>
           <a:ln>
             <a:noFill/>
@@ -3570,14 +3411,14 @@
       </p:sp>
       <p:sp>
         <p:nvSpPr>
-          <p:cNvPr id="4" name="TextBox 3"/>
+          <p:cNvPr id="3" name="TextBox 2"/>
           <p:cNvSpPr txBox="1"/>
           <p:nvPr/>
         </p:nvSpPr>
         <p:spPr>
           <a:xfrm>
-            <a:off x="731520" y="1005840"/>
-            <a:ext cx="10058400" cy="914400"/>
+            <a:off x="731520" y="182880"/>
+            <a:ext cx="2743200" cy="274320"/>
           </a:xfrm>
           <a:prstGeom prst="rect">
             <a:avLst/>
@@ -3591,7 +3432,7 @@
           <a:lstStyle/>
           <a:p>
             <a:pPr algn="l">
-              <a:defRPr sz="4000" b="1">
+              <a:defRPr sz="1100" b="1">
                 <a:solidFill>
                   <a:srgbClr val="FFFFFF"/>
                 </a:solidFill>
@@ -3599,6 +3440,78 @@
               </a:defRPr>
             </a:pPr>
             <a:r>
+              <a:t>09</a:t>
+            </a:r>
+          </a:p>
+        </p:txBody>
+      </p:sp>
+      <p:sp>
+        <p:nvSpPr>
+          <p:cNvPr id="4" name="TextBox 3"/>
+          <p:cNvSpPr txBox="1"/>
+          <p:nvPr/>
+        </p:nvSpPr>
+        <p:spPr>
+          <a:xfrm>
+            <a:off x="731520" y="411480"/>
+            <a:ext cx="7315200" cy="274320"/>
+          </a:xfrm>
+          <a:prstGeom prst="rect">
+            <a:avLst/>
+          </a:prstGeom>
+          <a:noFill/>
+        </p:spPr>
+        <p:txBody>
+          <a:bodyPr wrap="square">
+            <a:spAutoFit/>
+          </a:bodyPr>
+          <a:lstStyle/>
+          <a:p>
+            <a:pPr algn="l">
+              <a:defRPr sz="1100" b="0">
+                <a:solidFill>
+                  <a:srgbClr val="90AACC"/>
+                </a:solidFill>
+                <a:latin typeface="Calibri"/>
+              </a:defRPr>
+            </a:pPr>
+            <a:r>
+              <a:t>FRONTEND</a:t>
+            </a:r>
+          </a:p>
+        </p:txBody>
+      </p:sp>
+      <p:sp>
+        <p:nvSpPr>
+          <p:cNvPr id="5" name="TextBox 4"/>
+          <p:cNvSpPr txBox="1"/>
+          <p:nvPr/>
+        </p:nvSpPr>
+        <p:spPr>
+          <a:xfrm>
+            <a:off x="731520" y="731520"/>
+            <a:ext cx="9144000" cy="548640"/>
+          </a:xfrm>
+          <a:prstGeom prst="rect">
+            <a:avLst/>
+          </a:prstGeom>
+          <a:noFill/>
+        </p:spPr>
+        <p:txBody>
+          <a:bodyPr wrap="square">
+            <a:spAutoFit/>
+          </a:bodyPr>
+          <a:lstStyle/>
+          <a:p>
+            <a:pPr algn="l">
+              <a:defRPr sz="2800" b="1">
+                <a:solidFill>
+                  <a:srgbClr val="FFFFFF"/>
+                </a:solidFill>
+                <a:latin typeface="Calibri"/>
+              </a:defRPr>
+            </a:pPr>
+            <a:r>
               <a:t>Console UI</a:t>
             </a:r>
           </a:p>
@@ -3606,20 +3519,20 @@
       </p:sp>
       <p:sp>
         <p:nvSpPr>
-          <p:cNvPr id="5" name="Oval 4"/>
+          <p:cNvPr id="6" name="Rectangle 5"/>
           <p:cNvSpPr/>
           <p:nvPr/>
         </p:nvSpPr>
         <p:spPr>
           <a:xfrm>
-            <a:off x="10515600" y="4114800"/>
-            <a:ext cx="1828800" cy="1828800"/>
-          </a:xfrm>
-          <a:prstGeom prst="ellipse">
+            <a:off x="0" y="1463040"/>
+            <a:ext cx="12191695" cy="38100"/>
+          </a:xfrm>
+          <a:prstGeom prst="rect">
             <a:avLst/>
           </a:prstGeom>
           <a:solidFill>
-            <a:srgbClr val="00D4AA"/>
+            <a:srgbClr val="2B6CE6"/>
           </a:solidFill>
           <a:ln>
             <a:noFill/>
@@ -3649,7 +3562,7 @@
       </p:sp>
       <p:sp>
         <p:nvSpPr>
-          <p:cNvPr id="6" name="TextBox 5"/>
+          <p:cNvPr id="7" name="TextBox 6"/>
           <p:cNvSpPr txBox="1"/>
           <p:nvPr/>
         </p:nvSpPr>
@@ -3671,107 +3584,107 @@
           <a:p>
             <a:pPr>
               <a:spcAft>
-                <a:spcPts val="600"/>
+                <a:spcPts val="700"/>
               </a:spcAft>
-              <a:defRPr sz="1600">
-                <a:solidFill>
-                  <a:srgbClr val="B0B0C8"/>
-                </a:solidFill>
-                <a:latin typeface="Calibri"/>
-              </a:defRPr>
-            </a:pPr>
-            <a:r>
-              <a:t>Dark mode with premium animations &amp; micro-interactions</a:t>
+              <a:defRPr sz="1500">
+                <a:solidFill>
+                  <a:srgbClr val="1F2937"/>
+                </a:solidFill>
+                <a:latin typeface="Calibri"/>
+              </a:defRPr>
+            </a:pPr>
+            <a:r>
+              <a:t>Dark mode interface with clean animations and micro-interactions</a:t>
             </a:r>
           </a:p>
           <a:p>
             <a:pPr>
               <a:spcAft>
-                <a:spcPts val="600"/>
+                <a:spcPts val="700"/>
               </a:spcAft>
-              <a:defRPr sz="1600">
-                <a:solidFill>
-                  <a:srgbClr val="B0B0C8"/>
-                </a:solidFill>
-                <a:latin typeface="Calibri"/>
-              </a:defRPr>
-            </a:pPr>
-            <a:r>
-              <a:t>Three-channel tabs: Chat / Copilot / Voice</a:t>
+              <a:defRPr sz="1500">
+                <a:solidFill>
+                  <a:srgbClr val="1F2937"/>
+                </a:solidFill>
+                <a:latin typeface="Calibri"/>
+              </a:defRPr>
+            </a:pPr>
+            <a:r>
+              <a:t>Three-channel tabs: Chat, Copilot, and Voice</a:t>
             </a:r>
           </a:p>
           <a:p>
             <a:pPr>
               <a:spcAft>
-                <a:spcPts val="600"/>
+                <a:spcPts val="700"/>
               </a:spcAft>
-              <a:defRPr sz="1600">
-                <a:solidFill>
-                  <a:srgbClr val="B0B0C8"/>
-                </a:solidFill>
-                <a:latin typeface="Calibri"/>
-              </a:defRPr>
-            </a:pPr>
-            <a:r>
-              <a:t>Per-mode message filtering + sync toggle (🔗 / ⊘)</a:t>
+              <a:defRPr sz="1500">
+                <a:solidFill>
+                  <a:srgbClr val="1F2937"/>
+                </a:solidFill>
+                <a:latin typeface="Calibri"/>
+              </a:defRPr>
+            </a:pPr>
+            <a:r>
+              <a:t>Per-mode message filtering with sync toggle (combined or separated)</a:t>
             </a:r>
           </a:p>
           <a:p>
             <a:pPr>
               <a:spcAft>
-                <a:spcPts val="600"/>
+                <a:spcPts val="700"/>
               </a:spcAft>
-              <a:defRPr sz="1600">
-                <a:solidFill>
-                  <a:srgbClr val="B0B0C8"/>
-                </a:solidFill>
-                <a:latin typeface="Calibri"/>
-              </a:defRPr>
-            </a:pPr>
-            <a:r>
-              <a:t>Session sidebar — create, rename, switch, clear</a:t>
+              <a:defRPr sz="1500">
+                <a:solidFill>
+                  <a:srgbClr val="1F2937"/>
+                </a:solidFill>
+                <a:latin typeface="Calibri"/>
+              </a:defRPr>
+            </a:pPr>
+            <a:r>
+              <a:t>Session sidebar — create, rename, switch, and clear sessions</a:t>
             </a:r>
           </a:p>
           <a:p>
             <a:pPr>
               <a:spcAft>
-                <a:spcPts val="600"/>
+                <a:spcPts val="700"/>
               </a:spcAft>
-              <a:defRPr sz="1600">
-                <a:solidFill>
-                  <a:srgbClr val="B0B0C8"/>
-                </a:solidFill>
-                <a:latin typeface="Calibri"/>
-              </a:defRPr>
-            </a:pPr>
-            <a:r>
-              <a:t>SSE streaming — word-by-word token display</a:t>
+              <a:defRPr sz="1500">
+                <a:solidFill>
+                  <a:srgbClr val="1F2937"/>
+                </a:solidFill>
+                <a:latin typeface="Calibri"/>
+              </a:defRPr>
+            </a:pPr>
+            <a:r>
+              <a:t>SSE streaming for word-by-word AI response display</a:t>
             </a:r>
           </a:p>
           <a:p>
             <a:pPr>
               <a:spcAft>
-                <a:spcPts val="600"/>
+                <a:spcPts val="700"/>
               </a:spcAft>
-              <a:defRPr sz="1600">
-                <a:solidFill>
-                  <a:srgbClr val="B0B0C8"/>
-                </a:solidFill>
-                <a:latin typeface="Calibri"/>
-              </a:defRPr>
-            </a:pPr>
-            <a:r>
-              <a:t>Typing indicator, streaming cursor, entrance animations</a:t>
+              <a:defRPr sz="1500">
+                <a:solidFill>
+                  <a:srgbClr val="1F2937"/>
+                </a:solidFill>
+                <a:latin typeface="Calibri"/>
+              </a:defRPr>
+            </a:pPr>
+            <a:r>
+              <a:t>Typing indicator, streaming cursor, and entrance animations</a:t>
             </a:r>
           </a:p>
           <a:p>
             <a:pPr>
               <a:spcAft>
-                <a:spcPts val="600"/>
+                <a:spcPts val="700"/>
               </a:spcAft>
-              <a:defRPr sz="1600">
-                <a:solidFill>
-                  <a:srgbClr val="B0B0C8"/>
+              <a:defRPr sz="1500">
+                <a:solidFill>
+                  <a:srgbClr val="1F2937"/>
                 </a:solidFill>
                 <a:latin typeface="Calibri"/>
               </a:defRPr>
@@ -3783,53 +3696,17 @@
           <a:p>
             <a:pPr>
               <a:spcAft>
-                <a:spcPts val="600"/>
+                <a:spcPts val="700"/>
               </a:spcAft>
-              <a:defRPr sz="1600">
-                <a:solidFill>
-                  <a:srgbClr val="B0B0C8"/>
-                </a:solidFill>
-                <a:latin typeface="Calibri"/>
-              </a:defRPr>
-            </a:pPr>
-            <a:r>
-              <a:t>Scrollable history, button glow effects, thin scrollbars</a:t>
-            </a:r>
-          </a:p>
-        </p:txBody>
-      </p:sp>
-      <p:sp>
-        <p:nvSpPr>
-          <p:cNvPr id="7" name="TextBox 6"/>
-          <p:cNvSpPr txBox="1"/>
-          <p:nvPr/>
-        </p:nvSpPr>
-        <p:spPr>
-          <a:xfrm>
-            <a:off x="10972800" y="6400800"/>
-            <a:ext cx="914400" cy="274320"/>
-          </a:xfrm>
-          <a:prstGeom prst="rect">
-            <a:avLst/>
-          </a:prstGeom>
-          <a:noFill/>
-        </p:spPr>
-        <p:txBody>
-          <a:bodyPr wrap="square">
-            <a:spAutoFit/>
-          </a:bodyPr>
-          <a:lstStyle/>
-          <a:p>
-            <a:pPr algn="r">
-              <a:defRPr sz="1000" b="0">
-                <a:solidFill>
-                  <a:srgbClr val="6B6B8A"/>
-                </a:solidFill>
-                <a:latin typeface="Calibri"/>
-              </a:defRPr>
-            </a:pPr>
-            <a:r>
-              <a:t>10 / 16</a:t>
+              <a:defRPr sz="1500">
+                <a:solidFill>
+                  <a:srgbClr val="1F2937"/>
+                </a:solidFill>
+                <a:latin typeface="Calibri"/>
+              </a:defRPr>
+            </a:pPr>
+            <a:r>
+              <a:t>Scrollable history with thin scrollbars and responsive layout</a:t>
             </a:r>
           </a:p>
         </p:txBody>
@@ -3848,7 +3725,7 @@
     <p:bg>
       <p:bgPr>
         <a:solidFill>
-          <a:srgbClr val="0B0B1A"/>
+          <a:srgbClr val="FFFFFF"/>
         </a:solidFill>
         <a:effectLst/>
       </p:bgPr>
@@ -3862,56 +3739,20 @@
       <p:grpSpPr/>
       <p:sp>
         <p:nvSpPr>
-          <p:cNvPr id="2" name="TextBox 1"/>
-          <p:cNvSpPr txBox="1"/>
-          <p:nvPr/>
-        </p:nvSpPr>
-        <p:spPr>
-          <a:xfrm>
-            <a:off x="731520" y="274320"/>
-            <a:ext cx="5486400" cy="365760"/>
-          </a:xfrm>
-          <a:prstGeom prst="rect">
-            <a:avLst/>
-          </a:prstGeom>
-          <a:noFill/>
-        </p:spPr>
-        <p:txBody>
-          <a:bodyPr wrap="square">
-            <a:spAutoFit/>
-          </a:bodyPr>
-          <a:lstStyle/>
-          <a:p>
-            <a:pPr algn="l">
-              <a:defRPr sz="1200" b="1">
-                <a:solidFill>
-                  <a:srgbClr val="00D4AA"/>
-                </a:solidFill>
-                <a:latin typeface="Calibri"/>
-              </a:defRPr>
-            </a:pPr>
-            <a:r>
-              <a:t>INTEGRATION</a:t>
-            </a:r>
-          </a:p>
-        </p:txBody>
-      </p:sp>
-      <p:sp>
-        <p:nvSpPr>
-          <p:cNvPr id="3" name="Rectangle 2"/>
+          <p:cNvPr id="2" name="Rectangle 1"/>
           <p:cNvSpPr/>
           <p:nvPr/>
         </p:nvSpPr>
         <p:spPr>
           <a:xfrm>
-            <a:off x="731520" y="640080"/>
-            <a:ext cx="1097280" cy="50800"/>
+            <a:off x="0" y="0"/>
+            <a:ext cx="12191695" cy="1463040"/>
           </a:xfrm>
           <a:prstGeom prst="rect">
             <a:avLst/>
           </a:prstGeom>
           <a:solidFill>
-            <a:srgbClr val="00D4AA"/>
+            <a:srgbClr val="1E3A5F"/>
           </a:solidFill>
           <a:ln>
             <a:noFill/>
@@ -3941,14 +3782,14 @@
       </p:sp>
       <p:sp>
         <p:nvSpPr>
-          <p:cNvPr id="4" name="TextBox 3"/>
+          <p:cNvPr id="3" name="TextBox 2"/>
           <p:cNvSpPr txBox="1"/>
           <p:nvPr/>
         </p:nvSpPr>
         <p:spPr>
           <a:xfrm>
-            <a:off x="731520" y="1005840"/>
-            <a:ext cx="10058400" cy="914400"/>
+            <a:off x="731520" y="182880"/>
+            <a:ext cx="2743200" cy="274320"/>
           </a:xfrm>
           <a:prstGeom prst="rect">
             <a:avLst/>
@@ -3962,7 +3803,7 @@
           <a:lstStyle/>
           <a:p>
             <a:pPr algn="l">
-              <a:defRPr sz="4000" b="1">
+              <a:defRPr sz="1100" b="1">
                 <a:solidFill>
                   <a:srgbClr val="FFFFFF"/>
                 </a:solidFill>
@@ -3970,6 +3811,78 @@
               </a:defRPr>
             </a:pPr>
             <a:r>
+              <a:t>010</a:t>
+            </a:r>
+          </a:p>
+        </p:txBody>
+      </p:sp>
+      <p:sp>
+        <p:nvSpPr>
+          <p:cNvPr id="4" name="TextBox 3"/>
+          <p:cNvSpPr txBox="1"/>
+          <p:nvPr/>
+        </p:nvSpPr>
+        <p:spPr>
+          <a:xfrm>
+            <a:off x="731520" y="411480"/>
+            <a:ext cx="7315200" cy="274320"/>
+          </a:xfrm>
+          <a:prstGeom prst="rect">
+            <a:avLst/>
+          </a:prstGeom>
+          <a:noFill/>
+        </p:spPr>
+        <p:txBody>
+          <a:bodyPr wrap="square">
+            <a:spAutoFit/>
+          </a:bodyPr>
+          <a:lstStyle/>
+          <a:p>
+            <a:pPr algn="l">
+              <a:defRPr sz="1100" b="0">
+                <a:solidFill>
+                  <a:srgbClr val="90AACC"/>
+                </a:solidFill>
+                <a:latin typeface="Calibri"/>
+              </a:defRPr>
+            </a:pPr>
+            <a:r>
+              <a:t>INTEGRATION</a:t>
+            </a:r>
+          </a:p>
+        </p:txBody>
+      </p:sp>
+      <p:sp>
+        <p:nvSpPr>
+          <p:cNvPr id="5" name="TextBox 4"/>
+          <p:cNvSpPr txBox="1"/>
+          <p:nvPr/>
+        </p:nvSpPr>
+        <p:spPr>
+          <a:xfrm>
+            <a:off x="731520" y="731520"/>
+            <a:ext cx="9144000" cy="548640"/>
+          </a:xfrm>
+          <a:prstGeom prst="rect">
+            <a:avLst/>
+          </a:prstGeom>
+          <a:noFill/>
+        </p:spPr>
+        <p:txBody>
+          <a:bodyPr wrap="square">
+            <a:spAutoFit/>
+          </a:bodyPr>
+          <a:lstStyle/>
+          <a:p>
+            <a:pPr algn="l">
+              <a:defRPr sz="2800" b="1">
+                <a:solidFill>
+                  <a:srgbClr val="FFFFFF"/>
+                </a:solidFill>
+                <a:latin typeface="Calibri"/>
+              </a:defRPr>
+            </a:pPr>
+            <a:r>
               <a:t>iPaaS Webhooks</a:t>
             </a:r>
           </a:p>
@@ -3977,20 +3890,20 @@
       </p:sp>
       <p:sp>
         <p:nvSpPr>
-          <p:cNvPr id="5" name="Oval 4"/>
+          <p:cNvPr id="6" name="Rectangle 5"/>
           <p:cNvSpPr/>
           <p:nvPr/>
         </p:nvSpPr>
         <p:spPr>
           <a:xfrm>
-            <a:off x="-274320" y="457200"/>
-            <a:ext cx="1645920" cy="1645920"/>
-          </a:xfrm>
-          <a:prstGeom prst="ellipse">
+            <a:off x="0" y="1463040"/>
+            <a:ext cx="12191695" cy="38100"/>
+          </a:xfrm>
+          <a:prstGeom prst="rect">
             <a:avLst/>
           </a:prstGeom>
           <a:solidFill>
-            <a:srgbClr val="FF6B6B"/>
+            <a:srgbClr val="2B6CE6"/>
           </a:solidFill>
           <a:ln>
             <a:noFill/>
@@ -4020,14 +3933,14 @@
       </p:sp>
       <p:sp>
         <p:nvSpPr>
-          <p:cNvPr id="6" name="TextBox 5"/>
+          <p:cNvPr id="7" name="TextBox 6"/>
           <p:cNvSpPr txBox="1"/>
           <p:nvPr/>
         </p:nvSpPr>
         <p:spPr>
           <a:xfrm>
             <a:off x="731520" y="2011680"/>
-            <a:ext cx="10058400" cy="3657600"/>
+            <a:ext cx="10058400" cy="4114800"/>
           </a:xfrm>
           <a:prstGeom prst="rect">
             <a:avLst/>
@@ -4044,15 +3957,15 @@
               <a:spcAft>
                 <a:spcPts val="800"/>
               </a:spcAft>
-              <a:defRPr sz="1600">
-                <a:solidFill>
-                  <a:srgbClr val="B0B0C8"/>
-                </a:solidFill>
-                <a:latin typeface="Calibri"/>
-              </a:defRPr>
-            </a:pPr>
-            <a:r>
-              <a:t>Lifecycle event webhooks for n8n, Zapier, and custom flows</a:t>
+              <a:defRPr sz="1500">
+                <a:solidFill>
+                  <a:srgbClr val="1F2937"/>
+                </a:solidFill>
+                <a:latin typeface="Calibri"/>
+              </a:defRPr>
+            </a:pPr>
+            <a:r>
+              <a:t>Lifecycle event webhooks for n8n, Zapier, and custom automation flows</a:t>
             </a:r>
           </a:p>
           <a:p>
@@ -4060,15 +3973,15 @@
               <a:spcAft>
                 <a:spcPts val="800"/>
               </a:spcAft>
-              <a:defRPr sz="1600">
-                <a:solidFill>
-                  <a:srgbClr val="B0B0C8"/>
-                </a:solidFill>
-                <a:latin typeface="Calibri"/>
-              </a:defRPr>
-            </a:pPr>
-            <a:r>
-              <a:t>Events: session.created · message.completed · feedback.submitted</a:t>
+              <a:defRPr sz="1500">
+                <a:solidFill>
+                  <a:srgbClr val="1F2937"/>
+                </a:solidFill>
+                <a:latin typeface="Calibri"/>
+              </a:defRPr>
+            </a:pPr>
+            <a:r>
+              <a:t>Events: session.created, message.completed, feedback.submitted</a:t>
             </a:r>
           </a:p>
           <a:p>
@@ -4076,15 +3989,15 @@
               <a:spcAft>
                 <a:spcPts val="800"/>
               </a:spcAft>
-              <a:defRPr sz="1600">
-                <a:solidFill>
-                  <a:srgbClr val="B0B0C8"/>
-                </a:solidFill>
-                <a:latin typeface="Calibri"/>
-              </a:defRPr>
-            </a:pPr>
-            <a:r>
-              <a:t>Async HTTP dispatch via httpx — non-blocking</a:t>
+              <a:defRPr sz="1500">
+                <a:solidFill>
+                  <a:srgbClr val="1F2937"/>
+                </a:solidFill>
+                <a:latin typeface="Calibri"/>
+              </a:defRPr>
+            </a:pPr>
+            <a:r>
+              <a:t>Async HTTP dispatch via httpx — non-blocking delivery</a:t>
             </a:r>
           </a:p>
           <a:p>
@@ -4092,15 +4005,15 @@
               <a:spcAft>
                 <a:spcPts val="800"/>
               </a:spcAft>
-              <a:defRPr sz="1600">
-                <a:solidFill>
-                  <a:srgbClr val="B0B0C8"/>
-                </a:solidFill>
-                <a:latin typeface="Calibri"/>
-              </a:defRPr>
-            </a:pPr>
-            <a:r>
-              <a:t>Event history endpoint for debugging &amp; replay</a:t>
+              <a:defRPr sz="1500">
+                <a:solidFill>
+                  <a:srgbClr val="1F2937"/>
+                </a:solidFill>
+                <a:latin typeface="Calibri"/>
+              </a:defRPr>
+            </a:pPr>
+            <a:r>
+              <a:t>Event history endpoint for debugging and replay</a:t>
             </a:r>
           </a:p>
           <a:p>
@@ -4108,9 +4021,9 @@
               <a:spcAft>
                 <a:spcPts val="800"/>
               </a:spcAft>
-              <a:defRPr sz="1600">
-                <a:solidFill>
-                  <a:srgbClr val="B0B0C8"/>
+              <a:defRPr sz="1500">
+                <a:solidFill>
+                  <a:srgbClr val="1F2937"/>
                 </a:solidFill>
                 <a:latin typeface="Calibri"/>
               </a:defRPr>
@@ -4124,15 +4037,15 @@
               <a:spcAft>
                 <a:spcPts val="800"/>
               </a:spcAft>
-              <a:defRPr sz="1600">
-                <a:solidFill>
-                  <a:srgbClr val="B0B0C8"/>
-                </a:solidFill>
-                <a:latin typeface="Calibri"/>
-              </a:defRPr>
-            </a:pPr>
-            <a:r>
-              <a:t>Notifications: Slack, email, and more</a:t>
+              <a:defRPr sz="1500">
+                <a:solidFill>
+                  <a:srgbClr val="1F2937"/>
+                </a:solidFill>
+                <a:latin typeface="Calibri"/>
+              </a:defRPr>
+            </a:pPr>
+            <a:r>
+              <a:t>Connect to notifications: Slack, email, and more</a:t>
             </a:r>
           </a:p>
           <a:p>
@@ -4140,51 +4053,15 @@
               <a:spcAft>
                 <a:spcPts val="800"/>
               </a:spcAft>
-              <a:defRPr sz="1600">
-                <a:solidFill>
-                  <a:srgbClr val="B0B0C8"/>
-                </a:solidFill>
-                <a:latin typeface="Calibri"/>
-              </a:defRPr>
-            </a:pPr>
-            <a:r>
-              <a:t>Template workflows included for n8n &amp; Zapier</a:t>
-            </a:r>
-          </a:p>
-        </p:txBody>
-      </p:sp>
-      <p:sp>
-        <p:nvSpPr>
-          <p:cNvPr id="7" name="TextBox 6"/>
-          <p:cNvSpPr txBox="1"/>
-          <p:nvPr/>
-        </p:nvSpPr>
-        <p:spPr>
-          <a:xfrm>
-            <a:off x="10972800" y="6400800"/>
-            <a:ext cx="914400" cy="274320"/>
-          </a:xfrm>
-          <a:prstGeom prst="rect">
-            <a:avLst/>
-          </a:prstGeom>
-          <a:noFill/>
-        </p:spPr>
-        <p:txBody>
-          <a:bodyPr wrap="square">
-            <a:spAutoFit/>
-          </a:bodyPr>
-          <a:lstStyle/>
-          <a:p>
-            <a:pPr algn="r">
-              <a:defRPr sz="1000" b="0">
-                <a:solidFill>
-                  <a:srgbClr val="6B6B8A"/>
-                </a:solidFill>
-                <a:latin typeface="Calibri"/>
-              </a:defRPr>
-            </a:pPr>
-            <a:r>
-              <a:t>11 / 16</a:t>
+              <a:defRPr sz="1500">
+                <a:solidFill>
+                  <a:srgbClr val="1F2937"/>
+                </a:solidFill>
+                <a:latin typeface="Calibri"/>
+              </a:defRPr>
+            </a:pPr>
+            <a:r>
+              <a:t>Template workflows included for n8n and Zapier</a:t>
             </a:r>
           </a:p>
         </p:txBody>
@@ -4203,7 +4080,7 @@
     <p:bg>
       <p:bgPr>
         <a:solidFill>
-          <a:srgbClr val="0B0B1A"/>
+          <a:srgbClr val="FFFFFF"/>
         </a:solidFill>
         <a:effectLst/>
       </p:bgPr>
@@ -4217,56 +4094,20 @@
       <p:grpSpPr/>
       <p:sp>
         <p:nvSpPr>
-          <p:cNvPr id="2" name="TextBox 1"/>
-          <p:cNvSpPr txBox="1"/>
-          <p:nvPr/>
-        </p:nvSpPr>
-        <p:spPr>
-          <a:xfrm>
-            <a:off x="731520" y="274320"/>
-            <a:ext cx="5486400" cy="365760"/>
-          </a:xfrm>
-          <a:prstGeom prst="rect">
-            <a:avLst/>
-          </a:prstGeom>
-          <a:noFill/>
-        </p:spPr>
-        <p:txBody>
-          <a:bodyPr wrap="square">
-            <a:spAutoFit/>
-          </a:bodyPr>
-          <a:lstStyle/>
-          <a:p>
-            <a:pPr algn="l">
-              <a:defRPr sz="1200" b="1">
-                <a:solidFill>
-                  <a:srgbClr val="00D4AA"/>
-                </a:solidFill>
-                <a:latin typeface="Calibri"/>
-              </a:defRPr>
-            </a:pPr>
-            <a:r>
-              <a:t>CONFIGURATION</a:t>
-            </a:r>
-          </a:p>
-        </p:txBody>
-      </p:sp>
-      <p:sp>
-        <p:nvSpPr>
-          <p:cNvPr id="3" name="Rectangle 2"/>
+          <p:cNvPr id="2" name="Rectangle 1"/>
           <p:cNvSpPr/>
           <p:nvPr/>
         </p:nvSpPr>
         <p:spPr>
           <a:xfrm>
-            <a:off x="731520" y="640080"/>
-            <a:ext cx="1097280" cy="50800"/>
+            <a:off x="0" y="0"/>
+            <a:ext cx="12191695" cy="1463040"/>
           </a:xfrm>
           <a:prstGeom prst="rect">
             <a:avLst/>
           </a:prstGeom>
           <a:solidFill>
-            <a:srgbClr val="00D4AA"/>
+            <a:srgbClr val="1E3A5F"/>
           </a:solidFill>
           <a:ln>
             <a:noFill/>
@@ -4296,14 +4137,14 @@
       </p:sp>
       <p:sp>
         <p:nvSpPr>
-          <p:cNvPr id="4" name="TextBox 3"/>
+          <p:cNvPr id="3" name="TextBox 2"/>
           <p:cNvSpPr txBox="1"/>
           <p:nvPr/>
         </p:nvSpPr>
         <p:spPr>
           <a:xfrm>
-            <a:off x="731520" y="1005840"/>
-            <a:ext cx="10058400" cy="914400"/>
+            <a:off x="731520" y="182880"/>
+            <a:ext cx="2743200" cy="274320"/>
           </a:xfrm>
           <a:prstGeom prst="rect">
             <a:avLst/>
@@ -4317,7 +4158,7 @@
           <a:lstStyle/>
           <a:p>
             <a:pPr algn="l">
-              <a:defRPr sz="4000" b="1">
+              <a:defRPr sz="1100" b="1">
                 <a:solidFill>
                   <a:srgbClr val="FFFFFF"/>
                 </a:solidFill>
@@ -4325,21 +4166,21 @@
               </a:defRPr>
             </a:pPr>
             <a:r>
-              <a:t>Agent Definitions</a:t>
-            </a:r>
-          </a:p>
-        </p:txBody>
-      </p:sp>
-      <p:sp>
-        <p:nvSpPr>
-          <p:cNvPr id="5" name="TextBox 4"/>
+              <a:t>011</a:t>
+            </a:r>
+          </a:p>
+        </p:txBody>
+      </p:sp>
+      <p:sp>
+        <p:nvSpPr>
+          <p:cNvPr id="4" name="TextBox 3"/>
           <p:cNvSpPr txBox="1"/>
           <p:nvPr/>
         </p:nvSpPr>
         <p:spPr>
           <a:xfrm>
-            <a:off x="731520" y="1828800"/>
-            <a:ext cx="10058400" cy="457200"/>
+            <a:off x="731520" y="411480"/>
+            <a:ext cx="7315200" cy="274320"/>
           </a:xfrm>
           <a:prstGeom prst="rect">
             <a:avLst/>
@@ -4353,37 +4194,71 @@
           <a:lstStyle/>
           <a:p>
             <a:pPr algn="l">
-              <a:defRPr sz="1600" b="0">
-                <a:solidFill>
-                  <a:srgbClr val="B0B0C8"/>
-                </a:solidFill>
-                <a:latin typeface="Calibri"/>
-              </a:defRPr>
-            </a:pPr>
-            <a:r>
-              <a:t>Agents are defined in YAML — no code changes needed:</a:t>
-            </a:r>
-          </a:p>
-        </p:txBody>
-      </p:sp>
-      <p:sp>
-        <p:nvSpPr>
-          <p:cNvPr id="6" name="Rounded Rectangle 5"/>
+              <a:defRPr sz="1100" b="0">
+                <a:solidFill>
+                  <a:srgbClr val="90AACC"/>
+                </a:solidFill>
+                <a:latin typeface="Calibri"/>
+              </a:defRPr>
+            </a:pPr>
+            <a:r>
+              <a:t>CONFIGURATION</a:t>
+            </a:r>
+          </a:p>
+        </p:txBody>
+      </p:sp>
+      <p:sp>
+        <p:nvSpPr>
+          <p:cNvPr id="5" name="TextBox 4"/>
+          <p:cNvSpPr txBox="1"/>
+          <p:nvPr/>
+        </p:nvSpPr>
+        <p:spPr>
+          <a:xfrm>
+            <a:off x="731520" y="731520"/>
+            <a:ext cx="9144000" cy="548640"/>
+          </a:xfrm>
+          <a:prstGeom prst="rect">
+            <a:avLst/>
+          </a:prstGeom>
+          <a:noFill/>
+        </p:spPr>
+        <p:txBody>
+          <a:bodyPr wrap="square">
+            <a:spAutoFit/>
+          </a:bodyPr>
+          <a:lstStyle/>
+          <a:p>
+            <a:pPr algn="l">
+              <a:defRPr sz="2800" b="1">
+                <a:solidFill>
+                  <a:srgbClr val="FFFFFF"/>
+                </a:solidFill>
+                <a:latin typeface="Calibri"/>
+              </a:defRPr>
+            </a:pPr>
+            <a:r>
+              <a:t>Agent Definitions</a:t>
+            </a:r>
+          </a:p>
+        </p:txBody>
+      </p:sp>
+      <p:sp>
+        <p:nvSpPr>
+          <p:cNvPr id="6" name="Rectangle 5"/>
           <p:cNvSpPr/>
           <p:nvPr/>
         </p:nvSpPr>
         <p:spPr>
           <a:xfrm>
-            <a:off x="731520" y="2377440"/>
-            <a:ext cx="10058400" cy="2926080"/>
-          </a:xfrm>
-          <a:prstGeom prst="roundRect">
-            <a:avLst>
-              <a:gd name="adj" fmla="val 5000"/>
-            </a:avLst>
+            <a:off x="0" y="1463040"/>
+            <a:ext cx="12191695" cy="38100"/>
+          </a:xfrm>
+          <a:prstGeom prst="rect">
+            <a:avLst/>
           </a:prstGeom>
           <a:solidFill>
-            <a:srgbClr val="151525"/>
+            <a:srgbClr val="2B6CE6"/>
           </a:solidFill>
           <a:ln>
             <a:noFill/>
@@ -4419,8 +4294,89 @@
         </p:nvSpPr>
         <p:spPr>
           <a:xfrm>
-            <a:off x="1005840" y="2651760"/>
-            <a:ext cx="9601200" cy="2560320"/>
+            <a:off x="731520" y="1828800"/>
+            <a:ext cx="10058400" cy="365760"/>
+          </a:xfrm>
+          <a:prstGeom prst="rect">
+            <a:avLst/>
+          </a:prstGeom>
+          <a:noFill/>
+        </p:spPr>
+        <p:txBody>
+          <a:bodyPr wrap="square">
+            <a:spAutoFit/>
+          </a:bodyPr>
+          <a:lstStyle/>
+          <a:p>
+            <a:pPr algn="l">
+              <a:defRPr sz="1400" b="0">
+                <a:solidFill>
+                  <a:srgbClr val="6B7280"/>
+                </a:solidFill>
+                <a:latin typeface="Calibri"/>
+              </a:defRPr>
+            </a:pPr>
+            <a:r>
+              <a:t>Agents are defined in YAML files — no code changes required to add or modify agents:</a:t>
+            </a:r>
+          </a:p>
+        </p:txBody>
+      </p:sp>
+      <p:sp>
+        <p:nvSpPr>
+          <p:cNvPr id="8" name="Rounded Rectangle 7"/>
+          <p:cNvSpPr/>
+          <p:nvPr/>
+        </p:nvSpPr>
+        <p:spPr>
+          <a:xfrm>
+            <a:off x="731520" y="2286000"/>
+            <a:ext cx="10515600" cy="3200400"/>
+          </a:xfrm>
+          <a:prstGeom prst="roundRect">
+            <a:avLst>
+              <a:gd name="adj" fmla="val 4000"/>
+            </a:avLst>
+          </a:prstGeom>
+          <a:solidFill>
+            <a:srgbClr val="F0F2F5"/>
+          </a:solidFill>
+          <a:ln>
+            <a:noFill/>
+          </a:ln>
+        </p:spPr>
+        <p:style>
+          <a:lnRef idx="1">
+            <a:schemeClr val="accent1"/>
+          </a:lnRef>
+          <a:fillRef idx="3">
+            <a:schemeClr val="accent1"/>
+          </a:fillRef>
+          <a:effectRef idx="2">
+            <a:schemeClr val="accent1"/>
+          </a:effectRef>
+          <a:fontRef idx="minor">
+            <a:schemeClr val="lt1"/>
+          </a:fontRef>
+        </p:style>
+        <p:txBody>
+          <a:bodyPr rtlCol="0" anchor="ctr"/>
+          <a:lstStyle/>
+          <a:p>
+            <a:pPr algn="ctr"/>
+          </a:p>
+        </p:txBody>
+      </p:sp>
+      <p:sp>
+        <p:nvSpPr>
+          <p:cNvPr id="9" name="TextBox 8"/>
+          <p:cNvSpPr txBox="1"/>
+          <p:nvPr/>
+        </p:nvSpPr>
+        <p:spPr>
+          <a:xfrm>
+            <a:off x="914400" y="2468880"/>
+            <a:ext cx="10058400" cy="2743200"/>
           </a:xfrm>
           <a:prstGeom prst="rect">
             <a:avLst/>
@@ -4437,9 +4393,9 @@
               <a:spcAft>
                 <a:spcPts val="100"/>
               </a:spcAft>
-              <a:defRPr sz="1300">
-                <a:solidFill>
-                  <a:srgbClr val="A0CC88"/>
+              <a:defRPr sz="1100">
+                <a:solidFill>
+                  <a:srgbClr val="6B7280"/>
                 </a:solidFill>
                 <a:latin typeface="Calibri"/>
               </a:defRPr>
@@ -4453,9 +4409,9 @@
               <a:spcAft>
                 <a:spcPts val="100"/>
               </a:spcAft>
-              <a:defRPr sz="1300">
-                <a:solidFill>
-                  <a:srgbClr val="A0CC88"/>
+              <a:defRPr sz="1100">
+                <a:solidFill>
+                  <a:srgbClr val="6B7280"/>
                 </a:solidFill>
                 <a:latin typeface="Calibri"/>
               </a:defRPr>
@@ -4469,9 +4425,9 @@
               <a:spcAft>
                 <a:spcPts val="100"/>
               </a:spcAft>
-              <a:defRPr sz="1300">
-                <a:solidFill>
-                  <a:srgbClr val="A0CC88"/>
+              <a:defRPr sz="1100">
+                <a:solidFill>
+                  <a:srgbClr val="6B7280"/>
                 </a:solidFill>
                 <a:latin typeface="Calibri"/>
               </a:defRPr>
@@ -4485,9 +4441,9 @@
               <a:spcAft>
                 <a:spcPts val="100"/>
               </a:spcAft>
-              <a:defRPr sz="1300">
-                <a:solidFill>
-                  <a:srgbClr val="A0CC88"/>
+              <a:defRPr sz="1100">
+                <a:solidFill>
+                  <a:srgbClr val="6B7280"/>
                 </a:solidFill>
                 <a:latin typeface="Calibri"/>
               </a:defRPr>
@@ -4501,9 +4457,9 @@
               <a:spcAft>
                 <a:spcPts val="100"/>
               </a:spcAft>
-              <a:defRPr sz="1300">
-                <a:solidFill>
-                  <a:srgbClr val="A0CC88"/>
+              <a:defRPr sz="1100">
+                <a:solidFill>
+                  <a:srgbClr val="6B7280"/>
                 </a:solidFill>
                 <a:latin typeface="Calibri"/>
               </a:defRPr>
@@ -4517,9 +4473,9 @@
               <a:spcAft>
                 <a:spcPts val="100"/>
               </a:spcAft>
-              <a:defRPr sz="1300">
-                <a:solidFill>
-                  <a:srgbClr val="A0CC88"/>
+              <a:defRPr sz="1100">
+                <a:solidFill>
+                  <a:srgbClr val="6B7280"/>
                 </a:solidFill>
                 <a:latin typeface="Calibri"/>
               </a:defRPr>
@@ -4533,9 +4489,9 @@
               <a:spcAft>
                 <a:spcPts val="100"/>
               </a:spcAft>
-              <a:defRPr sz="1300">
-                <a:solidFill>
-                  <a:srgbClr val="A0CC88"/>
+              <a:defRPr sz="1100">
+                <a:solidFill>
+                  <a:srgbClr val="6B7280"/>
                 </a:solidFill>
                 <a:latin typeface="Calibri"/>
               </a:defRPr>
@@ -4549,9 +4505,9 @@
               <a:spcAft>
                 <a:spcPts val="100"/>
               </a:spcAft>
-              <a:defRPr sz="1300">
-                <a:solidFill>
-                  <a:srgbClr val="A0CC88"/>
+              <a:defRPr sz="1100">
+                <a:solidFill>
+                  <a:srgbClr val="6B7280"/>
                 </a:solidFill>
                 <a:latin typeface="Calibri"/>
               </a:defRPr>
@@ -4565,9 +4521,9 @@
               <a:spcAft>
                 <a:spcPts val="100"/>
               </a:spcAft>
-              <a:defRPr sz="1300">
-                <a:solidFill>
-                  <a:srgbClr val="A0CC88"/>
+              <a:defRPr sz="1100">
+                <a:solidFill>
+                  <a:srgbClr val="6B7280"/>
                 </a:solidFill>
                 <a:latin typeface="Calibri"/>
               </a:defRPr>
@@ -4581,9 +4537,9 @@
               <a:spcAft>
                 <a:spcPts val="100"/>
               </a:spcAft>
-              <a:defRPr sz="1300">
-                <a:solidFill>
-                  <a:srgbClr val="A0CC88"/>
+              <a:defRPr sz="1100">
+                <a:solidFill>
+                  <a:srgbClr val="6B7280"/>
                 </a:solidFill>
                 <a:latin typeface="Calibri"/>
               </a:defRPr>
@@ -4597,9 +4553,9 @@
               <a:spcAft>
                 <a:spcPts val="100"/>
               </a:spcAft>
-              <a:defRPr sz="1300">
-                <a:solidFill>
-                  <a:srgbClr val="A0CC88"/>
+              <a:defRPr sz="1100">
+                <a:solidFill>
+                  <a:srgbClr val="6B7280"/>
                 </a:solidFill>
                 <a:latin typeface="Calibri"/>
               </a:defRPr>
@@ -4613,9 +4569,9 @@
               <a:spcAft>
                 <a:spcPts val="100"/>
               </a:spcAft>
-              <a:defRPr sz="1300">
-                <a:solidFill>
-                  <a:srgbClr val="A0CC88"/>
+              <a:defRPr sz="1100">
+                <a:solidFill>
+                  <a:srgbClr val="6B7280"/>
                 </a:solidFill>
                 <a:latin typeface="Calibri"/>
               </a:defRPr>
@@ -4629,9 +4585,9 @@
               <a:spcAft>
                 <a:spcPts val="100"/>
               </a:spcAft>
-              <a:defRPr sz="1300">
-                <a:solidFill>
-                  <a:srgbClr val="A0CC88"/>
+              <a:defRPr sz="1100">
+                <a:solidFill>
+                  <a:srgbClr val="6B7280"/>
                 </a:solidFill>
                 <a:latin typeface="Calibri"/>
               </a:defRPr>
@@ -4645,51 +4601,15 @@
               <a:spcAft>
                 <a:spcPts val="100"/>
               </a:spcAft>
-              <a:defRPr sz="1300">
-                <a:solidFill>
-                  <a:srgbClr val="A0CC88"/>
+              <a:defRPr sz="1100">
+                <a:solidFill>
+                  <a:srgbClr val="6B7280"/>
                 </a:solidFill>
                 <a:latin typeface="Calibri"/>
               </a:defRPr>
             </a:pPr>
             <a:r>
               <a:t>  top_k: 3</a:t>
-            </a:r>
-          </a:p>
-        </p:txBody>
-      </p:sp>
-      <p:sp>
-        <p:nvSpPr>
-          <p:cNvPr id="8" name="TextBox 7"/>
-          <p:cNvSpPr txBox="1"/>
-          <p:nvPr/>
-        </p:nvSpPr>
-        <p:spPr>
-          <a:xfrm>
-            <a:off x="10972800" y="6400800"/>
-            <a:ext cx="914400" cy="274320"/>
-          </a:xfrm>
-          <a:prstGeom prst="rect">
-            <a:avLst/>
-          </a:prstGeom>
-          <a:noFill/>
-        </p:spPr>
-        <p:txBody>
-          <a:bodyPr wrap="square">
-            <a:spAutoFit/>
-          </a:bodyPr>
-          <a:lstStyle/>
-          <a:p>
-            <a:pPr algn="r">
-              <a:defRPr sz="1000" b="0">
-                <a:solidFill>
-                  <a:srgbClr val="6B6B8A"/>
-                </a:solidFill>
-                <a:latin typeface="Calibri"/>
-              </a:defRPr>
-            </a:pPr>
-            <a:r>
-              <a:t>12 / 16</a:t>
             </a:r>
           </a:p>
         </p:txBody>
@@ -4708,7 +4628,7 @@
     <p:bg>
       <p:bgPr>
         <a:solidFill>
-          <a:srgbClr val="0B0B1A"/>
+          <a:srgbClr val="FFFFFF"/>
         </a:solidFill>
         <a:effectLst/>
       </p:bgPr>
@@ -4722,56 +4642,20 @@
       <p:grpSpPr/>
       <p:sp>
         <p:nvSpPr>
-          <p:cNvPr id="2" name="TextBox 1"/>
-          <p:cNvSpPr txBox="1"/>
-          <p:nvPr/>
-        </p:nvSpPr>
-        <p:spPr>
-          <a:xfrm>
-            <a:off x="731520" y="274320"/>
-            <a:ext cx="5486400" cy="365760"/>
-          </a:xfrm>
-          <a:prstGeom prst="rect">
-            <a:avLst/>
-          </a:prstGeom>
-          <a:noFill/>
-        </p:spPr>
-        <p:txBody>
-          <a:bodyPr wrap="square">
-            <a:spAutoFit/>
-          </a:bodyPr>
-          <a:lstStyle/>
-          <a:p>
-            <a:pPr algn="l">
-              <a:defRPr sz="1200" b="1">
-                <a:solidFill>
-                  <a:srgbClr val="00D4AA"/>
-                </a:solidFill>
-                <a:latin typeface="Calibri"/>
-              </a:defRPr>
-            </a:pPr>
-            <a:r>
-              <a:t>OPERATIONS</a:t>
-            </a:r>
-          </a:p>
-        </p:txBody>
-      </p:sp>
-      <p:sp>
-        <p:nvSpPr>
-          <p:cNvPr id="3" name="Rectangle 2"/>
+          <p:cNvPr id="2" name="Rectangle 1"/>
           <p:cNvSpPr/>
           <p:nvPr/>
         </p:nvSpPr>
         <p:spPr>
           <a:xfrm>
-            <a:off x="731520" y="640080"/>
-            <a:ext cx="1097280" cy="50800"/>
+            <a:off x="0" y="0"/>
+            <a:ext cx="12191695" cy="1463040"/>
           </a:xfrm>
           <a:prstGeom prst="rect">
             <a:avLst/>
           </a:prstGeom>
           <a:solidFill>
-            <a:srgbClr val="00D4AA"/>
+            <a:srgbClr val="1E3A5F"/>
           </a:solidFill>
           <a:ln>
             <a:noFill/>
@@ -4801,14 +4685,14 @@
       </p:sp>
       <p:sp>
         <p:nvSpPr>
-          <p:cNvPr id="4" name="TextBox 3"/>
+          <p:cNvPr id="3" name="TextBox 2"/>
           <p:cNvSpPr txBox="1"/>
           <p:nvPr/>
         </p:nvSpPr>
         <p:spPr>
           <a:xfrm>
-            <a:off x="731520" y="1005840"/>
-            <a:ext cx="10058400" cy="914400"/>
+            <a:off x="731520" y="182880"/>
+            <a:ext cx="2743200" cy="274320"/>
           </a:xfrm>
           <a:prstGeom prst="rect">
             <a:avLst/>
@@ -4822,7 +4706,7 @@
           <a:lstStyle/>
           <a:p>
             <a:pPr algn="l">
-              <a:defRPr sz="4000" b="1">
+              <a:defRPr sz="1100" b="1">
                 <a:solidFill>
                   <a:srgbClr val="FFFFFF"/>
                 </a:solidFill>
@@ -4830,6 +4714,78 @@
               </a:defRPr>
             </a:pPr>
             <a:r>
+              <a:t>012</a:t>
+            </a:r>
+          </a:p>
+        </p:txBody>
+      </p:sp>
+      <p:sp>
+        <p:nvSpPr>
+          <p:cNvPr id="4" name="TextBox 3"/>
+          <p:cNvSpPr txBox="1"/>
+          <p:nvPr/>
+        </p:nvSpPr>
+        <p:spPr>
+          <a:xfrm>
+            <a:off x="731520" y="411480"/>
+            <a:ext cx="7315200" cy="274320"/>
+          </a:xfrm>
+          <a:prstGeom prst="rect">
+            <a:avLst/>
+          </a:prstGeom>
+          <a:noFill/>
+        </p:spPr>
+        <p:txBody>
+          <a:bodyPr wrap="square">
+            <a:spAutoFit/>
+          </a:bodyPr>
+          <a:lstStyle/>
+          <a:p>
+            <a:pPr algn="l">
+              <a:defRPr sz="1100" b="0">
+                <a:solidFill>
+                  <a:srgbClr val="90AACC"/>
+                </a:solidFill>
+                <a:latin typeface="Calibri"/>
+              </a:defRPr>
+            </a:pPr>
+            <a:r>
+              <a:t>OPERATIONS</a:t>
+            </a:r>
+          </a:p>
+        </p:txBody>
+      </p:sp>
+      <p:sp>
+        <p:nvSpPr>
+          <p:cNvPr id="5" name="TextBox 4"/>
+          <p:cNvSpPr txBox="1"/>
+          <p:nvPr/>
+        </p:nvSpPr>
+        <p:spPr>
+          <a:xfrm>
+            <a:off x="731520" y="731520"/>
+            <a:ext cx="9144000" cy="548640"/>
+          </a:xfrm>
+          <a:prstGeom prst="rect">
+            <a:avLst/>
+          </a:prstGeom>
+          <a:noFill/>
+        </p:spPr>
+        <p:txBody>
+          <a:bodyPr wrap="square">
+            <a:spAutoFit/>
+          </a:bodyPr>
+          <a:lstStyle/>
+          <a:p>
+            <a:pPr algn="l">
+              <a:defRPr sz="2800" b="1">
+                <a:solidFill>
+                  <a:srgbClr val="FFFFFF"/>
+                </a:solidFill>
+                <a:latin typeface="Calibri"/>
+              </a:defRPr>
+            </a:pPr>
+            <a:r>
               <a:t>Deployment Options</a:t>
             </a:r>
           </a:p>
@@ -4837,20 +4793,20 @@
       </p:sp>
       <p:sp>
         <p:nvSpPr>
-          <p:cNvPr id="5" name="Oval 4"/>
+          <p:cNvPr id="6" name="Rectangle 5"/>
           <p:cNvSpPr/>
           <p:nvPr/>
         </p:nvSpPr>
         <p:spPr>
           <a:xfrm>
-            <a:off x="9601200" y="4572000"/>
-            <a:ext cx="1828800" cy="1828800"/>
-          </a:xfrm>
-          <a:prstGeom prst="ellipse">
+            <a:off x="0" y="1463040"/>
+            <a:ext cx="12191695" cy="38100"/>
+          </a:xfrm>
+          <a:prstGeom prst="rect">
             <a:avLst/>
           </a:prstGeom>
           <a:solidFill>
-            <a:srgbClr val="6C63FF"/>
+            <a:srgbClr val="2B6CE6"/>
           </a:solidFill>
           <a:ln>
             <a:noFill/>
@@ -4880,22 +4836,22 @@
       </p:sp>
       <p:sp>
         <p:nvSpPr>
-          <p:cNvPr id="6" name="Rounded Rectangle 5"/>
+          <p:cNvPr id="7" name="Rounded Rectangle 6"/>
           <p:cNvSpPr/>
           <p:nvPr/>
         </p:nvSpPr>
         <p:spPr>
           <a:xfrm>
             <a:off x="731520" y="2103120"/>
-            <a:ext cx="1463040" cy="320040"/>
+            <a:ext cx="1371600" cy="320040"/>
           </a:xfrm>
           <a:prstGeom prst="roundRect">
             <a:avLst>
-              <a:gd name="adj" fmla="val 4000"/>
+              <a:gd name="adj" fmla="val 3000"/>
             </a:avLst>
           </a:prstGeom>
           <a:solidFill>
-            <a:srgbClr val="6C63FF"/>
+            <a:srgbClr val="1E3A5F"/>
           </a:solidFill>
           <a:ln>
             <a:noFill/>
@@ -4919,30 +4875,20 @@
           <a:bodyPr rtlCol="0" anchor="ctr"/>
           <a:lstStyle/>
           <a:p>
-            <a:pPr algn="ctr">
-              <a:defRPr sz="1200" b="1">
-                <a:solidFill>
-                  <a:srgbClr val="FFFFFF"/>
-                </a:solidFill>
-                <a:latin typeface="Calibri"/>
-              </a:defRPr>
-            </a:pPr>
-            <a:r>
-              <a:t>Docker</a:t>
-            </a:r>
-          </a:p>
-        </p:txBody>
-      </p:sp>
-      <p:sp>
-        <p:nvSpPr>
-          <p:cNvPr id="7" name="TextBox 6"/>
+            <a:pPr algn="ctr"/>
+          </a:p>
+        </p:txBody>
+      </p:sp>
+      <p:sp>
+        <p:nvSpPr>
+          <p:cNvPr id="8" name="TextBox 7"/>
           <p:cNvSpPr txBox="1"/>
           <p:nvPr/>
         </p:nvSpPr>
         <p:spPr>
           <a:xfrm>
-            <a:off x="2468880" y="2103120"/>
-            <a:ext cx="8229600" cy="320040"/>
+            <a:off x="731520" y="2103120"/>
+            <a:ext cx="1371600" cy="320040"/>
           </a:xfrm>
           <a:prstGeom prst="rect">
             <a:avLst/>
@@ -4955,10 +4901,46 @@
           </a:bodyPr>
           <a:lstStyle/>
           <a:p>
+            <a:pPr algn="ctr">
+              <a:defRPr sz="1100" b="1">
+                <a:solidFill>
+                  <a:srgbClr val="FFFFFF"/>
+                </a:solidFill>
+                <a:latin typeface="Calibri"/>
+              </a:defRPr>
+            </a:pPr>
+            <a:r>
+              <a:t>Docker</a:t>
+            </a:r>
+          </a:p>
+        </p:txBody>
+      </p:sp>
+      <p:sp>
+        <p:nvSpPr>
+          <p:cNvPr id="9" name="TextBox 8"/>
+          <p:cNvSpPr txBox="1"/>
+          <p:nvPr/>
+        </p:nvSpPr>
+        <p:spPr>
+          <a:xfrm>
+            <a:off x="2377440" y="2128520"/>
+            <a:ext cx="8229600" cy="320040"/>
+          </a:xfrm>
+          <a:prstGeom prst="rect">
+            <a:avLst/>
+          </a:prstGeom>
+          <a:noFill/>
+        </p:spPr>
+        <p:txBody>
+          <a:bodyPr wrap="square">
+            <a:spAutoFit/>
+          </a:bodyPr>
+          <a:lstStyle/>
+          <a:p>
             <a:pPr algn="l">
               <a:defRPr sz="1400" b="0">
                 <a:solidFill>
-                  <a:srgbClr val="00D4AA"/>
+                  <a:srgbClr val="1F2937"/>
                 </a:solidFill>
                 <a:latin typeface="Consolas"/>
               </a:defRPr>
@@ -4971,22 +4953,22 @@
       </p:sp>
       <p:sp>
         <p:nvSpPr>
-          <p:cNvPr id="8" name="Rounded Rectangle 7"/>
+          <p:cNvPr id="10" name="Rounded Rectangle 9"/>
           <p:cNvSpPr/>
           <p:nvPr/>
         </p:nvSpPr>
         <p:spPr>
           <a:xfrm>
             <a:off x="731520" y="3291839"/>
-            <a:ext cx="1463040" cy="320040"/>
+            <a:ext cx="1371600" cy="320040"/>
           </a:xfrm>
           <a:prstGeom prst="roundRect">
             <a:avLst>
-              <a:gd name="adj" fmla="val 4000"/>
+              <a:gd name="adj" fmla="val 3000"/>
             </a:avLst>
           </a:prstGeom>
           <a:solidFill>
-            <a:srgbClr val="6C63FF"/>
+            <a:srgbClr val="1E3A5F"/>
           </a:solidFill>
           <a:ln>
             <a:noFill/>
@@ -5010,30 +4992,20 @@
           <a:bodyPr rtlCol="0" anchor="ctr"/>
           <a:lstStyle/>
           <a:p>
-            <a:pPr algn="ctr">
-              <a:defRPr sz="1200" b="1">
-                <a:solidFill>
-                  <a:srgbClr val="FFFFFF"/>
-                </a:solidFill>
-                <a:latin typeface="Calibri"/>
-              </a:defRPr>
-            </a:pPr>
-            <a:r>
-              <a:t>Bare Metal</a:t>
-            </a:r>
-          </a:p>
-        </p:txBody>
-      </p:sp>
-      <p:sp>
-        <p:nvSpPr>
-          <p:cNvPr id="9" name="TextBox 8"/>
+            <a:pPr algn="ctr"/>
+          </a:p>
+        </p:txBody>
+      </p:sp>
+      <p:sp>
+        <p:nvSpPr>
+          <p:cNvPr id="11" name="TextBox 10"/>
           <p:cNvSpPr txBox="1"/>
           <p:nvPr/>
         </p:nvSpPr>
         <p:spPr>
           <a:xfrm>
-            <a:off x="2468880" y="3291839"/>
-            <a:ext cx="8229600" cy="320040"/>
+            <a:off x="731520" y="3291839"/>
+            <a:ext cx="1371600" cy="320040"/>
           </a:xfrm>
           <a:prstGeom prst="rect">
             <a:avLst/>
@@ -5046,10 +5018,46 @@
           </a:bodyPr>
           <a:lstStyle/>
           <a:p>
+            <a:pPr algn="ctr">
+              <a:defRPr sz="1100" b="1">
+                <a:solidFill>
+                  <a:srgbClr val="FFFFFF"/>
+                </a:solidFill>
+                <a:latin typeface="Calibri"/>
+              </a:defRPr>
+            </a:pPr>
+            <a:r>
+              <a:t>Bare Metal</a:t>
+            </a:r>
+          </a:p>
+        </p:txBody>
+      </p:sp>
+      <p:sp>
+        <p:nvSpPr>
+          <p:cNvPr id="12" name="TextBox 11"/>
+          <p:cNvSpPr txBox="1"/>
+          <p:nvPr/>
+        </p:nvSpPr>
+        <p:spPr>
+          <a:xfrm>
+            <a:off x="2377440" y="3317239"/>
+            <a:ext cx="8229600" cy="320040"/>
+          </a:xfrm>
+          <a:prstGeom prst="rect">
+            <a:avLst/>
+          </a:prstGeom>
+          <a:noFill/>
+        </p:spPr>
+        <p:txBody>
+          <a:bodyPr wrap="square">
+            <a:spAutoFit/>
+          </a:bodyPr>
+          <a:lstStyle/>
+          <a:p>
             <a:pPr algn="l">
               <a:defRPr sz="1400" b="0">
                 <a:solidFill>
-                  <a:srgbClr val="00D4AA"/>
+                  <a:srgbClr val="1F2937"/>
                 </a:solidFill>
                 <a:latin typeface="Consolas"/>
               </a:defRPr>
@@ -5062,22 +5070,22 @@
       </p:sp>
       <p:sp>
         <p:nvSpPr>
-          <p:cNvPr id="10" name="Rounded Rectangle 9"/>
+          <p:cNvPr id="13" name="Rounded Rectangle 12"/>
           <p:cNvSpPr/>
           <p:nvPr/>
         </p:nvSpPr>
         <p:spPr>
           <a:xfrm>
             <a:off x="731520" y="4480560"/>
-            <a:ext cx="1463040" cy="320040"/>
+            <a:ext cx="1371600" cy="320040"/>
           </a:xfrm>
           <a:prstGeom prst="roundRect">
             <a:avLst>
-              <a:gd name="adj" fmla="val 4000"/>
+              <a:gd name="adj" fmla="val 3000"/>
             </a:avLst>
           </a:prstGeom>
           <a:solidFill>
-            <a:srgbClr val="6C63FF"/>
+            <a:srgbClr val="1E3A5F"/>
           </a:solidFill>
           <a:ln>
             <a:noFill/>
@@ -5101,30 +5109,20 @@
           <a:bodyPr rtlCol="0" anchor="ctr"/>
           <a:lstStyle/>
           <a:p>
-            <a:pPr algn="ctr">
-              <a:defRPr sz="1200" b="1">
-                <a:solidFill>
-                  <a:srgbClr val="FFFFFF"/>
-                </a:solidFill>
-                <a:latin typeface="Calibri"/>
-              </a:defRPr>
-            </a:pPr>
-            <a:r>
-              <a:t>CI/CD</a:t>
-            </a:r>
-          </a:p>
-        </p:txBody>
-      </p:sp>
-      <p:sp>
-        <p:nvSpPr>
-          <p:cNvPr id="11" name="TextBox 10"/>
+            <a:pPr algn="ctr"/>
+          </a:p>
+        </p:txBody>
+      </p:sp>
+      <p:sp>
+        <p:nvSpPr>
+          <p:cNvPr id="14" name="TextBox 13"/>
           <p:cNvSpPr txBox="1"/>
           <p:nvPr/>
         </p:nvSpPr>
         <p:spPr>
           <a:xfrm>
-            <a:off x="2468880" y="4480560"/>
-            <a:ext cx="8229600" cy="320040"/>
+            <a:off x="731520" y="4480560"/>
+            <a:ext cx="1371600" cy="320040"/>
           </a:xfrm>
           <a:prstGeom prst="rect">
             <a:avLst/>
@@ -5137,30 +5135,30 @@
           </a:bodyPr>
           <a:lstStyle/>
           <a:p>
-            <a:pPr algn="l">
-              <a:defRPr sz="1400" b="0">
-                <a:solidFill>
-                  <a:srgbClr val="00D4AA"/>
-                </a:solidFill>
-                <a:latin typeface="Consolas"/>
-              </a:defRPr>
-            </a:pPr>
-            <a:r>
-              <a:t>GitHub Actions — lint, test, e2e, build, deploy</a:t>
-            </a:r>
-          </a:p>
-        </p:txBody>
-      </p:sp>
-      <p:sp>
-        <p:nvSpPr>
-          <p:cNvPr id="12" name="TextBox 11"/>
+            <a:pPr algn="ctr">
+              <a:defRPr sz="1100" b="1">
+                <a:solidFill>
+                  <a:srgbClr val="FFFFFF"/>
+                </a:solidFill>
+                <a:latin typeface="Calibri"/>
+              </a:defRPr>
+            </a:pPr>
+            <a:r>
+              <a:t>CI/CD</a:t>
+            </a:r>
+          </a:p>
+        </p:txBody>
+      </p:sp>
+      <p:sp>
+        <p:nvSpPr>
+          <p:cNvPr id="15" name="TextBox 14"/>
           <p:cNvSpPr txBox="1"/>
           <p:nvPr/>
         </p:nvSpPr>
         <p:spPr>
           <a:xfrm>
-            <a:off x="10972800" y="6400800"/>
-            <a:ext cx="914400" cy="274320"/>
+            <a:off x="2377440" y="4505960"/>
+            <a:ext cx="8229600" cy="320040"/>
           </a:xfrm>
           <a:prstGeom prst="rect">
             <a:avLst/>
@@ -5173,16 +5171,16 @@
           </a:bodyPr>
           <a:lstStyle/>
           <a:p>
-            <a:pPr algn="r">
-              <a:defRPr sz="1000" b="0">
-                <a:solidFill>
-                  <a:srgbClr val="6B6B8A"/>
-                </a:solidFill>
-                <a:latin typeface="Calibri"/>
-              </a:defRPr>
-            </a:pPr>
-            <a:r>
-              <a:t>13 / 16</a:t>
+            <a:pPr algn="l">
+              <a:defRPr sz="1400" b="0">
+                <a:solidFill>
+                  <a:srgbClr val="1F2937"/>
+                </a:solidFill>
+                <a:latin typeface="Consolas"/>
+              </a:defRPr>
+            </a:pPr>
+            <a:r>
+              <a:t>GitHub Actions pipeline — lint, test, e2e, build, deploy</a:t>
             </a:r>
           </a:p>
         </p:txBody>
@@ -5201,7 +5199,7 @@
     <p:bg>
       <p:bgPr>
         <a:solidFill>
-          <a:srgbClr val="0B0B1A"/>
+          <a:srgbClr val="FFFFFF"/>
         </a:solidFill>
         <a:effectLst/>
       </p:bgPr>
@@ -5215,56 +5213,20 @@
       <p:grpSpPr/>
       <p:sp>
         <p:nvSpPr>
-          <p:cNvPr id="2" name="TextBox 1"/>
-          <p:cNvSpPr txBox="1"/>
-          <p:nvPr/>
-        </p:nvSpPr>
-        <p:spPr>
-          <a:xfrm>
-            <a:off x="731520" y="274320"/>
-            <a:ext cx="5486400" cy="365760"/>
-          </a:xfrm>
-          <a:prstGeom prst="rect">
-            <a:avLst/>
-          </a:prstGeom>
-          <a:noFill/>
-        </p:spPr>
-        <p:txBody>
-          <a:bodyPr wrap="square">
-            <a:spAutoFit/>
-          </a:bodyPr>
-          <a:lstStyle/>
-          <a:p>
-            <a:pPr algn="l">
-              <a:defRPr sz="1200" b="1">
-                <a:solidFill>
-                  <a:srgbClr val="00D4AA"/>
-                </a:solidFill>
-                <a:latin typeface="Calibri"/>
-              </a:defRPr>
-            </a:pPr>
-            <a:r>
-              <a:t>QUALITY</a:t>
-            </a:r>
-          </a:p>
-        </p:txBody>
-      </p:sp>
-      <p:sp>
-        <p:nvSpPr>
-          <p:cNvPr id="3" name="Rectangle 2"/>
+          <p:cNvPr id="2" name="Rectangle 1"/>
           <p:cNvSpPr/>
           <p:nvPr/>
         </p:nvSpPr>
         <p:spPr>
           <a:xfrm>
-            <a:off x="731520" y="640080"/>
-            <a:ext cx="1097280" cy="50800"/>
+            <a:off x="0" y="0"/>
+            <a:ext cx="12191695" cy="1463040"/>
           </a:xfrm>
           <a:prstGeom prst="rect">
             <a:avLst/>
           </a:prstGeom>
           <a:solidFill>
-            <a:srgbClr val="00D4AA"/>
+            <a:srgbClr val="1E3A5F"/>
           </a:solidFill>
           <a:ln>
             <a:noFill/>
@@ -5294,14 +5256,14 @@
       </p:sp>
       <p:sp>
         <p:nvSpPr>
-          <p:cNvPr id="4" name="TextBox 3"/>
+          <p:cNvPr id="3" name="TextBox 2"/>
           <p:cNvSpPr txBox="1"/>
           <p:nvPr/>
         </p:nvSpPr>
         <p:spPr>
           <a:xfrm>
-            <a:off x="731520" y="1005840"/>
-            <a:ext cx="10058400" cy="914400"/>
+            <a:off x="731520" y="182880"/>
+            <a:ext cx="2743200" cy="274320"/>
           </a:xfrm>
           <a:prstGeom prst="rect">
             <a:avLst/>
@@ -5315,7 +5277,7 @@
           <a:lstStyle/>
           <a:p>
             <a:pPr algn="l">
-              <a:defRPr sz="4000" b="1">
+              <a:defRPr sz="1100" b="1">
                 <a:solidFill>
                   <a:srgbClr val="FFFFFF"/>
                 </a:solidFill>
@@ -5323,6 +5285,78 @@
               </a:defRPr>
             </a:pPr>
             <a:r>
+              <a:t>013</a:t>
+            </a:r>
+          </a:p>
+        </p:txBody>
+      </p:sp>
+      <p:sp>
+        <p:nvSpPr>
+          <p:cNvPr id="4" name="TextBox 3"/>
+          <p:cNvSpPr txBox="1"/>
+          <p:nvPr/>
+        </p:nvSpPr>
+        <p:spPr>
+          <a:xfrm>
+            <a:off x="731520" y="411480"/>
+            <a:ext cx="7315200" cy="274320"/>
+          </a:xfrm>
+          <a:prstGeom prst="rect">
+            <a:avLst/>
+          </a:prstGeom>
+          <a:noFill/>
+        </p:spPr>
+        <p:txBody>
+          <a:bodyPr wrap="square">
+            <a:spAutoFit/>
+          </a:bodyPr>
+          <a:lstStyle/>
+          <a:p>
+            <a:pPr algn="l">
+              <a:defRPr sz="1100" b="0">
+                <a:solidFill>
+                  <a:srgbClr val="90AACC"/>
+                </a:solidFill>
+                <a:latin typeface="Calibri"/>
+              </a:defRPr>
+            </a:pPr>
+            <a:r>
+              <a:t>QUALITY</a:t>
+            </a:r>
+          </a:p>
+        </p:txBody>
+      </p:sp>
+      <p:sp>
+        <p:nvSpPr>
+          <p:cNvPr id="5" name="TextBox 4"/>
+          <p:cNvSpPr txBox="1"/>
+          <p:nvPr/>
+        </p:nvSpPr>
+        <p:spPr>
+          <a:xfrm>
+            <a:off x="731520" y="731520"/>
+            <a:ext cx="9144000" cy="548640"/>
+          </a:xfrm>
+          <a:prstGeom prst="rect">
+            <a:avLst/>
+          </a:prstGeom>
+          <a:noFill/>
+        </p:spPr>
+        <p:txBody>
+          <a:bodyPr wrap="square">
+            <a:spAutoFit/>
+          </a:bodyPr>
+          <a:lstStyle/>
+          <a:p>
+            <a:pPr algn="l">
+              <a:defRPr sz="2800" b="1">
+                <a:solidFill>
+                  <a:srgbClr val="FFFFFF"/>
+                </a:solidFill>
+                <a:latin typeface="Calibri"/>
+              </a:defRPr>
+            </a:pPr>
+            <a:r>
               <a:t>Testing &amp; CI/CD</a:t>
             </a:r>
           </a:p>
@@ -5330,20 +5364,20 @@
       </p:sp>
       <p:sp>
         <p:nvSpPr>
-          <p:cNvPr id="5" name="Oval 4"/>
+          <p:cNvPr id="6" name="Rectangle 5"/>
           <p:cNvSpPr/>
           <p:nvPr/>
         </p:nvSpPr>
         <p:spPr>
           <a:xfrm>
-            <a:off x="-274320" y="5029200"/>
-            <a:ext cx="1828800" cy="1828800"/>
-          </a:xfrm>
-          <a:prstGeom prst="ellipse">
+            <a:off x="0" y="1463040"/>
+            <a:ext cx="12191695" cy="38100"/>
+          </a:xfrm>
+          <a:prstGeom prst="rect">
             <a:avLst/>
           </a:prstGeom>
           <a:solidFill>
-            <a:srgbClr val="00D4AA"/>
+            <a:srgbClr val="2B6CE6"/>
           </a:solidFill>
           <a:ln>
             <a:noFill/>
@@ -5373,14 +5407,14 @@
       </p:sp>
       <p:sp>
         <p:nvSpPr>
-          <p:cNvPr id="6" name="TextBox 5"/>
+          <p:cNvPr id="7" name="TextBox 6"/>
           <p:cNvSpPr txBox="1"/>
           <p:nvPr/>
         </p:nvSpPr>
         <p:spPr>
           <a:xfrm>
             <a:off x="731520" y="2011680"/>
-            <a:ext cx="10058400" cy="3657600"/>
+            <a:ext cx="10058400" cy="3200400"/>
           </a:xfrm>
           <a:prstGeom prst="rect">
             <a:avLst/>
@@ -5397,15 +5431,15 @@
               <a:spcAft>
                 <a:spcPts val="800"/>
               </a:spcAft>
-              <a:defRPr sz="1600">
-                <a:solidFill>
-                  <a:srgbClr val="B0B0C8"/>
-                </a:solidFill>
-                <a:latin typeface="Calibri"/>
-              </a:defRPr>
-            </a:pPr>
-            <a:r>
-              <a:t>158+ unit tests — routers, services, providers, vault</a:t>
+              <a:defRPr sz="1500">
+                <a:solidFill>
+                  <a:srgbClr val="1F2937"/>
+                </a:solidFill>
+                <a:latin typeface="Calibri"/>
+              </a:defRPr>
+            </a:pPr>
+            <a:r>
+              <a:t>158+ unit tests covering all routers, services, and LLM providers</a:t>
             </a:r>
           </a:p>
           <a:p>
@@ -5413,15 +5447,15 @@
               <a:spcAft>
                 <a:spcPts val="800"/>
               </a:spcAft>
-              <a:defRPr sz="1600">
-                <a:solidFill>
-                  <a:srgbClr val="B0B0C8"/>
-                </a:solidFill>
-                <a:latin typeface="Calibri"/>
-              </a:defRPr>
-            </a:pPr>
-            <a:r>
-              <a:t>33 comprehensive E2E tests — real user flow simulation</a:t>
+              <a:defRPr sz="1500">
+                <a:solidFill>
+                  <a:srgbClr val="1F2937"/>
+                </a:solidFill>
+                <a:latin typeface="Calibri"/>
+              </a:defRPr>
+            </a:pPr>
+            <a:r>
+              <a:t>33 comprehensive end-to-end tests simulating real user flows</a:t>
             </a:r>
           </a:p>
           <a:p>
@@ -5429,15 +5463,15 @@
               <a:spcAft>
                 <a:spcPts val="800"/>
               </a:spcAft>
-              <a:defRPr sz="1600">
-                <a:solidFill>
-                  <a:srgbClr val="B0B0C8"/>
-                </a:solidFill>
-                <a:latin typeface="Calibri"/>
-              </a:defRPr>
-            </a:pPr>
-            <a:r>
-              <a:t>Mock LLM provider — full coverage without API keys</a:t>
+              <a:defRPr sz="1500">
+                <a:solidFill>
+                  <a:srgbClr val="1F2937"/>
+                </a:solidFill>
+                <a:latin typeface="Calibri"/>
+              </a:defRPr>
+            </a:pPr>
+            <a:r>
+              <a:t>Mock LLM enables full test coverage without external API keys</a:t>
             </a:r>
           </a:p>
           <a:p>
@@ -5445,15 +5479,15 @@
               <a:spcAft>
                 <a:spcPts val="800"/>
               </a:spcAft>
-              <a:defRPr sz="1600">
-                <a:solidFill>
-                  <a:srgbClr val="B0B0C8"/>
-                </a:solidFill>
-                <a:latin typeface="Calibri"/>
-              </a:defRPr>
-            </a:pPr>
-            <a:r>
-              <a:t>Ruff linter + mypy type checking in CI pipeline</a:t>
+              <a:defRPr sz="1500">
+                <a:solidFill>
+                  <a:srgbClr val="1F2937"/>
+                </a:solidFill>
+                <a:latin typeface="Calibri"/>
+              </a:defRPr>
+            </a:pPr>
+            <a:r>
+              <a:t>Ruff linter and mypy type checking enforced in CI</a:t>
             </a:r>
           </a:p>
           <a:p>
@@ -5461,15 +5495,15 @@
               <a:spcAft>
                 <a:spcPts val="800"/>
               </a:spcAft>
-              <a:defRPr sz="1600">
-                <a:solidFill>
-                  <a:srgbClr val="B0B0C8"/>
-                </a:solidFill>
-                <a:latin typeface="Calibri"/>
-              </a:defRPr>
-            </a:pPr>
-            <a:r>
-              <a:t>Coverage reports → reports/coverage/</a:t>
+              <a:defRPr sz="1500">
+                <a:solidFill>
+                  <a:srgbClr val="1F2937"/>
+                </a:solidFill>
+                <a:latin typeface="Calibri"/>
+              </a:defRPr>
+            </a:pPr>
+            <a:r>
+              <a:t>Coverage reports output to reports/coverage/</a:t>
             </a:r>
           </a:p>
           <a:p>
@@ -5477,37 +5511,37 @@
               <a:spcAft>
                 <a:spcPts val="800"/>
               </a:spcAft>
-              <a:defRPr sz="1600">
-                <a:solidFill>
-                  <a:srgbClr val="B0B0C8"/>
-                </a:solidFill>
-                <a:latin typeface="Calibri"/>
-              </a:defRPr>
-            </a:pPr>
-            <a:r>
-              <a:t>GitHub Actions: lint → test → e2e → docker build → deploy</a:t>
-            </a:r>
-          </a:p>
-        </p:txBody>
-      </p:sp>
-      <p:sp>
-        <p:nvSpPr>
-          <p:cNvPr id="7" name="Rounded Rectangle 6"/>
+              <a:defRPr sz="1500">
+                <a:solidFill>
+                  <a:srgbClr val="1F2937"/>
+                </a:solidFill>
+                <a:latin typeface="Calibri"/>
+              </a:defRPr>
+            </a:pPr>
+            <a:r>
+              <a:t>GitHub Actions workflow: lint → test → e2e → Docker build → deploy</a:t>
+            </a:r>
+          </a:p>
+        </p:txBody>
+      </p:sp>
+      <p:sp>
+        <p:nvSpPr>
+          <p:cNvPr id="8" name="Rounded Rectangle 7"/>
           <p:cNvSpPr/>
           <p:nvPr/>
         </p:nvSpPr>
         <p:spPr>
           <a:xfrm>
             <a:off x="731520" y="5029200"/>
-            <a:ext cx="2194560" cy="320040"/>
+            <a:ext cx="2011680" cy="365760"/>
           </a:xfrm>
           <a:prstGeom prst="roundRect">
             <a:avLst>
-              <a:gd name="adj" fmla="val 5000"/>
+              <a:gd name="adj" fmla="val 3000"/>
             </a:avLst>
           </a:prstGeom>
           <a:solidFill>
-            <a:srgbClr val="6C63FF"/>
+            <a:srgbClr val="2B6CE6"/>
           </a:solidFill>
           <a:ln>
             <a:noFill/>
@@ -5528,11 +5562,37 @@
           </a:fontRef>
         </p:style>
         <p:txBody>
-          <a:bodyPr rtlCol="0" anchor="ctr" wrap="none"/>
+          <a:bodyPr rtlCol="0" anchor="ctr"/>
+          <a:lstStyle/>
+          <a:p>
+            <a:pPr algn="ctr"/>
+          </a:p>
+        </p:txBody>
+      </p:sp>
+      <p:sp>
+        <p:nvSpPr>
+          <p:cNvPr id="9" name="TextBox 8"/>
+          <p:cNvSpPr txBox="1"/>
+          <p:nvPr/>
+        </p:nvSpPr>
+        <p:spPr>
+          <a:xfrm>
+            <a:off x="731520" y="5029200"/>
+            <a:ext cx="2011680" cy="365760"/>
+          </a:xfrm>
+          <a:prstGeom prst="rect">
+            <a:avLst/>
+          </a:prstGeom>
+          <a:noFill/>
+        </p:spPr>
+        <p:txBody>
+          <a:bodyPr wrap="square">
+            <a:spAutoFit/>
+          </a:bodyPr>
           <a:lstStyle/>
           <a:p>
             <a:pPr algn="ctr">
-              <a:defRPr sz="1000" b="1">
+              <a:defRPr sz="1200" b="1">
                 <a:solidFill>
                   <a:srgbClr val="FFFFFF"/>
                 </a:solidFill>
@@ -5547,22 +5607,22 @@
       </p:sp>
       <p:sp>
         <p:nvSpPr>
-          <p:cNvPr id="8" name="Rounded Rectangle 7"/>
+          <p:cNvPr id="10" name="Rounded Rectangle 9"/>
           <p:cNvSpPr/>
           <p:nvPr/>
         </p:nvSpPr>
         <p:spPr>
           <a:xfrm>
-            <a:off x="3200400" y="5029200"/>
-            <a:ext cx="2194560" cy="320040"/>
+            <a:off x="3291839" y="5029200"/>
+            <a:ext cx="2011680" cy="365760"/>
           </a:xfrm>
           <a:prstGeom prst="roundRect">
             <a:avLst>
-              <a:gd name="adj" fmla="val 5000"/>
+              <a:gd name="adj" fmla="val 3000"/>
             </a:avLst>
           </a:prstGeom>
           <a:solidFill>
-            <a:srgbClr val="00D4AA"/>
+            <a:srgbClr val="0EA59E"/>
           </a:solidFill>
           <a:ln>
             <a:noFill/>
@@ -5583,11 +5643,37 @@
           </a:fontRef>
         </p:style>
         <p:txBody>
-          <a:bodyPr rtlCol="0" anchor="ctr" wrap="none"/>
+          <a:bodyPr rtlCol="0" anchor="ctr"/>
+          <a:lstStyle/>
+          <a:p>
+            <a:pPr algn="ctr"/>
+          </a:p>
+        </p:txBody>
+      </p:sp>
+      <p:sp>
+        <p:nvSpPr>
+          <p:cNvPr id="11" name="TextBox 10"/>
+          <p:cNvSpPr txBox="1"/>
+          <p:nvPr/>
+        </p:nvSpPr>
+        <p:spPr>
+          <a:xfrm>
+            <a:off x="3291839" y="5029200"/>
+            <a:ext cx="2011680" cy="365760"/>
+          </a:xfrm>
+          <a:prstGeom prst="rect">
+            <a:avLst/>
+          </a:prstGeom>
+          <a:noFill/>
+        </p:spPr>
+        <p:txBody>
+          <a:bodyPr wrap="square">
+            <a:spAutoFit/>
+          </a:bodyPr>
           <a:lstStyle/>
           <a:p>
             <a:pPr algn="ctr">
-              <a:defRPr sz="1000" b="1">
+              <a:defRPr sz="1200" b="1">
                 <a:solidFill>
                   <a:srgbClr val="FFFFFF"/>
                 </a:solidFill>
@@ -5602,22 +5688,22 @@
       </p:sp>
       <p:sp>
         <p:nvSpPr>
-          <p:cNvPr id="9" name="Rounded Rectangle 8"/>
+          <p:cNvPr id="12" name="Rounded Rectangle 11"/>
           <p:cNvSpPr/>
           <p:nvPr/>
         </p:nvSpPr>
         <p:spPr>
           <a:xfrm>
-            <a:off x="5669280" y="5029200"/>
-            <a:ext cx="2194560" cy="320040"/>
+            <a:off x="5852159" y="5029200"/>
+            <a:ext cx="2011680" cy="365760"/>
           </a:xfrm>
           <a:prstGeom prst="roundRect">
             <a:avLst>
-              <a:gd name="adj" fmla="val 5000"/>
+              <a:gd name="adj" fmla="val 3000"/>
             </a:avLst>
           </a:prstGeom>
           <a:solidFill>
-            <a:srgbClr val="FF6B6B"/>
+            <a:srgbClr val="F59E0B"/>
           </a:solidFill>
           <a:ln>
             <a:noFill/>
@@ -5638,33 +5724,23 @@
           </a:fontRef>
         </p:style>
         <p:txBody>
-          <a:bodyPr rtlCol="0" anchor="ctr" wrap="none"/>
-          <a:lstStyle/>
-          <a:p>
-            <a:pPr algn="ctr">
-              <a:defRPr sz="1000" b="1">
-                <a:solidFill>
-                  <a:srgbClr val="FFFFFF"/>
-                </a:solidFill>
-                <a:latin typeface="Calibri"/>
-              </a:defRPr>
-            </a:pPr>
-            <a:r>
-              <a:t>mypy</a:t>
-            </a:r>
-          </a:p>
-        </p:txBody>
-      </p:sp>
-      <p:sp>
-        <p:nvSpPr>
-          <p:cNvPr id="10" name="TextBox 9"/>
+          <a:bodyPr rtlCol="0" anchor="ctr"/>
+          <a:lstStyle/>
+          <a:p>
+            <a:pPr algn="ctr"/>
+          </a:p>
+        </p:txBody>
+      </p:sp>
+      <p:sp>
+        <p:nvSpPr>
+          <p:cNvPr id="13" name="TextBox 12"/>
           <p:cNvSpPr txBox="1"/>
           <p:nvPr/>
         </p:nvSpPr>
         <p:spPr>
           <a:xfrm>
-            <a:off x="10972800" y="6400800"/>
-            <a:ext cx="914400" cy="274320"/>
+            <a:off x="5852159" y="5029200"/>
+            <a:ext cx="2011680" cy="365760"/>
           </a:xfrm>
           <a:prstGeom prst="rect">
             <a:avLst/>
@@ -5677,16 +5753,16 @@
           </a:bodyPr>
           <a:lstStyle/>
           <a:p>
-            <a:pPr algn="r">
-              <a:defRPr sz="1000" b="0">
-                <a:solidFill>
-                  <a:srgbClr val="6B6B8A"/>
-                </a:solidFill>
-                <a:latin typeface="Calibri"/>
-              </a:defRPr>
-            </a:pPr>
-            <a:r>
-              <a:t>14 / 16</a:t>
+            <a:pPr algn="ctr">
+              <a:defRPr sz="1200" b="1">
+                <a:solidFill>
+                  <a:srgbClr val="FFFFFF"/>
+                </a:solidFill>
+                <a:latin typeface="Calibri"/>
+              </a:defRPr>
+            </a:pPr>
+            <a:r>
+              <a:t>mypy</a:t>
             </a:r>
           </a:p>
         </p:txBody>
@@ -5705,7 +5781,7 @@
     <p:bg>
       <p:bgPr>
         <a:solidFill>
-          <a:srgbClr val="0B0B1A"/>
+          <a:srgbClr val="1E3A5F"/>
         </a:solidFill>
         <a:effectLst/>
       </p:bgPr>
@@ -5719,56 +5795,20 @@
       <p:grpSpPr/>
       <p:sp>
         <p:nvSpPr>
-          <p:cNvPr id="2" name="TextBox 1"/>
-          <p:cNvSpPr txBox="1"/>
-          <p:nvPr/>
-        </p:nvSpPr>
-        <p:spPr>
-          <a:xfrm>
-            <a:off x="731520" y="274320"/>
-            <a:ext cx="5486400" cy="365760"/>
-          </a:xfrm>
-          <a:prstGeom prst="rect">
-            <a:avLst/>
-          </a:prstGeom>
-          <a:noFill/>
-        </p:spPr>
-        <p:txBody>
-          <a:bodyPr wrap="square">
-            <a:spAutoFit/>
-          </a:bodyPr>
-          <a:lstStyle/>
-          <a:p>
-            <a:pPr algn="l">
-              <a:defRPr sz="1200" b="1">
-                <a:solidFill>
-                  <a:srgbClr val="00D4AA"/>
-                </a:solidFill>
-                <a:latin typeface="Calibri"/>
-              </a:defRPr>
-            </a:pPr>
-            <a:r>
-              <a:t>TECHNOLOGY</a:t>
-            </a:r>
-          </a:p>
-        </p:txBody>
-      </p:sp>
-      <p:sp>
-        <p:nvSpPr>
-          <p:cNvPr id="3" name="Rectangle 2"/>
+          <p:cNvPr id="2" name="Rectangle 1"/>
           <p:cNvSpPr/>
           <p:nvPr/>
         </p:nvSpPr>
         <p:spPr>
           <a:xfrm>
-            <a:off x="731520" y="640080"/>
-            <a:ext cx="1097280" cy="50800"/>
+            <a:off x="0" y="0"/>
+            <a:ext cx="12191695" cy="6858000"/>
           </a:xfrm>
           <a:prstGeom prst="rect">
             <a:avLst/>
           </a:prstGeom>
           <a:solidFill>
-            <a:srgbClr val="00D4AA"/>
+            <a:srgbClr val="1E3A5F"/>
           </a:solidFill>
           <a:ln>
             <a:noFill/>
@@ -5798,58 +5838,20 @@
       </p:sp>
       <p:sp>
         <p:nvSpPr>
-          <p:cNvPr id="4" name="TextBox 3"/>
-          <p:cNvSpPr txBox="1"/>
-          <p:nvPr/>
-        </p:nvSpPr>
-        <p:spPr>
-          <a:xfrm>
-            <a:off x="731520" y="1005840"/>
-            <a:ext cx="10058400" cy="914400"/>
-          </a:xfrm>
-          <a:prstGeom prst="rect">
-            <a:avLst/>
-          </a:prstGeom>
-          <a:noFill/>
-        </p:spPr>
-        <p:txBody>
-          <a:bodyPr wrap="square">
-            <a:spAutoFit/>
-          </a:bodyPr>
-          <a:lstStyle/>
-          <a:p>
-            <a:pPr algn="l">
-              <a:defRPr sz="4000" b="1">
-                <a:solidFill>
-                  <a:srgbClr val="FFFFFF"/>
-                </a:solidFill>
-                <a:latin typeface="Calibri"/>
-              </a:defRPr>
-            </a:pPr>
-            <a:r>
-              <a:t>Tech Stack</a:t>
-            </a:r>
-          </a:p>
-        </p:txBody>
-      </p:sp>
-      <p:sp>
-        <p:nvSpPr>
-          <p:cNvPr id="5" name="Rounded Rectangle 4"/>
+          <p:cNvPr id="3" name="Rectangle 2"/>
           <p:cNvSpPr/>
           <p:nvPr/>
         </p:nvSpPr>
         <p:spPr>
           <a:xfrm>
-            <a:off x="731520" y="2011680"/>
-            <a:ext cx="1645920" cy="411480"/>
-          </a:xfrm>
-          <a:prstGeom prst="roundRect">
-            <a:avLst>
-              <a:gd name="adj" fmla="val 3000"/>
-            </a:avLst>
+            <a:off x="5029200" y="3200400"/>
+            <a:ext cx="2286000" cy="63500"/>
+          </a:xfrm>
+          <a:prstGeom prst="rect">
+            <a:avLst/>
           </a:prstGeom>
           <a:solidFill>
-            <a:srgbClr val="6C63FF"/>
+            <a:srgbClr val="2B6CE6"/>
           </a:solidFill>
           <a:ln>
             <a:noFill/>
@@ -5879,14 +5881,14 @@
       </p:sp>
       <p:sp>
         <p:nvSpPr>
-          <p:cNvPr id="6" name="TextBox 5"/>
+          <p:cNvPr id="4" name="TextBox 3"/>
           <p:cNvSpPr txBox="1"/>
           <p:nvPr/>
         </p:nvSpPr>
         <p:spPr>
           <a:xfrm>
-            <a:off x="731520" y="2011680"/>
-            <a:ext cx="1645920" cy="411480"/>
+            <a:off x="731520" y="1828800"/>
+            <a:ext cx="10515600" cy="1097280"/>
           </a:xfrm>
           <a:prstGeom prst="rect">
             <a:avLst/>
@@ -5900,7 +5902,7 @@
           <a:lstStyle/>
           <a:p>
             <a:pPr algn="ctr">
-              <a:defRPr sz="1200" b="1">
+              <a:defRPr sz="5600" b="1">
                 <a:solidFill>
                   <a:srgbClr val="FFFFFF"/>
                 </a:solidFill>
@@ -5908,21 +5910,21 @@
               </a:defRPr>
             </a:pPr>
             <a:r>
-              <a:t>Runtime</a:t>
-            </a:r>
-          </a:p>
-        </p:txBody>
-      </p:sp>
-      <p:sp>
-        <p:nvSpPr>
-          <p:cNvPr id="7" name="TextBox 6"/>
+              <a:t>Thank You</a:t>
+            </a:r>
+          </a:p>
+        </p:txBody>
+      </p:sp>
+      <p:sp>
+        <p:nvSpPr>
+          <p:cNvPr id="5" name="TextBox 4"/>
           <p:cNvSpPr txBox="1"/>
           <p:nvPr/>
         </p:nvSpPr>
         <p:spPr>
           <a:xfrm>
-            <a:off x="2651760" y="2049780"/>
-            <a:ext cx="8229600" cy="365760"/>
+            <a:off x="731520" y="3566160"/>
+            <a:ext cx="10515600" cy="457200"/>
           </a:xfrm>
           <a:prstGeom prst="rect">
             <a:avLst/>
@@ -5935,75 +5937,30 @@
           </a:bodyPr>
           <a:lstStyle/>
           <a:p>
-            <a:pPr algn="l">
-              <a:defRPr sz="1400" b="0">
-                <a:solidFill>
-                  <a:srgbClr val="B0B0C8"/>
-                </a:solidFill>
-                <a:latin typeface="Calibri"/>
-              </a:defRPr>
-            </a:pPr>
-            <a:r>
-              <a:t>Python 3.11+ · FastAPI · Uvicorn · SSE-Starlette</a:t>
-            </a:r>
-          </a:p>
-        </p:txBody>
-      </p:sp>
-      <p:sp>
-        <p:nvSpPr>
-          <p:cNvPr id="8" name="Rounded Rectangle 7"/>
-          <p:cNvSpPr/>
-          <p:nvPr/>
-        </p:nvSpPr>
-        <p:spPr>
-          <a:xfrm>
-            <a:off x="731520" y="2651760"/>
-            <a:ext cx="1645920" cy="411480"/>
-          </a:xfrm>
-          <a:prstGeom prst="roundRect">
-            <a:avLst>
-              <a:gd name="adj" fmla="val 3000"/>
-            </a:avLst>
-          </a:prstGeom>
-          <a:solidFill>
-            <a:srgbClr val="6C63FF"/>
-          </a:solidFill>
-          <a:ln>
-            <a:noFill/>
-          </a:ln>
-        </p:spPr>
-        <p:style>
-          <a:lnRef idx="1">
-            <a:schemeClr val="accent1"/>
-          </a:lnRef>
-          <a:fillRef idx="3">
-            <a:schemeClr val="accent1"/>
-          </a:fillRef>
-          <a:effectRef idx="2">
-            <a:schemeClr val="accent1"/>
-          </a:effectRef>
-          <a:fontRef idx="minor">
-            <a:schemeClr val="lt1"/>
-          </a:fontRef>
-        </p:style>
-        <p:txBody>
-          <a:bodyPr rtlCol="0" anchor="ctr"/>
-          <a:lstStyle/>
-          <a:p>
-            <a:pPr algn="ctr"/>
-          </a:p>
-        </p:txBody>
-      </p:sp>
-      <p:sp>
-        <p:nvSpPr>
-          <p:cNvPr id="9" name="TextBox 8"/>
+            <a:pPr algn="ctr">
+              <a:defRPr sz="1800" b="0">
+                <a:solidFill>
+                  <a:srgbClr val="90AACC"/>
+                </a:solidFill>
+                <a:latin typeface="Calibri"/>
+              </a:defRPr>
+            </a:pPr>
+            <a:r>
+              <a:t>Nexus — Open-Source Omnichannel AI Agent Platform</a:t>
+            </a:r>
+          </a:p>
+        </p:txBody>
+      </p:sp>
+      <p:sp>
+        <p:nvSpPr>
+          <p:cNvPr id="6" name="TextBox 5"/>
           <p:cNvSpPr txBox="1"/>
           <p:nvPr/>
         </p:nvSpPr>
         <p:spPr>
           <a:xfrm>
-            <a:off x="731520" y="2651760"/>
-            <a:ext cx="1645920" cy="411480"/>
+            <a:off x="731520" y="4389120"/>
+            <a:ext cx="10515600" cy="365760"/>
           </a:xfrm>
           <a:prstGeom prst="rect">
             <a:avLst/>
@@ -6017,29 +5974,29 @@
           <a:lstStyle/>
           <a:p>
             <a:pPr algn="ctr">
-              <a:defRPr sz="1200" b="1">
-                <a:solidFill>
-                  <a:srgbClr val="FFFFFF"/>
-                </a:solidFill>
-                <a:latin typeface="Calibri"/>
-              </a:defRPr>
-            </a:pPr>
-            <a:r>
-              <a:t>LLM</a:t>
-            </a:r>
-          </a:p>
-        </p:txBody>
-      </p:sp>
-      <p:sp>
-        <p:nvSpPr>
-          <p:cNvPr id="10" name="TextBox 9"/>
+              <a:defRPr sz="1300" b="0">
+                <a:solidFill>
+                  <a:srgbClr val="6080A0"/>
+                </a:solidFill>
+                <a:latin typeface="Calibri"/>
+              </a:defRPr>
+            </a:pPr>
+            <a:r>
+              <a:t>MIT License  ·  github.com/ShubhamRSY/voice-agents</a:t>
+            </a:r>
+          </a:p>
+        </p:txBody>
+      </p:sp>
+      <p:sp>
+        <p:nvSpPr>
+          <p:cNvPr id="7" name="TextBox 6"/>
           <p:cNvSpPr txBox="1"/>
           <p:nvPr/>
         </p:nvSpPr>
         <p:spPr>
           <a:xfrm>
-            <a:off x="2651760" y="2689860"/>
-            <a:ext cx="8229600" cy="365760"/>
+            <a:off x="731520" y="4846320"/>
+            <a:ext cx="10515600" cy="365760"/>
           </a:xfrm>
           <a:prstGeom prst="rect">
             <a:avLst/>
@@ -6052,1015 +6009,16 @@
           </a:bodyPr>
           <a:lstStyle/>
           <a:p>
-            <a:pPr algn="l">
-              <a:defRPr sz="1400" b="0">
-                <a:solidFill>
-                  <a:srgbClr val="B0B0C8"/>
-                </a:solidFill>
-                <a:latin typeface="Calibri"/>
-              </a:defRPr>
-            </a:pPr>
-            <a:r>
-              <a:t>OpenAI · Anthropic · Google Gemini · Mock Provider</a:t>
-            </a:r>
-          </a:p>
-        </p:txBody>
-      </p:sp>
-      <p:sp>
-        <p:nvSpPr>
-          <p:cNvPr id="11" name="Rounded Rectangle 10"/>
-          <p:cNvSpPr/>
-          <p:nvPr/>
-        </p:nvSpPr>
-        <p:spPr>
-          <a:xfrm>
-            <a:off x="731520" y="3291840"/>
-            <a:ext cx="1645920" cy="411480"/>
-          </a:xfrm>
-          <a:prstGeom prst="roundRect">
-            <a:avLst>
-              <a:gd name="adj" fmla="val 3000"/>
-            </a:avLst>
-          </a:prstGeom>
-          <a:solidFill>
-            <a:srgbClr val="6C63FF"/>
-          </a:solidFill>
-          <a:ln>
-            <a:noFill/>
-          </a:ln>
-        </p:spPr>
-        <p:style>
-          <a:lnRef idx="1">
-            <a:schemeClr val="accent1"/>
-          </a:lnRef>
-          <a:fillRef idx="3">
-            <a:schemeClr val="accent1"/>
-          </a:fillRef>
-          <a:effectRef idx="2">
-            <a:schemeClr val="accent1"/>
-          </a:effectRef>
-          <a:fontRef idx="minor">
-            <a:schemeClr val="lt1"/>
-          </a:fontRef>
-        </p:style>
-        <p:txBody>
-          <a:bodyPr rtlCol="0" anchor="ctr"/>
-          <a:lstStyle/>
-          <a:p>
-            <a:pPr algn="ctr"/>
-          </a:p>
-        </p:txBody>
-      </p:sp>
-      <p:sp>
-        <p:nvSpPr>
-          <p:cNvPr id="12" name="TextBox 11"/>
-          <p:cNvSpPr txBox="1"/>
-          <p:nvPr/>
-        </p:nvSpPr>
-        <p:spPr>
-          <a:xfrm>
-            <a:off x="731520" y="3291840"/>
-            <a:ext cx="1645920" cy="411480"/>
-          </a:xfrm>
-          <a:prstGeom prst="rect">
-            <a:avLst/>
-          </a:prstGeom>
-          <a:noFill/>
-        </p:spPr>
-        <p:txBody>
-          <a:bodyPr wrap="square">
-            <a:spAutoFit/>
-          </a:bodyPr>
-          <a:lstStyle/>
-          <a:p>
             <a:pPr algn="ctr">
-              <a:defRPr sz="1200" b="1">
-                <a:solidFill>
-                  <a:srgbClr val="FFFFFF"/>
-                </a:solidFill>
-                <a:latin typeface="Calibri"/>
-              </a:defRPr>
-            </a:pPr>
-            <a:r>
-              <a:t>Voice</a:t>
-            </a:r>
-          </a:p>
-        </p:txBody>
-      </p:sp>
-      <p:sp>
-        <p:nvSpPr>
-          <p:cNvPr id="13" name="TextBox 12"/>
-          <p:cNvSpPr txBox="1"/>
-          <p:nvPr/>
-        </p:nvSpPr>
-        <p:spPr>
-          <a:xfrm>
-            <a:off x="2651760" y="3329940"/>
-            <a:ext cx="8229600" cy="365760"/>
-          </a:xfrm>
-          <a:prstGeom prst="rect">
-            <a:avLst/>
-          </a:prstGeom>
-          <a:noFill/>
-        </p:spPr>
-        <p:txBody>
-          <a:bodyPr wrap="square">
-            <a:spAutoFit/>
-          </a:bodyPr>
-          <a:lstStyle/>
-          <a:p>
-            <a:pPr algn="l">
-              <a:defRPr sz="1400" b="0">
-                <a:solidFill>
-                  <a:srgbClr val="B0B0C8"/>
-                </a:solidFill>
-                <a:latin typeface="Calibri"/>
-              </a:defRPr>
-            </a:pPr>
-            <a:r>
-              <a:t>Twilio · Amazon Connect · Deepgram · ElevenLabs</a:t>
-            </a:r>
-          </a:p>
-        </p:txBody>
-      </p:sp>
-      <p:sp>
-        <p:nvSpPr>
-          <p:cNvPr id="14" name="Rounded Rectangle 13"/>
-          <p:cNvSpPr/>
-          <p:nvPr/>
-        </p:nvSpPr>
-        <p:spPr>
-          <a:xfrm>
-            <a:off x="731520" y="3931920"/>
-            <a:ext cx="1645920" cy="411480"/>
-          </a:xfrm>
-          <a:prstGeom prst="roundRect">
-            <a:avLst>
-              <a:gd name="adj" fmla="val 3000"/>
-            </a:avLst>
-          </a:prstGeom>
-          <a:solidFill>
-            <a:srgbClr val="6C63FF"/>
-          </a:solidFill>
-          <a:ln>
-            <a:noFill/>
-          </a:ln>
-        </p:spPr>
-        <p:style>
-          <a:lnRef idx="1">
-            <a:schemeClr val="accent1"/>
-          </a:lnRef>
-          <a:fillRef idx="3">
-            <a:schemeClr val="accent1"/>
-          </a:fillRef>
-          <a:effectRef idx="2">
-            <a:schemeClr val="accent1"/>
-          </a:effectRef>
-          <a:fontRef idx="minor">
-            <a:schemeClr val="lt1"/>
-          </a:fontRef>
-        </p:style>
-        <p:txBody>
-          <a:bodyPr rtlCol="0" anchor="ctr"/>
-          <a:lstStyle/>
-          <a:p>
-            <a:pPr algn="ctr"/>
-          </a:p>
-        </p:txBody>
-      </p:sp>
-      <p:sp>
-        <p:nvSpPr>
-          <p:cNvPr id="15" name="TextBox 14"/>
-          <p:cNvSpPr txBox="1"/>
-          <p:nvPr/>
-        </p:nvSpPr>
-        <p:spPr>
-          <a:xfrm>
-            <a:off x="731520" y="3931920"/>
-            <a:ext cx="1645920" cy="411480"/>
-          </a:xfrm>
-          <a:prstGeom prst="rect">
-            <a:avLst/>
-          </a:prstGeom>
-          <a:noFill/>
-        </p:spPr>
-        <p:txBody>
-          <a:bodyPr wrap="square">
-            <a:spAutoFit/>
-          </a:bodyPr>
-          <a:lstStyle/>
-          <a:p>
-            <a:pPr algn="ctr">
-              <a:defRPr sz="1200" b="1">
-                <a:solidFill>
-                  <a:srgbClr val="FFFFFF"/>
-                </a:solidFill>
-                <a:latin typeface="Calibri"/>
-              </a:defRPr>
-            </a:pPr>
-            <a:r>
-              <a:t>Data</a:t>
-            </a:r>
-          </a:p>
-        </p:txBody>
-      </p:sp>
-      <p:sp>
-        <p:nvSpPr>
-          <p:cNvPr id="16" name="TextBox 15"/>
-          <p:cNvSpPr txBox="1"/>
-          <p:nvPr/>
-        </p:nvSpPr>
-        <p:spPr>
-          <a:xfrm>
-            <a:off x="2651760" y="3970020"/>
-            <a:ext cx="8229600" cy="365760"/>
-          </a:xfrm>
-          <a:prstGeom prst="rect">
-            <a:avLst/>
-          </a:prstGeom>
-          <a:noFill/>
-        </p:spPr>
-        <p:txBody>
-          <a:bodyPr wrap="square">
-            <a:spAutoFit/>
-          </a:bodyPr>
-          <a:lstStyle/>
-          <a:p>
-            <a:pPr algn="l">
-              <a:defRPr sz="1400" b="0">
-                <a:solidFill>
-                  <a:srgbClr val="B0B0C8"/>
-                </a:solidFill>
-                <a:latin typeface="Calibri"/>
-              </a:defRPr>
-            </a:pPr>
-            <a:r>
-              <a:t>RAG (Vector) · PostgreSQL · Redis · Pydantic</a:t>
-            </a:r>
-          </a:p>
-        </p:txBody>
-      </p:sp>
-      <p:sp>
-        <p:nvSpPr>
-          <p:cNvPr id="17" name="Rounded Rectangle 16"/>
-          <p:cNvSpPr/>
-          <p:nvPr/>
-        </p:nvSpPr>
-        <p:spPr>
-          <a:xfrm>
-            <a:off x="731520" y="4572000"/>
-            <a:ext cx="1645920" cy="411480"/>
-          </a:xfrm>
-          <a:prstGeom prst="roundRect">
-            <a:avLst>
-              <a:gd name="adj" fmla="val 3000"/>
-            </a:avLst>
-          </a:prstGeom>
-          <a:solidFill>
-            <a:srgbClr val="6C63FF"/>
-          </a:solidFill>
-          <a:ln>
-            <a:noFill/>
-          </a:ln>
-        </p:spPr>
-        <p:style>
-          <a:lnRef idx="1">
-            <a:schemeClr val="accent1"/>
-          </a:lnRef>
-          <a:fillRef idx="3">
-            <a:schemeClr val="accent1"/>
-          </a:fillRef>
-          <a:effectRef idx="2">
-            <a:schemeClr val="accent1"/>
-          </a:effectRef>
-          <a:fontRef idx="minor">
-            <a:schemeClr val="lt1"/>
-          </a:fontRef>
-        </p:style>
-        <p:txBody>
-          <a:bodyPr rtlCol="0" anchor="ctr"/>
-          <a:lstStyle/>
-          <a:p>
-            <a:pPr algn="ctr"/>
-          </a:p>
-        </p:txBody>
-      </p:sp>
-      <p:sp>
-        <p:nvSpPr>
-          <p:cNvPr id="18" name="TextBox 17"/>
-          <p:cNvSpPr txBox="1"/>
-          <p:nvPr/>
-        </p:nvSpPr>
-        <p:spPr>
-          <a:xfrm>
-            <a:off x="731520" y="4572000"/>
-            <a:ext cx="1645920" cy="411480"/>
-          </a:xfrm>
-          <a:prstGeom prst="rect">
-            <a:avLst/>
-          </a:prstGeom>
-          <a:noFill/>
-        </p:spPr>
-        <p:txBody>
-          <a:bodyPr wrap="square">
-            <a:spAutoFit/>
-          </a:bodyPr>
-          <a:lstStyle/>
-          <a:p>
-            <a:pPr algn="ctr">
-              <a:defRPr sz="1200" b="1">
-                <a:solidFill>
-                  <a:srgbClr val="FFFFFF"/>
-                </a:solidFill>
-                <a:latin typeface="Calibri"/>
-              </a:defRPr>
-            </a:pPr>
-            <a:r>
-              <a:t>Frontend</a:t>
-            </a:r>
-          </a:p>
-        </p:txBody>
-      </p:sp>
-      <p:sp>
-        <p:nvSpPr>
-          <p:cNvPr id="19" name="TextBox 18"/>
-          <p:cNvSpPr txBox="1"/>
-          <p:nvPr/>
-        </p:nvSpPr>
-        <p:spPr>
-          <a:xfrm>
-            <a:off x="2651760" y="4610100"/>
-            <a:ext cx="8229600" cy="365760"/>
-          </a:xfrm>
-          <a:prstGeom prst="rect">
-            <a:avLst/>
-          </a:prstGeom>
-          <a:noFill/>
-        </p:spPr>
-        <p:txBody>
-          <a:bodyPr wrap="square">
-            <a:spAutoFit/>
-          </a:bodyPr>
-          <a:lstStyle/>
-          <a:p>
-            <a:pPr algn="l">
-              <a:defRPr sz="1400" b="0">
-                <a:solidFill>
-                  <a:srgbClr val="B0B0C8"/>
-                </a:solidFill>
-                <a:latin typeface="Calibri"/>
-              </a:defRPr>
-            </a:pPr>
-            <a:r>
-              <a:t>Vanilla JS · CSS · HTML · SSE Streaming</a:t>
-            </a:r>
-          </a:p>
-        </p:txBody>
-      </p:sp>
-      <p:sp>
-        <p:nvSpPr>
-          <p:cNvPr id="20" name="Rounded Rectangle 19"/>
-          <p:cNvSpPr/>
-          <p:nvPr/>
-        </p:nvSpPr>
-        <p:spPr>
-          <a:xfrm>
-            <a:off x="731520" y="5212080"/>
-            <a:ext cx="1645920" cy="411480"/>
-          </a:xfrm>
-          <a:prstGeom prst="roundRect">
-            <a:avLst>
-              <a:gd name="adj" fmla="val 3000"/>
-            </a:avLst>
-          </a:prstGeom>
-          <a:solidFill>
-            <a:srgbClr val="6C63FF"/>
-          </a:solidFill>
-          <a:ln>
-            <a:noFill/>
-          </a:ln>
-        </p:spPr>
-        <p:style>
-          <a:lnRef idx="1">
-            <a:schemeClr val="accent1"/>
-          </a:lnRef>
-          <a:fillRef idx="3">
-            <a:schemeClr val="accent1"/>
-          </a:fillRef>
-          <a:effectRef idx="2">
-            <a:schemeClr val="accent1"/>
-          </a:effectRef>
-          <a:fontRef idx="minor">
-            <a:schemeClr val="lt1"/>
-          </a:fontRef>
-        </p:style>
-        <p:txBody>
-          <a:bodyPr rtlCol="0" anchor="ctr"/>
-          <a:lstStyle/>
-          <a:p>
-            <a:pPr algn="ctr"/>
-          </a:p>
-        </p:txBody>
-      </p:sp>
-      <p:sp>
-        <p:nvSpPr>
-          <p:cNvPr id="21" name="TextBox 20"/>
-          <p:cNvSpPr txBox="1"/>
-          <p:nvPr/>
-        </p:nvSpPr>
-        <p:spPr>
-          <a:xfrm>
-            <a:off x="731520" y="5212080"/>
-            <a:ext cx="1645920" cy="411480"/>
-          </a:xfrm>
-          <a:prstGeom prst="rect">
-            <a:avLst/>
-          </a:prstGeom>
-          <a:noFill/>
-        </p:spPr>
-        <p:txBody>
-          <a:bodyPr wrap="square">
-            <a:spAutoFit/>
-          </a:bodyPr>
-          <a:lstStyle/>
-          <a:p>
-            <a:pPr algn="ctr">
-              <a:defRPr sz="1200" b="1">
-                <a:solidFill>
-                  <a:srgbClr val="FFFFFF"/>
-                </a:solidFill>
-                <a:latin typeface="Calibri"/>
-              </a:defRPr>
-            </a:pPr>
-            <a:r>
-              <a:t>Infra</a:t>
-            </a:r>
-          </a:p>
-        </p:txBody>
-      </p:sp>
-      <p:sp>
-        <p:nvSpPr>
-          <p:cNvPr id="22" name="TextBox 21"/>
-          <p:cNvSpPr txBox="1"/>
-          <p:nvPr/>
-        </p:nvSpPr>
-        <p:spPr>
-          <a:xfrm>
-            <a:off x="2651760" y="5250180"/>
-            <a:ext cx="8229600" cy="365760"/>
-          </a:xfrm>
-          <a:prstGeom prst="rect">
-            <a:avLst/>
-          </a:prstGeom>
-          <a:noFill/>
-        </p:spPr>
-        <p:txBody>
-          <a:bodyPr wrap="square">
-            <a:spAutoFit/>
-          </a:bodyPr>
-          <a:lstStyle/>
-          <a:p>
-            <a:pPr algn="l">
-              <a:defRPr sz="1400" b="0">
-                <a:solidFill>
-                  <a:srgbClr val="B0B0C8"/>
-                </a:solidFill>
-                <a:latin typeface="Calibri"/>
-              </a:defRPr>
-            </a:pPr>
-            <a:r>
-              <a:t>Docker · GitHub Actions · n8n · Zapier</a:t>
-            </a:r>
-          </a:p>
-        </p:txBody>
-      </p:sp>
-      <p:sp>
-        <p:nvSpPr>
-          <p:cNvPr id="23" name="Rounded Rectangle 22"/>
-          <p:cNvSpPr/>
-          <p:nvPr/>
-        </p:nvSpPr>
-        <p:spPr>
-          <a:xfrm>
-            <a:off x="731520" y="5852159"/>
-            <a:ext cx="1645920" cy="411480"/>
-          </a:xfrm>
-          <a:prstGeom prst="roundRect">
-            <a:avLst>
-              <a:gd name="adj" fmla="val 3000"/>
-            </a:avLst>
-          </a:prstGeom>
-          <a:solidFill>
-            <a:srgbClr val="6C63FF"/>
-          </a:solidFill>
-          <a:ln>
-            <a:noFill/>
-          </a:ln>
-        </p:spPr>
-        <p:style>
-          <a:lnRef idx="1">
-            <a:schemeClr val="accent1"/>
-          </a:lnRef>
-          <a:fillRef idx="3">
-            <a:schemeClr val="accent1"/>
-          </a:fillRef>
-          <a:effectRef idx="2">
-            <a:schemeClr val="accent1"/>
-          </a:effectRef>
-          <a:fontRef idx="minor">
-            <a:schemeClr val="lt1"/>
-          </a:fontRef>
-        </p:style>
-        <p:txBody>
-          <a:bodyPr rtlCol="0" anchor="ctr"/>
-          <a:lstStyle/>
-          <a:p>
-            <a:pPr algn="ctr"/>
-          </a:p>
-        </p:txBody>
-      </p:sp>
-      <p:sp>
-        <p:nvSpPr>
-          <p:cNvPr id="24" name="TextBox 23"/>
-          <p:cNvSpPr txBox="1"/>
-          <p:nvPr/>
-        </p:nvSpPr>
-        <p:spPr>
-          <a:xfrm>
-            <a:off x="731520" y="5852159"/>
-            <a:ext cx="1645920" cy="411480"/>
-          </a:xfrm>
-          <a:prstGeom prst="rect">
-            <a:avLst/>
-          </a:prstGeom>
-          <a:noFill/>
-        </p:spPr>
-        <p:txBody>
-          <a:bodyPr wrap="square">
-            <a:spAutoFit/>
-          </a:bodyPr>
-          <a:lstStyle/>
-          <a:p>
-            <a:pPr algn="ctr">
-              <a:defRPr sz="1200" b="1">
-                <a:solidFill>
-                  <a:srgbClr val="FFFFFF"/>
-                </a:solidFill>
-                <a:latin typeface="Calibri"/>
-              </a:defRPr>
-            </a:pPr>
-            <a:r>
-              <a:t>Security</a:t>
-            </a:r>
-          </a:p>
-        </p:txBody>
-      </p:sp>
-      <p:sp>
-        <p:nvSpPr>
-          <p:cNvPr id="25" name="TextBox 24"/>
-          <p:cNvSpPr txBox="1"/>
-          <p:nvPr/>
-        </p:nvSpPr>
-        <p:spPr>
-          <a:xfrm>
-            <a:off x="2651760" y="5890259"/>
-            <a:ext cx="8229600" cy="365760"/>
-          </a:xfrm>
-          <a:prstGeom prst="rect">
-            <a:avLst/>
-          </a:prstGeom>
-          <a:noFill/>
-        </p:spPr>
-        <p:txBody>
-          <a:bodyPr wrap="square">
-            <a:spAutoFit/>
-          </a:bodyPr>
-          <a:lstStyle/>
-          <a:p>
-            <a:pPr algn="l">
-              <a:defRPr sz="1400" b="0">
-                <a:solidFill>
-                  <a:srgbClr val="B0B0C8"/>
-                </a:solidFill>
-                <a:latin typeface="Calibri"/>
-              </a:defRPr>
-            </a:pPr>
-            <a:r>
-              <a:t>AES-256-GCM · JWT · CORS · Pydantic Validation</a:t>
-            </a:r>
-          </a:p>
-        </p:txBody>
-      </p:sp>
-      <p:sp>
-        <p:nvSpPr>
-          <p:cNvPr id="26" name="TextBox 25"/>
-          <p:cNvSpPr txBox="1"/>
-          <p:nvPr/>
-        </p:nvSpPr>
-        <p:spPr>
-          <a:xfrm>
-            <a:off x="10972800" y="6400800"/>
-            <a:ext cx="914400" cy="274320"/>
-          </a:xfrm>
-          <a:prstGeom prst="rect">
-            <a:avLst/>
-          </a:prstGeom>
-          <a:noFill/>
-        </p:spPr>
-        <p:txBody>
-          <a:bodyPr wrap="square">
-            <a:spAutoFit/>
-          </a:bodyPr>
-          <a:lstStyle/>
-          <a:p>
-            <a:pPr algn="r">
-              <a:defRPr sz="1000" b="0">
-                <a:solidFill>
-                  <a:srgbClr val="6B6B8A"/>
-                </a:solidFill>
-                <a:latin typeface="Calibri"/>
-              </a:defRPr>
-            </a:pPr>
-            <a:r>
-              <a:t>15 / 16</a:t>
-            </a:r>
-          </a:p>
-        </p:txBody>
-      </p:sp>
-    </p:spTree>
-  </p:cSld>
-  <p:clrMapOvr>
-    <a:masterClrMapping/>
-  </p:clrMapOvr>
-</p:sld>
-</file>
-
-<file path=ppt/slides/slide16.xml><?xml version="1.0" encoding="utf-8"?>
-<p:sld xmlns:a="http://schemas.openxmlformats.org/drawingml/2006/main" xmlns:p="http://schemas.openxmlformats.org/presentationml/2006/main" xmlns:r="http://schemas.openxmlformats.org/officeDocument/2006/relationships">
-  <p:cSld>
-    <p:bg>
-      <p:bgPr>
-        <a:solidFill>
-          <a:srgbClr val="0B0B1A"/>
-        </a:solidFill>
-        <a:effectLst/>
-      </p:bgPr>
-    </p:bg>
-    <p:spTree>
-      <p:nvGrpSpPr>
-        <p:cNvPr id="1" name=""/>
-        <p:cNvGrpSpPr/>
-        <p:nvPr/>
-      </p:nvGrpSpPr>
-      <p:grpSpPr/>
-      <p:sp>
-        <p:nvSpPr>
-          <p:cNvPr id="2" name="Oval 1"/>
-          <p:cNvSpPr/>
-          <p:nvPr/>
-        </p:nvSpPr>
-        <p:spPr>
-          <a:xfrm>
-            <a:off x="-914400" y="-914400"/>
-            <a:ext cx="2743200" cy="2743200"/>
-          </a:xfrm>
-          <a:prstGeom prst="ellipse">
-            <a:avLst/>
-          </a:prstGeom>
-          <a:solidFill>
-            <a:srgbClr val="6C63FF"/>
-          </a:solidFill>
-          <a:ln>
-            <a:noFill/>
-          </a:ln>
-        </p:spPr>
-        <p:style>
-          <a:lnRef idx="1">
-            <a:schemeClr val="accent1"/>
-          </a:lnRef>
-          <a:fillRef idx="3">
-            <a:schemeClr val="accent1"/>
-          </a:fillRef>
-          <a:effectRef idx="2">
-            <a:schemeClr val="accent1"/>
-          </a:effectRef>
-          <a:fontRef idx="minor">
-            <a:schemeClr val="lt1"/>
-          </a:fontRef>
-        </p:style>
-        <p:txBody>
-          <a:bodyPr rtlCol="0" anchor="ctr"/>
-          <a:lstStyle/>
-          <a:p>
-            <a:pPr algn="ctr"/>
-          </a:p>
-        </p:txBody>
-      </p:sp>
-      <p:sp>
-        <p:nvSpPr>
-          <p:cNvPr id="3" name="Oval 2"/>
-          <p:cNvSpPr/>
-          <p:nvPr/>
-        </p:nvSpPr>
-        <p:spPr>
-          <a:xfrm>
-            <a:off x="10058400" y="5029200"/>
-            <a:ext cx="2286000" cy="2286000"/>
-          </a:xfrm>
-          <a:prstGeom prst="ellipse">
-            <a:avLst/>
-          </a:prstGeom>
-          <a:solidFill>
-            <a:srgbClr val="00D4AA"/>
-          </a:solidFill>
-          <a:ln>
-            <a:noFill/>
-          </a:ln>
-        </p:spPr>
-        <p:style>
-          <a:lnRef idx="1">
-            <a:schemeClr val="accent1"/>
-          </a:lnRef>
-          <a:fillRef idx="3">
-            <a:schemeClr val="accent1"/>
-          </a:fillRef>
-          <a:effectRef idx="2">
-            <a:schemeClr val="accent1"/>
-          </a:effectRef>
-          <a:fontRef idx="minor">
-            <a:schemeClr val="lt1"/>
-          </a:fontRef>
-        </p:style>
-        <p:txBody>
-          <a:bodyPr rtlCol="0" anchor="ctr"/>
-          <a:lstStyle/>
-          <a:p>
-            <a:pPr algn="ctr"/>
-          </a:p>
-        </p:txBody>
-      </p:sp>
-      <p:sp>
-        <p:nvSpPr>
-          <p:cNvPr id="4" name="Oval 3"/>
-          <p:cNvSpPr/>
-          <p:nvPr/>
-        </p:nvSpPr>
-        <p:spPr>
-          <a:xfrm>
-            <a:off x="7315200" y="-457200"/>
-            <a:ext cx="1371600" cy="1371600"/>
-          </a:xfrm>
-          <a:prstGeom prst="ellipse">
-            <a:avLst/>
-          </a:prstGeom>
-          <a:solidFill>
-            <a:srgbClr val="FF6B6B"/>
-          </a:solidFill>
-          <a:ln>
-            <a:noFill/>
-          </a:ln>
-        </p:spPr>
-        <p:style>
-          <a:lnRef idx="1">
-            <a:schemeClr val="accent1"/>
-          </a:lnRef>
-          <a:fillRef idx="3">
-            <a:schemeClr val="accent1"/>
-          </a:fillRef>
-          <a:effectRef idx="2">
-            <a:schemeClr val="accent1"/>
-          </a:effectRef>
-          <a:fontRef idx="minor">
-            <a:schemeClr val="lt1"/>
-          </a:fontRef>
-        </p:style>
-        <p:txBody>
-          <a:bodyPr rtlCol="0" anchor="ctr"/>
-          <a:lstStyle/>
-          <a:p>
-            <a:pPr algn="ctr"/>
-          </a:p>
-        </p:txBody>
-      </p:sp>
-      <p:sp>
-        <p:nvSpPr>
-          <p:cNvPr id="5" name="TextBox 4"/>
-          <p:cNvSpPr txBox="1"/>
-          <p:nvPr/>
-        </p:nvSpPr>
-        <p:spPr>
-          <a:xfrm>
-            <a:off x="914400" y="1828800"/>
-            <a:ext cx="10058400" cy="1097280"/>
-          </a:xfrm>
-          <a:prstGeom prst="rect">
-            <a:avLst/>
-          </a:prstGeom>
-          <a:noFill/>
-        </p:spPr>
-        <p:txBody>
-          <a:bodyPr wrap="square">
-            <a:spAutoFit/>
-          </a:bodyPr>
-          <a:lstStyle/>
-          <a:p>
-            <a:pPr algn="ctr">
-              <a:defRPr sz="7200" b="1">
-                <a:solidFill>
-                  <a:srgbClr val="FFFFFF"/>
-                </a:solidFill>
-                <a:latin typeface="Calibri"/>
-              </a:defRPr>
-            </a:pPr>
-            <a:r>
-              <a:t>Thank You</a:t>
-            </a:r>
-          </a:p>
-        </p:txBody>
-      </p:sp>
-      <p:sp>
-        <p:nvSpPr>
-          <p:cNvPr id="6" name="Rectangle 5"/>
-          <p:cNvSpPr/>
-          <p:nvPr/>
-        </p:nvSpPr>
-        <p:spPr>
-          <a:xfrm>
-            <a:off x="5029200" y="3017520"/>
-            <a:ext cx="2286000" cy="63500"/>
-          </a:xfrm>
-          <a:prstGeom prst="rect">
-            <a:avLst/>
-          </a:prstGeom>
-          <a:solidFill>
-            <a:srgbClr val="00D4AA"/>
-          </a:solidFill>
-          <a:ln>
-            <a:noFill/>
-          </a:ln>
-        </p:spPr>
-        <p:style>
-          <a:lnRef idx="1">
-            <a:schemeClr val="accent1"/>
-          </a:lnRef>
-          <a:fillRef idx="3">
-            <a:schemeClr val="accent1"/>
-          </a:fillRef>
-          <a:effectRef idx="2">
-            <a:schemeClr val="accent1"/>
-          </a:effectRef>
-          <a:fontRef idx="minor">
-            <a:schemeClr val="lt1"/>
-          </a:fontRef>
-        </p:style>
-        <p:txBody>
-          <a:bodyPr rtlCol="0" anchor="ctr"/>
-          <a:lstStyle/>
-          <a:p>
-            <a:pPr algn="ctr"/>
-          </a:p>
-        </p:txBody>
-      </p:sp>
-      <p:sp>
-        <p:nvSpPr>
-          <p:cNvPr id="7" name="TextBox 6"/>
-          <p:cNvSpPr txBox="1"/>
-          <p:nvPr/>
-        </p:nvSpPr>
-        <p:spPr>
-          <a:xfrm>
-            <a:off x="914400" y="3474720"/>
-            <a:ext cx="10058400" cy="548640"/>
-          </a:xfrm>
-          <a:prstGeom prst="rect">
-            <a:avLst/>
-          </a:prstGeom>
-          <a:noFill/>
-        </p:spPr>
-        <p:txBody>
-          <a:bodyPr wrap="square">
-            <a:spAutoFit/>
-          </a:bodyPr>
-          <a:lstStyle/>
-          <a:p>
-            <a:pPr algn="ctr">
-              <a:defRPr sz="2000" b="0">
-                <a:solidFill>
-                  <a:srgbClr val="6C63FF"/>
-                </a:solidFill>
-                <a:latin typeface="Calibri"/>
-              </a:defRPr>
-            </a:pPr>
-            <a:r>
-              <a:t>Nexus — Open-Source Omnichannel AI Agent Platform</a:t>
-            </a:r>
-          </a:p>
-        </p:txBody>
-      </p:sp>
-      <p:sp>
-        <p:nvSpPr>
-          <p:cNvPr id="8" name="TextBox 7"/>
-          <p:cNvSpPr txBox="1"/>
-          <p:nvPr/>
-        </p:nvSpPr>
-        <p:spPr>
-          <a:xfrm>
-            <a:off x="914400" y="4389120"/>
-            <a:ext cx="10058400" cy="457200"/>
-          </a:xfrm>
-          <a:prstGeom prst="rect">
-            <a:avLst/>
-          </a:prstGeom>
-          <a:noFill/>
-        </p:spPr>
-        <p:txBody>
-          <a:bodyPr wrap="square">
-            <a:spAutoFit/>
-          </a:bodyPr>
-          <a:lstStyle/>
-          <a:p>
-            <a:pPr algn="ctr">
-              <a:defRPr sz="1400" b="0">
-                <a:solidFill>
-                  <a:srgbClr val="B0B0C8"/>
-                </a:solidFill>
-                <a:latin typeface="Calibri"/>
-              </a:defRPr>
-            </a:pPr>
-            <a:r>
-              <a:t>MIT License  ·  github.com/ShubhamRSY/voice-agents</a:t>
-            </a:r>
-          </a:p>
-        </p:txBody>
-      </p:sp>
-      <p:sp>
-        <p:nvSpPr>
-          <p:cNvPr id="9" name="TextBox 8"/>
-          <p:cNvSpPr txBox="1"/>
-          <p:nvPr/>
-        </p:nvSpPr>
-        <p:spPr>
-          <a:xfrm>
-            <a:off x="914400" y="5029200"/>
-            <a:ext cx="10058400" cy="365760"/>
-          </a:xfrm>
-          <a:prstGeom prst="rect">
-            <a:avLst/>
-          </a:prstGeom>
-          <a:noFill/>
-        </p:spPr>
-        <p:txBody>
-          <a:bodyPr wrap="square">
-            <a:spAutoFit/>
-          </a:bodyPr>
-          <a:lstStyle/>
-          <a:p>
-            <a:pPr algn="ctr">
-              <a:defRPr sz="1200" b="0">
-                <a:solidFill>
-                  <a:srgbClr val="6B6B8A"/>
+              <a:defRPr sz="1100" b="0">
+                <a:solidFill>
+                  <a:srgbClr val="406080"/>
                 </a:solidFill>
                 <a:latin typeface="Calibri"/>
               </a:defRPr>
             </a:pPr>
             <a:r>
               <a:t>Chat  ·  Copilot  ·  Voice  —  One Orchestrator</a:t>
-            </a:r>
-          </a:p>
-        </p:txBody>
-      </p:sp>
-      <p:sp>
-        <p:nvSpPr>
-          <p:cNvPr id="10" name="TextBox 9"/>
-          <p:cNvSpPr txBox="1"/>
-          <p:nvPr/>
-        </p:nvSpPr>
-        <p:spPr>
-          <a:xfrm>
-            <a:off x="10972800" y="6400800"/>
-            <a:ext cx="914400" cy="274320"/>
-          </a:xfrm>
-          <a:prstGeom prst="rect">
-            <a:avLst/>
-          </a:prstGeom>
-          <a:noFill/>
-        </p:spPr>
-        <p:txBody>
-          <a:bodyPr wrap="square">
-            <a:spAutoFit/>
-          </a:bodyPr>
-          <a:lstStyle/>
-          <a:p>
-            <a:pPr algn="r">
-              <a:defRPr sz="1000" b="0">
-                <a:solidFill>
-                  <a:srgbClr val="6B6B8A"/>
-                </a:solidFill>
-                <a:latin typeface="Calibri"/>
-              </a:defRPr>
-            </a:pPr>
-            <a:r>
-              <a:t>16 / 16</a:t>
             </a:r>
           </a:p>
         </p:txBody>
@@ -7079,7 +6037,7 @@
     <p:bg>
       <p:bgPr>
         <a:solidFill>
-          <a:srgbClr val="0B0B1A"/>
+          <a:srgbClr val="FFFFFF"/>
         </a:solidFill>
         <a:effectLst/>
       </p:bgPr>
@@ -7093,20 +6051,20 @@
       <p:grpSpPr/>
       <p:sp>
         <p:nvSpPr>
-          <p:cNvPr id="2" name="Oval 1"/>
+          <p:cNvPr id="2" name="Rectangle 1"/>
           <p:cNvSpPr/>
           <p:nvPr/>
         </p:nvSpPr>
         <p:spPr>
           <a:xfrm>
-            <a:off x="-731520" y="5029200"/>
-            <a:ext cx="2286000" cy="2286000"/>
-          </a:xfrm>
-          <a:prstGeom prst="ellipse">
+            <a:off x="0" y="0"/>
+            <a:ext cx="12191695" cy="1463040"/>
+          </a:xfrm>
+          <a:prstGeom prst="rect">
             <a:avLst/>
           </a:prstGeom>
           <a:solidFill>
-            <a:srgbClr val="6C63FF"/>
+            <a:srgbClr val="1E3A5F"/>
           </a:solidFill>
           <a:ln>
             <a:noFill/>
@@ -7142,8 +6100,8 @@
         </p:nvSpPr>
         <p:spPr>
           <a:xfrm>
-            <a:off x="731520" y="274320"/>
-            <a:ext cx="5486400" cy="365760"/>
+            <a:off x="731520" y="182880"/>
+            <a:ext cx="2743200" cy="274320"/>
           </a:xfrm>
           <a:prstGeom prst="rect">
             <a:avLst/>
@@ -7157,9 +6115,45 @@
           <a:lstStyle/>
           <a:p>
             <a:pPr algn="l">
-              <a:defRPr sz="1200" b="1">
-                <a:solidFill>
-                  <a:srgbClr val="00D4AA"/>
+              <a:defRPr sz="1100" b="1">
+                <a:solidFill>
+                  <a:srgbClr val="FFFFFF"/>
+                </a:solidFill>
+                <a:latin typeface="Calibri"/>
+              </a:defRPr>
+            </a:pPr>
+            <a:r>
+              <a:t>01</a:t>
+            </a:r>
+          </a:p>
+        </p:txBody>
+      </p:sp>
+      <p:sp>
+        <p:nvSpPr>
+          <p:cNvPr id="4" name="TextBox 3"/>
+          <p:cNvSpPr txBox="1"/>
+          <p:nvPr/>
+        </p:nvSpPr>
+        <p:spPr>
+          <a:xfrm>
+            <a:off x="731520" y="411480"/>
+            <a:ext cx="7315200" cy="274320"/>
+          </a:xfrm>
+          <a:prstGeom prst="rect">
+            <a:avLst/>
+          </a:prstGeom>
+          <a:noFill/>
+        </p:spPr>
+        <p:txBody>
+          <a:bodyPr wrap="square">
+            <a:spAutoFit/>
+          </a:bodyPr>
+          <a:lstStyle/>
+          <a:p>
+            <a:pPr algn="l">
+              <a:defRPr sz="1100" b="0">
+                <a:solidFill>
+                  <a:srgbClr val="90AACC"/>
                 </a:solidFill>
                 <a:latin typeface="Calibri"/>
               </a:defRPr>
@@ -7172,20 +6166,56 @@
       </p:sp>
       <p:sp>
         <p:nvSpPr>
-          <p:cNvPr id="4" name="Rectangle 3"/>
+          <p:cNvPr id="5" name="TextBox 4"/>
+          <p:cNvSpPr txBox="1"/>
+          <p:nvPr/>
+        </p:nvSpPr>
+        <p:spPr>
+          <a:xfrm>
+            <a:off x="731520" y="731520"/>
+            <a:ext cx="9144000" cy="548640"/>
+          </a:xfrm>
+          <a:prstGeom prst="rect">
+            <a:avLst/>
+          </a:prstGeom>
+          <a:noFill/>
+        </p:spPr>
+        <p:txBody>
+          <a:bodyPr wrap="square">
+            <a:spAutoFit/>
+          </a:bodyPr>
+          <a:lstStyle/>
+          <a:p>
+            <a:pPr algn="l">
+              <a:defRPr sz="2800" b="1">
+                <a:solidFill>
+                  <a:srgbClr val="FFFFFF"/>
+                </a:solidFill>
+                <a:latin typeface="Calibri"/>
+              </a:defRPr>
+            </a:pPr>
+            <a:r>
+              <a:t>What Is Nexus?</a:t>
+            </a:r>
+          </a:p>
+        </p:txBody>
+      </p:sp>
+      <p:sp>
+        <p:nvSpPr>
+          <p:cNvPr id="6" name="Rectangle 5"/>
           <p:cNvSpPr/>
           <p:nvPr/>
         </p:nvSpPr>
         <p:spPr>
           <a:xfrm>
-            <a:off x="731520" y="640080"/>
-            <a:ext cx="1097280" cy="50800"/>
+            <a:off x="0" y="1463040"/>
+            <a:ext cx="12191695" cy="38100"/>
           </a:xfrm>
           <a:prstGeom prst="rect">
             <a:avLst/>
           </a:prstGeom>
           <a:solidFill>
-            <a:srgbClr val="00D4AA"/>
+            <a:srgbClr val="2B6CE6"/>
           </a:solidFill>
           <a:ln>
             <a:noFill/>
@@ -7215,14 +6245,14 @@
       </p:sp>
       <p:sp>
         <p:nvSpPr>
-          <p:cNvPr id="5" name="TextBox 4"/>
+          <p:cNvPr id="7" name="TextBox 6"/>
           <p:cNvSpPr txBox="1"/>
           <p:nvPr/>
         </p:nvSpPr>
         <p:spPr>
           <a:xfrm>
-            <a:off x="731520" y="1005840"/>
-            <a:ext cx="10058400" cy="914400"/>
+            <a:off x="731520" y="1828800"/>
+            <a:ext cx="10515600" cy="4114800"/>
           </a:xfrm>
           <a:prstGeom prst="rect">
             <a:avLst/>
@@ -7236,92 +6266,20 @@
           <a:lstStyle/>
           <a:p>
             <a:pPr algn="l">
-              <a:defRPr sz="4000" b="1">
-                <a:solidFill>
-                  <a:srgbClr val="FFFFFF"/>
-                </a:solidFill>
-                <a:latin typeface="Calibri"/>
-              </a:defRPr>
-            </a:pPr>
-            <a:r>
-              <a:t>What Is Nexus?</a:t>
-            </a:r>
-          </a:p>
-        </p:txBody>
-      </p:sp>
-      <p:sp>
-        <p:nvSpPr>
-          <p:cNvPr id="6" name="TextBox 5"/>
-          <p:cNvSpPr txBox="1"/>
-          <p:nvPr/>
-        </p:nvSpPr>
-        <p:spPr>
-          <a:xfrm>
-            <a:off x="731520" y="2011680"/>
-            <a:ext cx="10515600" cy="3200400"/>
-          </a:xfrm>
-          <a:prstGeom prst="rect">
-            <a:avLst/>
-          </a:prstGeom>
-          <a:noFill/>
-        </p:spPr>
-        <p:txBody>
-          <a:bodyPr wrap="square">
-            <a:spAutoFit/>
-          </a:bodyPr>
-          <a:lstStyle/>
-          <a:p>
-            <a:pPr algn="l">
-              <a:defRPr sz="1600" b="0">
-                <a:solidFill>
-                  <a:srgbClr val="B0B0C8"/>
-                </a:solidFill>
-                <a:latin typeface="Calibri"/>
-              </a:defRPr>
-            </a:pPr>
-            <a:r>
-              <a:t>Customer support teams lose context switching between channels — chat, phone, email, and internal tools each live in separate silos. Nexus solves this with a single AI-powered orchestrator that handles every conversation from one runtime, with one knowledge base, and one feedback loop that improves responses over time.</a:t>
+              <a:defRPr sz="1500" b="0">
+                <a:solidFill>
+                  <a:srgbClr val="1F2937"/>
+                </a:solidFill>
+                <a:latin typeface="Calibri"/>
+              </a:defRPr>
+            </a:pPr>
+            <a:r>
+              <a:t>Nexus is an open-source omnichannel AI agent platform for customer support. It solves the problem of fragmented support tools by providing a single AI-powered orchestrator that handles conversations across chat, copilot, and voice from one runtime.</a:t>
             </a:r>
             <a:br/>
             <a:br/>
             <a:r>
-              <a:t>No API key is required to start — the platform ships with a built-in mock LLM so the entire console, voice simulator, and all 158+ unit tests work immediately out of the box.</a:t>
-            </a:r>
-          </a:p>
-        </p:txBody>
-      </p:sp>
-      <p:sp>
-        <p:nvSpPr>
-          <p:cNvPr id="7" name="TextBox 6"/>
-          <p:cNvSpPr txBox="1"/>
-          <p:nvPr/>
-        </p:nvSpPr>
-        <p:spPr>
-          <a:xfrm>
-            <a:off x="10972800" y="6400800"/>
-            <a:ext cx="914400" cy="274320"/>
-          </a:xfrm>
-          <a:prstGeom prst="rect">
-            <a:avLst/>
-          </a:prstGeom>
-          <a:noFill/>
-        </p:spPr>
-        <p:txBody>
-          <a:bodyPr wrap="square">
-            <a:spAutoFit/>
-          </a:bodyPr>
-          <a:lstStyle/>
-          <a:p>
-            <a:pPr algn="r">
-              <a:defRPr sz="1000" b="0">
-                <a:solidFill>
-                  <a:srgbClr val="6B6B8A"/>
-                </a:solidFill>
-                <a:latin typeface="Calibri"/>
-              </a:defRPr>
-            </a:pPr>
-            <a:r>
-              <a:t>02 / 16</a:t>
+              <a:t>One knowledge base, one feedback loop, one console — no more switching between siloed systems. Nexus ships with a built-in mock LLM so the entire platform runs without any API keys, making it fully functional for local development and testing out of the box.</a:t>
             </a:r>
           </a:p>
         </p:txBody>
@@ -7340,7 +6298,7 @@
     <p:bg>
       <p:bgPr>
         <a:solidFill>
-          <a:srgbClr val="0B0B1A"/>
+          <a:srgbClr val="FFFFFF"/>
         </a:solidFill>
         <a:effectLst/>
       </p:bgPr>
@@ -7354,56 +6312,20 @@
       <p:grpSpPr/>
       <p:sp>
         <p:nvSpPr>
-          <p:cNvPr id="2" name="TextBox 1"/>
-          <p:cNvSpPr txBox="1"/>
-          <p:nvPr/>
-        </p:nvSpPr>
-        <p:spPr>
-          <a:xfrm>
-            <a:off x="731520" y="274320"/>
-            <a:ext cx="5486400" cy="365760"/>
-          </a:xfrm>
-          <a:prstGeom prst="rect">
-            <a:avLst/>
-          </a:prstGeom>
-          <a:noFill/>
-        </p:spPr>
-        <p:txBody>
-          <a:bodyPr wrap="square">
-            <a:spAutoFit/>
-          </a:bodyPr>
-          <a:lstStyle/>
-          <a:p>
-            <a:pPr algn="l">
-              <a:defRPr sz="1200" b="1">
-                <a:solidFill>
-                  <a:srgbClr val="00D4AA"/>
-                </a:solidFill>
-                <a:latin typeface="Calibri"/>
-              </a:defRPr>
-            </a:pPr>
-            <a:r>
-              <a:t>CHANNELS</a:t>
-            </a:r>
-          </a:p>
-        </p:txBody>
-      </p:sp>
-      <p:sp>
-        <p:nvSpPr>
-          <p:cNvPr id="3" name="Rectangle 2"/>
+          <p:cNvPr id="2" name="Rectangle 1"/>
           <p:cNvSpPr/>
           <p:nvPr/>
         </p:nvSpPr>
         <p:spPr>
           <a:xfrm>
-            <a:off x="731520" y="640080"/>
-            <a:ext cx="1097280" cy="50800"/>
+            <a:off x="0" y="0"/>
+            <a:ext cx="12191695" cy="1463040"/>
           </a:xfrm>
           <a:prstGeom prst="rect">
             <a:avLst/>
           </a:prstGeom>
           <a:solidFill>
-            <a:srgbClr val="00D4AA"/>
+            <a:srgbClr val="1E3A5F"/>
           </a:solidFill>
           <a:ln>
             <a:noFill/>
@@ -7433,14 +6355,14 @@
       </p:sp>
       <p:sp>
         <p:nvSpPr>
-          <p:cNvPr id="4" name="TextBox 3"/>
+          <p:cNvPr id="3" name="TextBox 2"/>
           <p:cNvSpPr txBox="1"/>
           <p:nvPr/>
         </p:nvSpPr>
         <p:spPr>
           <a:xfrm>
-            <a:off x="731520" y="1005840"/>
-            <a:ext cx="10058400" cy="914400"/>
+            <a:off x="731520" y="182880"/>
+            <a:ext cx="2743200" cy="274320"/>
           </a:xfrm>
           <a:prstGeom prst="rect">
             <a:avLst/>
@@ -7454,7 +6376,7 @@
           <a:lstStyle/>
           <a:p>
             <a:pPr algn="l">
-              <a:defRPr sz="4000" b="1">
+              <a:defRPr sz="1100" b="1">
                 <a:solidFill>
                   <a:srgbClr val="FFFFFF"/>
                 </a:solidFill>
@@ -7462,6 +6384,78 @@
               </a:defRPr>
             </a:pPr>
             <a:r>
+              <a:t>02</a:t>
+            </a:r>
+          </a:p>
+        </p:txBody>
+      </p:sp>
+      <p:sp>
+        <p:nvSpPr>
+          <p:cNvPr id="4" name="TextBox 3"/>
+          <p:cNvSpPr txBox="1"/>
+          <p:nvPr/>
+        </p:nvSpPr>
+        <p:spPr>
+          <a:xfrm>
+            <a:off x="731520" y="411480"/>
+            <a:ext cx="7315200" cy="274320"/>
+          </a:xfrm>
+          <a:prstGeom prst="rect">
+            <a:avLst/>
+          </a:prstGeom>
+          <a:noFill/>
+        </p:spPr>
+        <p:txBody>
+          <a:bodyPr wrap="square">
+            <a:spAutoFit/>
+          </a:bodyPr>
+          <a:lstStyle/>
+          <a:p>
+            <a:pPr algn="l">
+              <a:defRPr sz="1100" b="0">
+                <a:solidFill>
+                  <a:srgbClr val="90AACC"/>
+                </a:solidFill>
+                <a:latin typeface="Calibri"/>
+              </a:defRPr>
+            </a:pPr>
+            <a:r>
+              <a:t>CHANNELS</a:t>
+            </a:r>
+          </a:p>
+        </p:txBody>
+      </p:sp>
+      <p:sp>
+        <p:nvSpPr>
+          <p:cNvPr id="5" name="TextBox 4"/>
+          <p:cNvSpPr txBox="1"/>
+          <p:nvPr/>
+        </p:nvSpPr>
+        <p:spPr>
+          <a:xfrm>
+            <a:off x="731520" y="731520"/>
+            <a:ext cx="9144000" cy="548640"/>
+          </a:xfrm>
+          <a:prstGeom prst="rect">
+            <a:avLst/>
+          </a:prstGeom>
+          <a:noFill/>
+        </p:spPr>
+        <p:txBody>
+          <a:bodyPr wrap="square">
+            <a:spAutoFit/>
+          </a:bodyPr>
+          <a:lstStyle/>
+          <a:p>
+            <a:pPr algn="l">
+              <a:defRPr sz="2800" b="1">
+                <a:solidFill>
+                  <a:srgbClr val="FFFFFF"/>
+                </a:solidFill>
+                <a:latin typeface="Calibri"/>
+              </a:defRPr>
+            </a:pPr>
+            <a:r>
               <a:t>Three Channels, One Engine</a:t>
             </a:r>
           </a:p>
@@ -7469,22 +6463,20 @@
       </p:sp>
       <p:sp>
         <p:nvSpPr>
-          <p:cNvPr id="5" name="Rounded Rectangle 4"/>
+          <p:cNvPr id="6" name="Rectangle 5"/>
           <p:cNvSpPr/>
           <p:nvPr/>
         </p:nvSpPr>
         <p:spPr>
           <a:xfrm>
-            <a:off x="731520" y="2011680"/>
-            <a:ext cx="3383280" cy="3840480"/>
-          </a:xfrm>
-          <a:prstGeom prst="roundRect">
-            <a:avLst>
-              <a:gd name="adj" fmla="val 5000"/>
-            </a:avLst>
+            <a:off x="0" y="1463040"/>
+            <a:ext cx="12191695" cy="38100"/>
+          </a:xfrm>
+          <a:prstGeom prst="rect">
+            <a:avLst/>
           </a:prstGeom>
           <a:solidFill>
-            <a:srgbClr val="111128"/>
+            <a:srgbClr val="2B6CE6"/>
           </a:solidFill>
           <a:ln>
             <a:noFill/>
@@ -7514,20 +6506,22 @@
       </p:sp>
       <p:sp>
         <p:nvSpPr>
-          <p:cNvPr id="6" name="Rectangle 5"/>
+          <p:cNvPr id="7" name="Rounded Rectangle 6"/>
           <p:cNvSpPr/>
           <p:nvPr/>
         </p:nvSpPr>
         <p:spPr>
           <a:xfrm>
             <a:off x="731520" y="2011680"/>
-            <a:ext cx="3383280" cy="63500"/>
-          </a:xfrm>
-          <a:prstGeom prst="rect">
-            <a:avLst/>
+            <a:ext cx="3383280" cy="3474720"/>
+          </a:xfrm>
+          <a:prstGeom prst="roundRect">
+            <a:avLst>
+              <a:gd name="adj" fmla="val 4000"/>
+            </a:avLst>
           </a:prstGeom>
           <a:solidFill>
-            <a:srgbClr val="6C63FF"/>
+            <a:srgbClr val="F0F2F5"/>
           </a:solidFill>
           <a:ln>
             <a:noFill/>
@@ -7557,102 +6551,20 @@
       </p:sp>
       <p:sp>
         <p:nvSpPr>
-          <p:cNvPr id="7" name="TextBox 6"/>
-          <p:cNvSpPr txBox="1"/>
-          <p:nvPr/>
-        </p:nvSpPr>
-        <p:spPr>
-          <a:xfrm>
-            <a:off x="1005840" y="2377440"/>
-            <a:ext cx="2926080" cy="457200"/>
-          </a:xfrm>
-          <a:prstGeom prst="rect">
-            <a:avLst/>
-          </a:prstGeom>
-          <a:noFill/>
-        </p:spPr>
-        <p:txBody>
-          <a:bodyPr wrap="square">
-            <a:spAutoFit/>
-          </a:bodyPr>
-          <a:lstStyle/>
-          <a:p>
-            <a:pPr algn="l">
-              <a:defRPr sz="2200" b="1">
-                <a:solidFill>
-                  <a:srgbClr val="6C63FF"/>
-                </a:solidFill>
-                <a:latin typeface="Calibri"/>
-              </a:defRPr>
-            </a:pPr>
-            <a:r>
-              <a:t>💬  Chat</a:t>
-            </a:r>
-          </a:p>
-        </p:txBody>
-      </p:sp>
-      <p:sp>
-        <p:nvSpPr>
-          <p:cNvPr id="8" name="TextBox 7"/>
-          <p:cNvSpPr txBox="1"/>
-          <p:nvPr/>
-        </p:nvSpPr>
-        <p:spPr>
-          <a:xfrm>
-            <a:off x="1005840" y="3108960"/>
-            <a:ext cx="2926080" cy="2286000"/>
-          </a:xfrm>
-          <a:prstGeom prst="rect">
-            <a:avLst/>
-          </a:prstGeom>
-          <a:noFill/>
-        </p:spPr>
-        <p:txBody>
-          <a:bodyPr wrap="square">
-            <a:spAutoFit/>
-          </a:bodyPr>
-          <a:lstStyle/>
-          <a:p>
-            <a:pPr algn="l">
-              <a:defRPr sz="1400" b="0">
-                <a:solidFill>
-                  <a:srgbClr val="B0B0C8"/>
-                </a:solidFill>
-                <a:latin typeface="Calibri"/>
-              </a:defRPr>
-            </a:pPr>
-            <a:r>
-              <a:t>Live AI conversation with SSE streaming,</a:t>
-            </a:r>
-            <a:br/>
-            <a:r>
-              <a:t>RAG citations, session history, and</a:t>
-            </a:r>
-            <a:br/>
-            <a:r>
-              <a:t>per-mode message filtering.</a:t>
-            </a:r>
-          </a:p>
-        </p:txBody>
-      </p:sp>
-      <p:sp>
-        <p:nvSpPr>
-          <p:cNvPr id="9" name="Rounded Rectangle 8"/>
+          <p:cNvPr id="8" name="Rectangle 7"/>
           <p:cNvSpPr/>
           <p:nvPr/>
         </p:nvSpPr>
         <p:spPr>
           <a:xfrm>
-            <a:off x="4480559" y="2011680"/>
-            <a:ext cx="3383280" cy="3840480"/>
-          </a:xfrm>
-          <a:prstGeom prst="roundRect">
-            <a:avLst>
-              <a:gd name="adj" fmla="val 5000"/>
-            </a:avLst>
+            <a:off x="731520" y="2011680"/>
+            <a:ext cx="3383280" cy="50800"/>
+          </a:xfrm>
+          <a:prstGeom prst="rect">
+            <a:avLst/>
           </a:prstGeom>
           <a:solidFill>
-            <a:srgbClr val="111128"/>
+            <a:srgbClr val="2B6CE6"/>
           </a:solidFill>
           <a:ln>
             <a:noFill/>
@@ -7682,20 +6594,102 @@
       </p:sp>
       <p:sp>
         <p:nvSpPr>
-          <p:cNvPr id="10" name="Rectangle 9"/>
+          <p:cNvPr id="9" name="TextBox 8"/>
+          <p:cNvSpPr txBox="1"/>
+          <p:nvPr/>
+        </p:nvSpPr>
+        <p:spPr>
+          <a:xfrm>
+            <a:off x="1005840" y="2286000"/>
+            <a:ext cx="2926080" cy="365760"/>
+          </a:xfrm>
+          <a:prstGeom prst="rect">
+            <a:avLst/>
+          </a:prstGeom>
+          <a:noFill/>
+        </p:spPr>
+        <p:txBody>
+          <a:bodyPr wrap="square">
+            <a:spAutoFit/>
+          </a:bodyPr>
+          <a:lstStyle/>
+          <a:p>
+            <a:pPr algn="l">
+              <a:defRPr sz="2000" b="1">
+                <a:solidFill>
+                  <a:srgbClr val="2B6CE6"/>
+                </a:solidFill>
+                <a:latin typeface="Calibri"/>
+              </a:defRPr>
+            </a:pPr>
+            <a:r>
+              <a:t>Chat</a:t>
+            </a:r>
+          </a:p>
+        </p:txBody>
+      </p:sp>
+      <p:sp>
+        <p:nvSpPr>
+          <p:cNvPr id="10" name="TextBox 9"/>
+          <p:cNvSpPr txBox="1"/>
+          <p:nvPr/>
+        </p:nvSpPr>
+        <p:spPr>
+          <a:xfrm>
+            <a:off x="1005840" y="2926080"/>
+            <a:ext cx="2926080" cy="2286000"/>
+          </a:xfrm>
+          <a:prstGeom prst="rect">
+            <a:avLst/>
+          </a:prstGeom>
+          <a:noFill/>
+        </p:spPr>
+        <p:txBody>
+          <a:bodyPr wrap="square">
+            <a:spAutoFit/>
+          </a:bodyPr>
+          <a:lstStyle/>
+          <a:p>
+            <a:pPr algn="l">
+              <a:defRPr sz="1400" b="0">
+                <a:solidFill>
+                  <a:srgbClr val="6B7280"/>
+                </a:solidFill>
+                <a:latin typeface="Calibri"/>
+              </a:defRPr>
+            </a:pPr>
+            <a:r>
+              <a:t>Live AI conversation with SSE streaming,</a:t>
+            </a:r>
+            <a:br/>
+            <a:r>
+              <a:t>RAG citations, session history, and</a:t>
+            </a:r>
+            <a:br/>
+            <a:r>
+              <a:t>per-mode message filtering.</a:t>
+            </a:r>
+          </a:p>
+        </p:txBody>
+      </p:sp>
+      <p:sp>
+        <p:nvSpPr>
+          <p:cNvPr id="11" name="Rounded Rectangle 10"/>
           <p:cNvSpPr/>
           <p:nvPr/>
         </p:nvSpPr>
         <p:spPr>
           <a:xfrm>
             <a:off x="4480559" y="2011680"/>
-            <a:ext cx="3383280" cy="63500"/>
-          </a:xfrm>
-          <a:prstGeom prst="rect">
-            <a:avLst/>
+            <a:ext cx="3383280" cy="3474720"/>
+          </a:xfrm>
+          <a:prstGeom prst="roundRect">
+            <a:avLst>
+              <a:gd name="adj" fmla="val 4000"/>
+            </a:avLst>
           </a:prstGeom>
           <a:solidFill>
-            <a:srgbClr val="00D4AA"/>
+            <a:srgbClr val="F0F2F5"/>
           </a:solidFill>
           <a:ln>
             <a:noFill/>
@@ -7725,102 +6719,20 @@
       </p:sp>
       <p:sp>
         <p:nvSpPr>
-          <p:cNvPr id="11" name="TextBox 10"/>
-          <p:cNvSpPr txBox="1"/>
-          <p:nvPr/>
-        </p:nvSpPr>
-        <p:spPr>
-          <a:xfrm>
-            <a:off x="4754879" y="2377440"/>
-            <a:ext cx="2926080" cy="457200"/>
-          </a:xfrm>
-          <a:prstGeom prst="rect">
-            <a:avLst/>
-          </a:prstGeom>
-          <a:noFill/>
-        </p:spPr>
-        <p:txBody>
-          <a:bodyPr wrap="square">
-            <a:spAutoFit/>
-          </a:bodyPr>
-          <a:lstStyle/>
-          <a:p>
-            <a:pPr algn="l">
-              <a:defRPr sz="2200" b="1">
-                <a:solidFill>
-                  <a:srgbClr val="00D4AA"/>
-                </a:solidFill>
-                <a:latin typeface="Calibri"/>
-              </a:defRPr>
-            </a:pPr>
-            <a:r>
-              <a:t>🤝  Copilot</a:t>
-            </a:r>
-          </a:p>
-        </p:txBody>
-      </p:sp>
-      <p:sp>
-        <p:nvSpPr>
-          <p:cNvPr id="12" name="TextBox 11"/>
-          <p:cNvSpPr txBox="1"/>
-          <p:nvPr/>
-        </p:nvSpPr>
-        <p:spPr>
-          <a:xfrm>
-            <a:off x="4754879" y="3108960"/>
-            <a:ext cx="2926080" cy="2286000"/>
-          </a:xfrm>
-          <a:prstGeom prst="rect">
-            <a:avLst/>
-          </a:prstGeom>
-          <a:noFill/>
-        </p:spPr>
-        <p:txBody>
-          <a:bodyPr wrap="square">
-            <a:spAutoFit/>
-          </a:bodyPr>
-          <a:lstStyle/>
-          <a:p>
-            <a:pPr algn="l">
-              <a:defRPr sz="1400" b="0">
-                <a:solidFill>
-                  <a:srgbClr val="B0B0C8"/>
-                </a:solidFill>
-                <a:latin typeface="Calibri"/>
-              </a:defRPr>
-            </a:pPr>
-            <a:r>
-              <a:t>Agent-assist mode — paste a customer</a:t>
-            </a:r>
-            <a:br/>
-            <a:r>
-              <a:t>transcript, get an AI-generated reply</a:t>
-            </a:r>
-            <a:br/>
-            <a:r>
-              <a:t>instantly.</a:t>
-            </a:r>
-          </a:p>
-        </p:txBody>
-      </p:sp>
-      <p:sp>
-        <p:nvSpPr>
-          <p:cNvPr id="13" name="Rounded Rectangle 12"/>
+          <p:cNvPr id="12" name="Rectangle 11"/>
           <p:cNvSpPr/>
           <p:nvPr/>
         </p:nvSpPr>
         <p:spPr>
           <a:xfrm>
-            <a:off x="8229600" y="2011680"/>
-            <a:ext cx="3383280" cy="3840480"/>
-          </a:xfrm>
-          <a:prstGeom prst="roundRect">
-            <a:avLst>
-              <a:gd name="adj" fmla="val 5000"/>
-            </a:avLst>
+            <a:off x="4480559" y="2011680"/>
+            <a:ext cx="3383280" cy="50800"/>
+          </a:xfrm>
+          <a:prstGeom prst="rect">
+            <a:avLst/>
           </a:prstGeom>
           <a:solidFill>
-            <a:srgbClr val="111128"/>
+            <a:srgbClr val="0EA59E"/>
           </a:solidFill>
           <a:ln>
             <a:noFill/>
@@ -7850,20 +6762,102 @@
       </p:sp>
       <p:sp>
         <p:nvSpPr>
-          <p:cNvPr id="14" name="Rectangle 13"/>
+          <p:cNvPr id="13" name="TextBox 12"/>
+          <p:cNvSpPr txBox="1"/>
+          <p:nvPr/>
+        </p:nvSpPr>
+        <p:spPr>
+          <a:xfrm>
+            <a:off x="4754879" y="2286000"/>
+            <a:ext cx="2926080" cy="365760"/>
+          </a:xfrm>
+          <a:prstGeom prst="rect">
+            <a:avLst/>
+          </a:prstGeom>
+          <a:noFill/>
+        </p:spPr>
+        <p:txBody>
+          <a:bodyPr wrap="square">
+            <a:spAutoFit/>
+          </a:bodyPr>
+          <a:lstStyle/>
+          <a:p>
+            <a:pPr algn="l">
+              <a:defRPr sz="2000" b="1">
+                <a:solidFill>
+                  <a:srgbClr val="0EA59E"/>
+                </a:solidFill>
+                <a:latin typeface="Calibri"/>
+              </a:defRPr>
+            </a:pPr>
+            <a:r>
+              <a:t>Copilot</a:t>
+            </a:r>
+          </a:p>
+        </p:txBody>
+      </p:sp>
+      <p:sp>
+        <p:nvSpPr>
+          <p:cNvPr id="14" name="TextBox 13"/>
+          <p:cNvSpPr txBox="1"/>
+          <p:nvPr/>
+        </p:nvSpPr>
+        <p:spPr>
+          <a:xfrm>
+            <a:off x="4754879" y="2926080"/>
+            <a:ext cx="2926080" cy="2286000"/>
+          </a:xfrm>
+          <a:prstGeom prst="rect">
+            <a:avLst/>
+          </a:prstGeom>
+          <a:noFill/>
+        </p:spPr>
+        <p:txBody>
+          <a:bodyPr wrap="square">
+            <a:spAutoFit/>
+          </a:bodyPr>
+          <a:lstStyle/>
+          <a:p>
+            <a:pPr algn="l">
+              <a:defRPr sz="1400" b="0">
+                <a:solidFill>
+                  <a:srgbClr val="6B7280"/>
+                </a:solidFill>
+                <a:latin typeface="Calibri"/>
+              </a:defRPr>
+            </a:pPr>
+            <a:r>
+              <a:t>Agent-assist mode — paste a customer</a:t>
+            </a:r>
+            <a:br/>
+            <a:r>
+              <a:t>transcript and get an AI-generated</a:t>
+            </a:r>
+            <a:br/>
+            <a:r>
+              <a:t>reply in seconds.</a:t>
+            </a:r>
+          </a:p>
+        </p:txBody>
+      </p:sp>
+      <p:sp>
+        <p:nvSpPr>
+          <p:cNvPr id="15" name="Rounded Rectangle 14"/>
           <p:cNvSpPr/>
           <p:nvPr/>
         </p:nvSpPr>
         <p:spPr>
           <a:xfrm>
             <a:off x="8229600" y="2011680"/>
-            <a:ext cx="3383280" cy="63500"/>
-          </a:xfrm>
-          <a:prstGeom prst="rect">
-            <a:avLst/>
+            <a:ext cx="3383280" cy="3474720"/>
+          </a:xfrm>
+          <a:prstGeom prst="roundRect">
+            <a:avLst>
+              <a:gd name="adj" fmla="val 4000"/>
+            </a:avLst>
           </a:prstGeom>
           <a:solidFill>
-            <a:srgbClr val="FF6B6B"/>
+            <a:srgbClr val="F0F2F5"/>
           </a:solidFill>
           <a:ln>
             <a:noFill/>
@@ -7893,14 +6887,57 @@
       </p:sp>
       <p:sp>
         <p:nvSpPr>
-          <p:cNvPr id="15" name="TextBox 14"/>
+          <p:cNvPr id="16" name="Rectangle 15"/>
+          <p:cNvSpPr/>
+          <p:nvPr/>
+        </p:nvSpPr>
+        <p:spPr>
+          <a:xfrm>
+            <a:off x="8229600" y="2011680"/>
+            <a:ext cx="3383280" cy="50800"/>
+          </a:xfrm>
+          <a:prstGeom prst="rect">
+            <a:avLst/>
+          </a:prstGeom>
+          <a:solidFill>
+            <a:srgbClr val="F59E0B"/>
+          </a:solidFill>
+          <a:ln>
+            <a:noFill/>
+          </a:ln>
+        </p:spPr>
+        <p:style>
+          <a:lnRef idx="1">
+            <a:schemeClr val="accent1"/>
+          </a:lnRef>
+          <a:fillRef idx="3">
+            <a:schemeClr val="accent1"/>
+          </a:fillRef>
+          <a:effectRef idx="2">
+            <a:schemeClr val="accent1"/>
+          </a:effectRef>
+          <a:fontRef idx="minor">
+            <a:schemeClr val="lt1"/>
+          </a:fontRef>
+        </p:style>
+        <p:txBody>
+          <a:bodyPr rtlCol="0" anchor="ctr"/>
+          <a:lstStyle/>
+          <a:p>
+            <a:pPr algn="ctr"/>
+          </a:p>
+        </p:txBody>
+      </p:sp>
+      <p:sp>
+        <p:nvSpPr>
+          <p:cNvPr id="17" name="TextBox 16"/>
           <p:cNvSpPr txBox="1"/>
           <p:nvPr/>
         </p:nvSpPr>
         <p:spPr>
           <a:xfrm>
-            <a:off x="8503920" y="2377440"/>
-            <a:ext cx="2926080" cy="457200"/>
+            <a:off x="8503920" y="2286000"/>
+            <a:ext cx="2926080" cy="365760"/>
           </a:xfrm>
           <a:prstGeom prst="rect">
             <a:avLst/>
@@ -7914,28 +6951,28 @@
           <a:lstStyle/>
           <a:p>
             <a:pPr algn="l">
-              <a:defRPr sz="2200" b="1">
-                <a:solidFill>
-                  <a:srgbClr val="FF6B6B"/>
-                </a:solidFill>
-                <a:latin typeface="Calibri"/>
-              </a:defRPr>
-            </a:pPr>
-            <a:r>
-              <a:t>📞  Voice</a:t>
-            </a:r>
-          </a:p>
-        </p:txBody>
-      </p:sp>
-      <p:sp>
-        <p:nvSpPr>
-          <p:cNvPr id="16" name="TextBox 15"/>
+              <a:defRPr sz="2000" b="1">
+                <a:solidFill>
+                  <a:srgbClr val="F59E0B"/>
+                </a:solidFill>
+                <a:latin typeface="Calibri"/>
+              </a:defRPr>
+            </a:pPr>
+            <a:r>
+              <a:t>Voice</a:t>
+            </a:r>
+          </a:p>
+        </p:txBody>
+      </p:sp>
+      <p:sp>
+        <p:nvSpPr>
+          <p:cNvPr id="18" name="TextBox 17"/>
           <p:cNvSpPr txBox="1"/>
           <p:nvPr/>
         </p:nvSpPr>
         <p:spPr>
           <a:xfrm>
-            <a:off x="8503920" y="3108960"/>
+            <a:off x="8503920" y="2926080"/>
             <a:ext cx="2926080" cy="2286000"/>
           </a:xfrm>
           <a:prstGeom prst="rect">
@@ -7952,7 +6989,7 @@
             <a:pPr algn="l">
               <a:defRPr sz="1400" b="0">
                 <a:solidFill>
-                  <a:srgbClr val="B0B0C8"/>
+                  <a:srgbClr val="6B7280"/>
                 </a:solidFill>
                 <a:latin typeface="Calibri"/>
               </a:defRPr>
@@ -7962,47 +6999,11 @@
             </a:r>
             <a:br/>
             <a:r>
-              <a:t>Connect, or any SIP trunk. Live</a:t>
+              <a:t>Connect, or any SIP trunk. Live STT →</a:t>
             </a:r>
             <a:br/>
             <a:r>
-              <a:t>STT → AI → TTS pipeline.</a:t>
-            </a:r>
-          </a:p>
-        </p:txBody>
-      </p:sp>
-      <p:sp>
-        <p:nvSpPr>
-          <p:cNvPr id="17" name="TextBox 16"/>
-          <p:cNvSpPr txBox="1"/>
-          <p:nvPr/>
-        </p:nvSpPr>
-        <p:spPr>
-          <a:xfrm>
-            <a:off x="10972800" y="6400800"/>
-            <a:ext cx="914400" cy="274320"/>
-          </a:xfrm>
-          <a:prstGeom prst="rect">
-            <a:avLst/>
-          </a:prstGeom>
-          <a:noFill/>
-        </p:spPr>
-        <p:txBody>
-          <a:bodyPr wrap="square">
-            <a:spAutoFit/>
-          </a:bodyPr>
-          <a:lstStyle/>
-          <a:p>
-            <a:pPr algn="r">
-              <a:defRPr sz="1000" b="0">
-                <a:solidFill>
-                  <a:srgbClr val="6B6B8A"/>
-                </a:solidFill>
-                <a:latin typeface="Calibri"/>
-              </a:defRPr>
-            </a:pPr>
-            <a:r>
-              <a:t>03 / 16</a:t>
+              <a:t>AI → TTS pipeline.</a:t>
             </a:r>
           </a:p>
         </p:txBody>
@@ -8021,7 +7022,7 @@
     <p:bg>
       <p:bgPr>
         <a:solidFill>
-          <a:srgbClr val="0B0B1A"/>
+          <a:srgbClr val="FFFFFF"/>
         </a:solidFill>
         <a:effectLst/>
       </p:bgPr>
@@ -8035,56 +7036,20 @@
       <p:grpSpPr/>
       <p:sp>
         <p:nvSpPr>
-          <p:cNvPr id="2" name="TextBox 1"/>
-          <p:cNvSpPr txBox="1"/>
-          <p:nvPr/>
-        </p:nvSpPr>
-        <p:spPr>
-          <a:xfrm>
-            <a:off x="731520" y="274320"/>
-            <a:ext cx="5486400" cy="365760"/>
-          </a:xfrm>
-          <a:prstGeom prst="rect">
-            <a:avLst/>
-          </a:prstGeom>
-          <a:noFill/>
-        </p:spPr>
-        <p:txBody>
-          <a:bodyPr wrap="square">
-            <a:spAutoFit/>
-          </a:bodyPr>
-          <a:lstStyle/>
-          <a:p>
-            <a:pPr algn="l">
-              <a:defRPr sz="1200" b="1">
-                <a:solidFill>
-                  <a:srgbClr val="00D4AA"/>
-                </a:solidFill>
-                <a:latin typeface="Calibri"/>
-              </a:defRPr>
-            </a:pPr>
-            <a:r>
-              <a:t>SYSTEM DESIGN</a:t>
-            </a:r>
-          </a:p>
-        </p:txBody>
-      </p:sp>
-      <p:sp>
-        <p:nvSpPr>
-          <p:cNvPr id="3" name="Rectangle 2"/>
+          <p:cNvPr id="2" name="Rectangle 1"/>
           <p:cNvSpPr/>
           <p:nvPr/>
         </p:nvSpPr>
         <p:spPr>
           <a:xfrm>
-            <a:off x="731520" y="640080"/>
-            <a:ext cx="1097280" cy="50800"/>
+            <a:off x="0" y="0"/>
+            <a:ext cx="12191695" cy="1463040"/>
           </a:xfrm>
           <a:prstGeom prst="rect">
             <a:avLst/>
           </a:prstGeom>
           <a:solidFill>
-            <a:srgbClr val="00D4AA"/>
+            <a:srgbClr val="1E3A5F"/>
           </a:solidFill>
           <a:ln>
             <a:noFill/>
@@ -8114,14 +7079,14 @@
       </p:sp>
       <p:sp>
         <p:nvSpPr>
-          <p:cNvPr id="4" name="TextBox 3"/>
+          <p:cNvPr id="3" name="TextBox 2"/>
           <p:cNvSpPr txBox="1"/>
           <p:nvPr/>
         </p:nvSpPr>
         <p:spPr>
           <a:xfrm>
-            <a:off x="731520" y="1005840"/>
-            <a:ext cx="10058400" cy="914400"/>
+            <a:off x="731520" y="182880"/>
+            <a:ext cx="2743200" cy="274320"/>
           </a:xfrm>
           <a:prstGeom prst="rect">
             <a:avLst/>
@@ -8135,7 +7100,7 @@
           <a:lstStyle/>
           <a:p>
             <a:pPr algn="l">
-              <a:defRPr sz="4000" b="1">
+              <a:defRPr sz="1100" b="1">
                 <a:solidFill>
                   <a:srgbClr val="FFFFFF"/>
                 </a:solidFill>
@@ -8143,6 +7108,78 @@
               </a:defRPr>
             </a:pPr>
             <a:r>
+              <a:t>03</a:t>
+            </a:r>
+          </a:p>
+        </p:txBody>
+      </p:sp>
+      <p:sp>
+        <p:nvSpPr>
+          <p:cNvPr id="4" name="TextBox 3"/>
+          <p:cNvSpPr txBox="1"/>
+          <p:nvPr/>
+        </p:nvSpPr>
+        <p:spPr>
+          <a:xfrm>
+            <a:off x="731520" y="411480"/>
+            <a:ext cx="7315200" cy="274320"/>
+          </a:xfrm>
+          <a:prstGeom prst="rect">
+            <a:avLst/>
+          </a:prstGeom>
+          <a:noFill/>
+        </p:spPr>
+        <p:txBody>
+          <a:bodyPr wrap="square">
+            <a:spAutoFit/>
+          </a:bodyPr>
+          <a:lstStyle/>
+          <a:p>
+            <a:pPr algn="l">
+              <a:defRPr sz="1100" b="0">
+                <a:solidFill>
+                  <a:srgbClr val="90AACC"/>
+                </a:solidFill>
+                <a:latin typeface="Calibri"/>
+              </a:defRPr>
+            </a:pPr>
+            <a:r>
+              <a:t>SYSTEM DESIGN</a:t>
+            </a:r>
+          </a:p>
+        </p:txBody>
+      </p:sp>
+      <p:sp>
+        <p:nvSpPr>
+          <p:cNvPr id="5" name="TextBox 4"/>
+          <p:cNvSpPr txBox="1"/>
+          <p:nvPr/>
+        </p:nvSpPr>
+        <p:spPr>
+          <a:xfrm>
+            <a:off x="731520" y="731520"/>
+            <a:ext cx="9144000" cy="548640"/>
+          </a:xfrm>
+          <a:prstGeom prst="rect">
+            <a:avLst/>
+          </a:prstGeom>
+          <a:noFill/>
+        </p:spPr>
+        <p:txBody>
+          <a:bodyPr wrap="square">
+            <a:spAutoFit/>
+          </a:bodyPr>
+          <a:lstStyle/>
+          <a:p>
+            <a:pPr algn="l">
+              <a:defRPr sz="2800" b="1">
+                <a:solidFill>
+                  <a:srgbClr val="FFFFFF"/>
+                </a:solidFill>
+                <a:latin typeface="Calibri"/>
+              </a:defRPr>
+            </a:pPr>
+            <a:r>
               <a:t>Architecture</a:t>
             </a:r>
           </a:p>
@@ -8150,20 +7187,20 @@
       </p:sp>
       <p:sp>
         <p:nvSpPr>
-          <p:cNvPr id="5" name="Oval 4"/>
+          <p:cNvPr id="6" name="Rectangle 5"/>
           <p:cNvSpPr/>
           <p:nvPr/>
         </p:nvSpPr>
         <p:spPr>
           <a:xfrm>
-            <a:off x="10058400" y="4572000"/>
-            <a:ext cx="1828800" cy="1828800"/>
-          </a:xfrm>
-          <a:prstGeom prst="ellipse">
+            <a:off x="0" y="1463040"/>
+            <a:ext cx="12191695" cy="38100"/>
+          </a:xfrm>
+          <a:prstGeom prst="rect">
             <a:avLst/>
           </a:prstGeom>
           <a:solidFill>
-            <a:srgbClr val="00D4AA"/>
+            <a:srgbClr val="2B6CE6"/>
           </a:solidFill>
           <a:ln>
             <a:noFill/>
@@ -8193,57 +7230,14 @@
       </p:sp>
       <p:sp>
         <p:nvSpPr>
-          <p:cNvPr id="6" name="Oval 5"/>
-          <p:cNvSpPr/>
-          <p:nvPr/>
-        </p:nvSpPr>
-        <p:spPr>
-          <a:xfrm>
-            <a:off x="-457200" y="-457200"/>
-            <a:ext cx="1371600" cy="1371600"/>
-          </a:xfrm>
-          <a:prstGeom prst="ellipse">
-            <a:avLst/>
-          </a:prstGeom>
-          <a:solidFill>
-            <a:srgbClr val="6C63FF"/>
-          </a:solidFill>
-          <a:ln>
-            <a:noFill/>
-          </a:ln>
-        </p:spPr>
-        <p:style>
-          <a:lnRef idx="1">
-            <a:schemeClr val="accent1"/>
-          </a:lnRef>
-          <a:fillRef idx="3">
-            <a:schemeClr val="accent1"/>
-          </a:fillRef>
-          <a:effectRef idx="2">
-            <a:schemeClr val="accent1"/>
-          </a:effectRef>
-          <a:fontRef idx="minor">
-            <a:schemeClr val="lt1"/>
-          </a:fontRef>
-        </p:style>
-        <p:txBody>
-          <a:bodyPr rtlCol="0" anchor="ctr"/>
-          <a:lstStyle/>
-          <a:p>
-            <a:pPr algn="ctr"/>
-          </a:p>
-        </p:txBody>
-      </p:sp>
-      <p:sp>
-        <p:nvSpPr>
           <p:cNvPr id="7" name="TextBox 6"/>
           <p:cNvSpPr txBox="1"/>
           <p:nvPr/>
         </p:nvSpPr>
         <p:spPr>
           <a:xfrm>
-            <a:off x="731520" y="2011680"/>
-            <a:ext cx="10515600" cy="4114800"/>
+            <a:off x="731520" y="1828800"/>
+            <a:ext cx="10515600" cy="4572000"/>
           </a:xfrm>
           <a:prstGeom prst="rect">
             <a:avLst/>
@@ -8262,13 +7256,13 @@
               </a:spcAft>
               <a:defRPr sz="1500">
                 <a:solidFill>
-                  <a:srgbClr val="B0B0C8"/>
-                </a:solidFill>
-                <a:latin typeface="Calibri"/>
-              </a:defRPr>
-            </a:pPr>
-            <a:r>
-              <a:t>User / Console  ──→  REST API  ──→  Orchestrator</a:t>
+                  <a:srgbClr val="1F2937"/>
+                </a:solidFill>
+                <a:latin typeface="Calibri"/>
+              </a:defRPr>
+            </a:pPr>
+            <a:r>
+              <a:t>User / Console  →  REST API  →  Orchestrator</a:t>
             </a:r>
           </a:p>
           <a:p>
@@ -8278,7 +7272,7 @@
               </a:spcAft>
               <a:defRPr sz="1500">
                 <a:solidFill>
-                  <a:srgbClr val="B0B0C8"/>
+                  <a:srgbClr val="1F2937"/>
                 </a:solidFill>
                 <a:latin typeface="Calibri"/>
               </a:defRPr>
@@ -8291,13 +7285,13 @@
               </a:spcAft>
               <a:defRPr sz="1500">
                 <a:solidFill>
-                  <a:srgbClr val="B0B0C8"/>
-                </a:solidFill>
-                <a:latin typeface="Calibri"/>
-              </a:defRPr>
-            </a:pPr>
-            <a:r>
-              <a:t>  │  Session Manager — create, load, persist</a:t>
+                  <a:srgbClr val="1F2937"/>
+                </a:solidFill>
+                <a:latin typeface="Calibri"/>
+              </a:defRPr>
+            </a:pPr>
+            <a:r>
+              <a:t>  Session Manager — create, load, persist sessions</a:t>
             </a:r>
           </a:p>
           <a:p>
@@ -8307,13 +7301,13 @@
               </a:spcAft>
               <a:defRPr sz="1500">
                 <a:solidFill>
-                  <a:srgbClr val="B0B0C8"/>
-                </a:solidFill>
-                <a:latin typeface="Calibri"/>
-              </a:defRPr>
-            </a:pPr>
-            <a:r>
-              <a:t>  │  Prompt Builder — system prompt + history + context</a:t>
+                  <a:srgbClr val="1F2937"/>
+                </a:solidFill>
+                <a:latin typeface="Calibri"/>
+              </a:defRPr>
+            </a:pPr>
+            <a:r>
+              <a:t>  Prompt Builder — system prompt + chat history + RAG context</a:t>
             </a:r>
           </a:p>
           <a:p>
@@ -8323,13 +7317,13 @@
               </a:spcAft>
               <a:defRPr sz="1500">
                 <a:solidFill>
-                  <a:srgbClr val="B0B0C8"/>
-                </a:solidFill>
-                <a:latin typeface="Calibri"/>
-              </a:defRPr>
-            </a:pPr>
-            <a:r>
-              <a:t>  │  Agent Router — model &amp; agent selection</a:t>
+                  <a:srgbClr val="1F2937"/>
+                </a:solidFill>
+                <a:latin typeface="Calibri"/>
+              </a:defRPr>
+            </a:pPr>
+            <a:r>
+              <a:t>  Agent Router — select model &amp; agent by configuration</a:t>
             </a:r>
           </a:p>
           <a:p>
@@ -8339,14 +7333,11 @@
               </a:spcAft>
               <a:defRPr sz="1500">
                 <a:solidFill>
-                  <a:srgbClr val="B0B0C8"/>
-                </a:solidFill>
-                <a:latin typeface="Calibri"/>
-              </a:defRPr>
-            </a:pPr>
-            <a:r>
-              <a:t>  │</a:t>
-            </a:r>
+                  <a:srgbClr val="1F2937"/>
+                </a:solidFill>
+                <a:latin typeface="Calibri"/>
+              </a:defRPr>
+            </a:pPr>
           </a:p>
           <a:p>
             <a:pPr>
@@ -8355,13 +7346,13 @@
               </a:spcAft>
               <a:defRPr sz="1500">
                 <a:solidFill>
-                  <a:srgbClr val="B0B0C8"/>
-                </a:solidFill>
-                <a:latin typeface="Calibri"/>
-              </a:defRPr>
-            </a:pPr>
-            <a:r>
-              <a:t>  ├──→  RAG Engine  —  vector retrieval + citations</a:t>
+                  <a:srgbClr val="1F2937"/>
+                </a:solidFill>
+                <a:latin typeface="Calibri"/>
+              </a:defRPr>
+            </a:pPr>
+            <a:r>
+              <a:t>  Flow:  Receive → Session → RAG → Prompt → LLM → Stream</a:t>
             </a:r>
           </a:p>
           <a:p>
@@ -8371,14 +7362,11 @@
               </a:spcAft>
               <a:defRPr sz="1500">
                 <a:solidFill>
-                  <a:srgbClr val="B0B0C8"/>
-                </a:solidFill>
-                <a:latin typeface="Calibri"/>
-              </a:defRPr>
-            </a:pPr>
-            <a:r>
-              <a:t>  ├──→  LLM Layer  —  OpenAI · Anthropic · Gemini · Mock</a:t>
-            </a:r>
+                  <a:srgbClr val="1F2937"/>
+                </a:solidFill>
+                <a:latin typeface="Calibri"/>
+              </a:defRPr>
+            </a:pPr>
           </a:p>
           <a:p>
             <a:pPr>
@@ -8387,13 +7375,13 @@
               </a:spcAft>
               <a:defRPr sz="1500">
                 <a:solidFill>
-                  <a:srgbClr val="B0B0C8"/>
-                </a:solidFill>
-                <a:latin typeface="Calibri"/>
-              </a:defRPr>
-            </a:pPr>
-            <a:r>
-              <a:t>  └──→  SSE Stream  ──→  Console UI</a:t>
+                  <a:srgbClr val="1F2937"/>
+                </a:solidFill>
+                <a:latin typeface="Calibri"/>
+              </a:defRPr>
+            </a:pPr>
+            <a:r>
+              <a:t>Services layer:  Feedback Engine · Vault (AES-256-GCM) · iPaaS Webhooks</a:t>
             </a:r>
           </a:p>
           <a:p>
@@ -8403,78 +7391,13 @@
               </a:spcAft>
               <a:defRPr sz="1500">
                 <a:solidFill>
-                  <a:srgbClr val="B0B0C8"/>
-                </a:solidFill>
-                <a:latin typeface="Calibri"/>
-              </a:defRPr>
-            </a:pPr>
-          </a:p>
-          <a:p>
-            <a:pPr>
-              <a:spcAft>
-                <a:spcPts val="400"/>
-              </a:spcAft>
-              <a:defRPr sz="1500">
-                <a:solidFill>
-                  <a:srgbClr val="B0B0C8"/>
-                </a:solidFill>
-                <a:latin typeface="Calibri"/>
-              </a:defRPr>
-            </a:pPr>
-            <a:r>
-              <a:t>Services:  Feedback Engine  ·  Vault (AES-256-GCM)  ·  iPaaS Webhooks</a:t>
-            </a:r>
-          </a:p>
-          <a:p>
-            <a:pPr>
-              <a:spcAft>
-                <a:spcPts val="400"/>
-              </a:spcAft>
-              <a:defRPr sz="1500">
-                <a:solidFill>
-                  <a:srgbClr val="B0B0C8"/>
-                </a:solidFill>
-                <a:latin typeface="Calibri"/>
-              </a:defRPr>
-            </a:pPr>
-            <a:r>
-              <a:t>Infra:    Twilio  ·  Redis  ·  PostgreSQL  ·  Docker</a:t>
-            </a:r>
-          </a:p>
-        </p:txBody>
-      </p:sp>
-      <p:sp>
-        <p:nvSpPr>
-          <p:cNvPr id="8" name="TextBox 7"/>
-          <p:cNvSpPr txBox="1"/>
-          <p:nvPr/>
-        </p:nvSpPr>
-        <p:spPr>
-          <a:xfrm>
-            <a:off x="10972800" y="6400800"/>
-            <a:ext cx="914400" cy="274320"/>
-          </a:xfrm>
-          <a:prstGeom prst="rect">
-            <a:avLst/>
-          </a:prstGeom>
-          <a:noFill/>
-        </p:spPr>
-        <p:txBody>
-          <a:bodyPr wrap="square">
-            <a:spAutoFit/>
-          </a:bodyPr>
-          <a:lstStyle/>
-          <a:p>
-            <a:pPr algn="r">
-              <a:defRPr sz="1000" b="0">
-                <a:solidFill>
-                  <a:srgbClr val="6B6B8A"/>
-                </a:solidFill>
-                <a:latin typeface="Calibri"/>
-              </a:defRPr>
-            </a:pPr>
-            <a:r>
-              <a:t>04 / 16</a:t>
+                  <a:srgbClr val="1F2937"/>
+                </a:solidFill>
+                <a:latin typeface="Calibri"/>
+              </a:defRPr>
+            </a:pPr>
+            <a:r>
+              <a:t>Infrastructure:  Twilio · Docker · PostgreSQL · Redis</a:t>
             </a:r>
           </a:p>
         </p:txBody>
@@ -8493,7 +7416,7 @@
     <p:bg>
       <p:bgPr>
         <a:solidFill>
-          <a:srgbClr val="0B0B1A"/>
+          <a:srgbClr val="FFFFFF"/>
         </a:solidFill>
         <a:effectLst/>
       </p:bgPr>
@@ -8507,56 +7430,20 @@
       <p:grpSpPr/>
       <p:sp>
         <p:nvSpPr>
-          <p:cNvPr id="2" name="TextBox 1"/>
-          <p:cNvSpPr txBox="1"/>
-          <p:nvPr/>
-        </p:nvSpPr>
-        <p:spPr>
-          <a:xfrm>
-            <a:off x="731520" y="274320"/>
-            <a:ext cx="5486400" cy="365760"/>
-          </a:xfrm>
-          <a:prstGeom prst="rect">
-            <a:avLst/>
-          </a:prstGeom>
-          <a:noFill/>
-        </p:spPr>
-        <p:txBody>
-          <a:bodyPr wrap="square">
-            <a:spAutoFit/>
-          </a:bodyPr>
-          <a:lstStyle/>
-          <a:p>
-            <a:pPr algn="l">
-              <a:defRPr sz="1200" b="1">
-                <a:solidFill>
-                  <a:srgbClr val="00D4AA"/>
-                </a:solidFill>
-                <a:latin typeface="Calibri"/>
-              </a:defRPr>
-            </a:pPr>
-            <a:r>
-              <a:t>LLM LAYER</a:t>
-            </a:r>
-          </a:p>
-        </p:txBody>
-      </p:sp>
-      <p:sp>
-        <p:nvSpPr>
-          <p:cNvPr id="3" name="Rectangle 2"/>
+          <p:cNvPr id="2" name="Rectangle 1"/>
           <p:cNvSpPr/>
           <p:nvPr/>
         </p:nvSpPr>
         <p:spPr>
           <a:xfrm>
-            <a:off x="731520" y="640080"/>
-            <a:ext cx="1097280" cy="50800"/>
+            <a:off x="0" y="0"/>
+            <a:ext cx="12191695" cy="1463040"/>
           </a:xfrm>
           <a:prstGeom prst="rect">
             <a:avLst/>
           </a:prstGeom>
           <a:solidFill>
-            <a:srgbClr val="00D4AA"/>
+            <a:srgbClr val="1E3A5F"/>
           </a:solidFill>
           <a:ln>
             <a:noFill/>
@@ -8586,14 +7473,14 @@
       </p:sp>
       <p:sp>
         <p:nvSpPr>
-          <p:cNvPr id="4" name="TextBox 3"/>
+          <p:cNvPr id="3" name="TextBox 2"/>
           <p:cNvSpPr txBox="1"/>
           <p:nvPr/>
         </p:nvSpPr>
         <p:spPr>
           <a:xfrm>
-            <a:off x="731520" y="1005840"/>
-            <a:ext cx="10058400" cy="914400"/>
+            <a:off x="731520" y="182880"/>
+            <a:ext cx="2743200" cy="274320"/>
           </a:xfrm>
           <a:prstGeom prst="rect">
             <a:avLst/>
@@ -8607,7 +7494,7 @@
           <a:lstStyle/>
           <a:p>
             <a:pPr algn="l">
-              <a:defRPr sz="4000" b="1">
+              <a:defRPr sz="1100" b="1">
                 <a:solidFill>
                   <a:srgbClr val="FFFFFF"/>
                 </a:solidFill>
@@ -8615,6 +7502,78 @@
               </a:defRPr>
             </a:pPr>
             <a:r>
+              <a:t>04</a:t>
+            </a:r>
+          </a:p>
+        </p:txBody>
+      </p:sp>
+      <p:sp>
+        <p:nvSpPr>
+          <p:cNvPr id="4" name="TextBox 3"/>
+          <p:cNvSpPr txBox="1"/>
+          <p:nvPr/>
+        </p:nvSpPr>
+        <p:spPr>
+          <a:xfrm>
+            <a:off x="731520" y="411480"/>
+            <a:ext cx="7315200" cy="274320"/>
+          </a:xfrm>
+          <a:prstGeom prst="rect">
+            <a:avLst/>
+          </a:prstGeom>
+          <a:noFill/>
+        </p:spPr>
+        <p:txBody>
+          <a:bodyPr wrap="square">
+            <a:spAutoFit/>
+          </a:bodyPr>
+          <a:lstStyle/>
+          <a:p>
+            <a:pPr algn="l">
+              <a:defRPr sz="1100" b="0">
+                <a:solidFill>
+                  <a:srgbClr val="90AACC"/>
+                </a:solidFill>
+                <a:latin typeface="Calibri"/>
+              </a:defRPr>
+            </a:pPr>
+            <a:r>
+              <a:t>LLM LAYER</a:t>
+            </a:r>
+          </a:p>
+        </p:txBody>
+      </p:sp>
+      <p:sp>
+        <p:nvSpPr>
+          <p:cNvPr id="5" name="TextBox 4"/>
+          <p:cNvSpPr txBox="1"/>
+          <p:nvPr/>
+        </p:nvSpPr>
+        <p:spPr>
+          <a:xfrm>
+            <a:off x="731520" y="731520"/>
+            <a:ext cx="9144000" cy="548640"/>
+          </a:xfrm>
+          <a:prstGeom prst="rect">
+            <a:avLst/>
+          </a:prstGeom>
+          <a:noFill/>
+        </p:spPr>
+        <p:txBody>
+          <a:bodyPr wrap="square">
+            <a:spAutoFit/>
+          </a:bodyPr>
+          <a:lstStyle/>
+          <a:p>
+            <a:pPr algn="l">
+              <a:defRPr sz="2800" b="1">
+                <a:solidFill>
+                  <a:srgbClr val="FFFFFF"/>
+                </a:solidFill>
+                <a:latin typeface="Calibri"/>
+              </a:defRPr>
+            </a:pPr>
+            <a:r>
               <a:t>Multi-LLM Support</a:t>
             </a:r>
           </a:p>
@@ -8622,20 +7581,20 @@
       </p:sp>
       <p:sp>
         <p:nvSpPr>
-          <p:cNvPr id="5" name="Oval 4"/>
+          <p:cNvPr id="6" name="Rectangle 5"/>
           <p:cNvSpPr/>
           <p:nvPr/>
         </p:nvSpPr>
         <p:spPr>
           <a:xfrm>
-            <a:off x="9601200" y="1371600"/>
-            <a:ext cx="1645920" cy="1645920"/>
-          </a:xfrm>
-          <a:prstGeom prst="ellipse">
+            <a:off x="0" y="1463040"/>
+            <a:ext cx="12191695" cy="38100"/>
+          </a:xfrm>
+          <a:prstGeom prst="rect">
             <a:avLst/>
           </a:prstGeom>
           <a:solidFill>
-            <a:srgbClr val="FF6B6B"/>
+            <a:srgbClr val="2B6CE6"/>
           </a:solidFill>
           <a:ln>
             <a:noFill/>
@@ -8665,7 +7624,7 @@
       </p:sp>
       <p:sp>
         <p:nvSpPr>
-          <p:cNvPr id="6" name="TextBox 5"/>
+          <p:cNvPr id="7" name="TextBox 6"/>
           <p:cNvSpPr txBox="1"/>
           <p:nvPr/>
         </p:nvSpPr>
@@ -8689,15 +7648,15 @@
               <a:spcAft>
                 <a:spcPts val="1000"/>
               </a:spcAft>
-              <a:defRPr sz="1700">
-                <a:solidFill>
-                  <a:srgbClr val="B0B0C8"/>
-                </a:solidFill>
-                <a:latin typeface="Calibri"/>
-              </a:defRPr>
-            </a:pPr>
-            <a:r>
-              <a:t>OpenAI GPT-4o / GPT-4o-mini — default provider</a:t>
+              <a:defRPr sz="1600">
+                <a:solidFill>
+                  <a:srgbClr val="1F2937"/>
+                </a:solidFill>
+                <a:latin typeface="Calibri"/>
+              </a:defRPr>
+            </a:pPr>
+            <a:r>
+              <a:t>OpenAI GPT-4o / GPT-4o-mini — default provider, production-ready</a:t>
             </a:r>
           </a:p>
           <a:p>
@@ -8705,15 +7664,15 @@
               <a:spcAft>
                 <a:spcPts val="1000"/>
               </a:spcAft>
-              <a:defRPr sz="1700">
-                <a:solidFill>
-                  <a:srgbClr val="B0B0C8"/>
-                </a:solidFill>
-                <a:latin typeface="Calibri"/>
-              </a:defRPr>
-            </a:pPr>
-            <a:r>
-              <a:t>Anthropic Claude 3.5 — Sonnet &amp; Haiku</a:t>
+              <a:defRPr sz="1600">
+                <a:solidFill>
+                  <a:srgbClr val="1F2937"/>
+                </a:solidFill>
+                <a:latin typeface="Calibri"/>
+              </a:defRPr>
+            </a:pPr>
+            <a:r>
+              <a:t>Anthropic Claude 3.5 Sonnet &amp; Haiku — alternative provider</a:t>
             </a:r>
           </a:p>
           <a:p>
@@ -8721,15 +7680,15 @@
               <a:spcAft>
                 <a:spcPts val="1000"/>
               </a:spcAft>
-              <a:defRPr sz="1700">
-                <a:solidFill>
-                  <a:srgbClr val="B0B0C8"/>
-                </a:solidFill>
-                <a:latin typeface="Calibri"/>
-              </a:defRPr>
-            </a:pPr>
-            <a:r>
-              <a:t>Google Gemini 2.0 Flash — via gemini_provider</a:t>
+              <a:defRPr sz="1600">
+                <a:solidFill>
+                  <a:srgbClr val="1F2937"/>
+                </a:solidFill>
+                <a:latin typeface="Calibri"/>
+              </a:defRPr>
+            </a:pPr>
+            <a:r>
+              <a:t>Google Gemini 2.0 Flash — via gemini_provider module</a:t>
             </a:r>
           </a:p>
           <a:p>
@@ -8737,15 +7696,15 @@
               <a:spcAft>
                 <a:spcPts val="1000"/>
               </a:spcAft>
-              <a:defRPr sz="1700">
-                <a:solidFill>
-                  <a:srgbClr val="B0B0C8"/>
-                </a:solidFill>
-                <a:latin typeface="Calibri"/>
-              </a:defRPr>
-            </a:pPr>
-            <a:r>
-              <a:t>Built-in Mock LLM — full dev parity, no API key needed</a:t>
+              <a:defRPr sz="1600">
+                <a:solidFill>
+                  <a:srgbClr val="1F2937"/>
+                </a:solidFill>
+                <a:latin typeface="Calibri"/>
+              </a:defRPr>
+            </a:pPr>
+            <a:r>
+              <a:t>Built-in Mock LLM — enables full development without API keys</a:t>
             </a:r>
           </a:p>
           <a:p>
@@ -8753,15 +7712,15 @@
               <a:spcAft>
                 <a:spcPts val="1000"/>
               </a:spcAft>
-              <a:defRPr sz="1700">
-                <a:solidFill>
-                  <a:srgbClr val="B0B0C8"/>
-                </a:solidFill>
-                <a:latin typeface="Calibri"/>
-              </a:defRPr>
-            </a:pPr>
-            <a:r>
-              <a:t>Per-agent model config in YAML — switch at deploy time</a:t>
+              <a:defRPr sz="1600">
+                <a:solidFill>
+                  <a:srgbClr val="1F2937"/>
+                </a:solidFill>
+                <a:latin typeface="Calibri"/>
+              </a:defRPr>
+            </a:pPr>
+            <a:r>
+              <a:t>Per-agent model assignment via YAML configuration</a:t>
             </a:r>
           </a:p>
           <a:p>
@@ -8769,51 +7728,15 @@
               <a:spcAft>
                 <a:spcPts val="1000"/>
               </a:spcAft>
-              <a:defRPr sz="1700">
-                <a:solidFill>
-                  <a:srgbClr val="B0B0C8"/>
-                </a:solidFill>
-                <a:latin typeface="Calibri"/>
-              </a:defRPr>
-            </a:pPr>
-            <a:r>
-              <a:t>Pluggable provider interface — add any LLM in one file</a:t>
-            </a:r>
-          </a:p>
-        </p:txBody>
-      </p:sp>
-      <p:sp>
-        <p:nvSpPr>
-          <p:cNvPr id="7" name="TextBox 6"/>
-          <p:cNvSpPr txBox="1"/>
-          <p:nvPr/>
-        </p:nvSpPr>
-        <p:spPr>
-          <a:xfrm>
-            <a:off x="10972800" y="6400800"/>
-            <a:ext cx="914400" cy="274320"/>
-          </a:xfrm>
-          <a:prstGeom prst="rect">
-            <a:avLst/>
-          </a:prstGeom>
-          <a:noFill/>
-        </p:spPr>
-        <p:txBody>
-          <a:bodyPr wrap="square">
-            <a:spAutoFit/>
-          </a:bodyPr>
-          <a:lstStyle/>
-          <a:p>
-            <a:pPr algn="r">
-              <a:defRPr sz="1000" b="0">
-                <a:solidFill>
-                  <a:srgbClr val="6B6B8A"/>
-                </a:solidFill>
-                <a:latin typeface="Calibri"/>
-              </a:defRPr>
-            </a:pPr>
-            <a:r>
-              <a:t>05 / 16</a:t>
+              <a:defRPr sz="1600">
+                <a:solidFill>
+                  <a:srgbClr val="1F2937"/>
+                </a:solidFill>
+                <a:latin typeface="Calibri"/>
+              </a:defRPr>
+            </a:pPr>
+            <a:r>
+              <a:t>Pluggable provider interface — add any LLM in a single file</a:t>
             </a:r>
           </a:p>
         </p:txBody>
@@ -8832,7 +7755,7 @@
     <p:bg>
       <p:bgPr>
         <a:solidFill>
-          <a:srgbClr val="0B0B1A"/>
+          <a:srgbClr val="FFFFFF"/>
         </a:solidFill>
         <a:effectLst/>
       </p:bgPr>
@@ -8846,56 +7769,20 @@
       <p:grpSpPr/>
       <p:sp>
         <p:nvSpPr>
-          <p:cNvPr id="2" name="TextBox 1"/>
-          <p:cNvSpPr txBox="1"/>
-          <p:nvPr/>
-        </p:nvSpPr>
-        <p:spPr>
-          <a:xfrm>
-            <a:off x="731520" y="274320"/>
-            <a:ext cx="5486400" cy="365760"/>
-          </a:xfrm>
-          <a:prstGeom prst="rect">
-            <a:avLst/>
-          </a:prstGeom>
-          <a:noFill/>
-        </p:spPr>
-        <p:txBody>
-          <a:bodyPr wrap="square">
-            <a:spAutoFit/>
-          </a:bodyPr>
-          <a:lstStyle/>
-          <a:p>
-            <a:pPr algn="l">
-              <a:defRPr sz="1200" b="1">
-                <a:solidFill>
-                  <a:srgbClr val="00D4AA"/>
-                </a:solidFill>
-                <a:latin typeface="Calibri"/>
-              </a:defRPr>
-            </a:pPr>
-            <a:r>
-              <a:t>KNOWLEDGE</a:t>
-            </a:r>
-          </a:p>
-        </p:txBody>
-      </p:sp>
-      <p:sp>
-        <p:nvSpPr>
-          <p:cNvPr id="3" name="Rectangle 2"/>
+          <p:cNvPr id="2" name="Rectangle 1"/>
           <p:cNvSpPr/>
           <p:nvPr/>
         </p:nvSpPr>
         <p:spPr>
           <a:xfrm>
-            <a:off x="731520" y="640080"/>
-            <a:ext cx="1097280" cy="50800"/>
+            <a:off x="0" y="0"/>
+            <a:ext cx="12191695" cy="1463040"/>
           </a:xfrm>
           <a:prstGeom prst="rect">
             <a:avLst/>
           </a:prstGeom>
           <a:solidFill>
-            <a:srgbClr val="00D4AA"/>
+            <a:srgbClr val="1E3A5F"/>
           </a:solidFill>
           <a:ln>
             <a:noFill/>
@@ -8925,14 +7812,14 @@
       </p:sp>
       <p:sp>
         <p:nvSpPr>
-          <p:cNvPr id="4" name="TextBox 3"/>
+          <p:cNvPr id="3" name="TextBox 2"/>
           <p:cNvSpPr txBox="1"/>
           <p:nvPr/>
         </p:nvSpPr>
         <p:spPr>
           <a:xfrm>
-            <a:off x="731520" y="1005840"/>
-            <a:ext cx="10058400" cy="914400"/>
+            <a:off x="731520" y="182880"/>
+            <a:ext cx="2743200" cy="274320"/>
           </a:xfrm>
           <a:prstGeom prst="rect">
             <a:avLst/>
@@ -8946,7 +7833,7 @@
           <a:lstStyle/>
           <a:p>
             <a:pPr algn="l">
-              <a:defRPr sz="4000" b="1">
+              <a:defRPr sz="1100" b="1">
                 <a:solidFill>
                   <a:srgbClr val="FFFFFF"/>
                 </a:solidFill>
@@ -8954,21 +7841,21 @@
               </a:defRPr>
             </a:pPr>
             <a:r>
-              <a:t>RAG Engine</a:t>
-            </a:r>
-          </a:p>
-        </p:txBody>
-      </p:sp>
-      <p:sp>
-        <p:nvSpPr>
-          <p:cNvPr id="5" name="TextBox 4"/>
+              <a:t>05</a:t>
+            </a:r>
+          </a:p>
+        </p:txBody>
+      </p:sp>
+      <p:sp>
+        <p:nvSpPr>
+          <p:cNvPr id="4" name="TextBox 3"/>
           <p:cNvSpPr txBox="1"/>
           <p:nvPr/>
         </p:nvSpPr>
         <p:spPr>
           <a:xfrm>
-            <a:off x="731520" y="2011680"/>
-            <a:ext cx="10058400" cy="3657600"/>
+            <a:off x="731520" y="411480"/>
+            <a:ext cx="7315200" cy="274320"/>
           </a:xfrm>
           <a:prstGeom prst="rect">
             <a:avLst/>
@@ -8981,121 +7868,72 @@
           </a:bodyPr>
           <a:lstStyle/>
           <a:p>
-            <a:pPr>
-              <a:spcAft>
-                <a:spcPts val="1000"/>
-              </a:spcAft>
-              <a:defRPr sz="1700">
-                <a:solidFill>
-                  <a:srgbClr val="B0B0C8"/>
-                </a:solidFill>
-                <a:latin typeface="Calibri"/>
-              </a:defRPr>
-            </a:pPr>
-            <a:r>
-              <a:t>Vector-based retrieval augmented generation</a:t>
-            </a:r>
-          </a:p>
-          <a:p>
-            <a:pPr>
-              <a:spcAft>
-                <a:spcPts val="1000"/>
-              </a:spcAft>
-              <a:defRPr sz="1700">
-                <a:solidFill>
-                  <a:srgbClr val="B0B0C8"/>
-                </a:solidFill>
-                <a:latin typeface="Calibri"/>
-              </a:defRPr>
-            </a:pPr>
-            <a:r>
-              <a:t>Configurable chunk size &amp; top-K retrieval</a:t>
-            </a:r>
-          </a:p>
-          <a:p>
-            <a:pPr>
-              <a:spcAft>
-                <a:spcPts val="1000"/>
-              </a:spcAft>
-              <a:defRPr sz="1700">
-                <a:solidFill>
-                  <a:srgbClr val="B0B0C8"/>
-                </a:solidFill>
-                <a:latin typeface="Calibri"/>
-              </a:defRPr>
-            </a:pPr>
-            <a:r>
-              <a:t>Source-grounded citations in every response</a:t>
-            </a:r>
-          </a:p>
-          <a:p>
-            <a:pPr>
-              <a:spcAft>
-                <a:spcPts val="1000"/>
-              </a:spcAft>
-              <a:defRPr sz="1700">
-                <a:solidFill>
-                  <a:srgbClr val="B0B0C8"/>
-                </a:solidFill>
-                <a:latin typeface="Calibri"/>
-              </a:defRPr>
-            </a:pPr>
-            <a:r>
-              <a:t>Knowledge base → vector embeddings pipeline</a:t>
-            </a:r>
-          </a:p>
-          <a:p>
-            <a:pPr>
-              <a:spcAft>
-                <a:spcPts val="1000"/>
-              </a:spcAft>
-              <a:defRPr sz="1700">
-                <a:solidFill>
-                  <a:srgbClr val="B0B0C8"/>
-                </a:solidFill>
-                <a:latin typeface="Calibri"/>
-              </a:defRPr>
-            </a:pPr>
-            <a:r>
-              <a:t>Per-agent KB config in YAML agent definitions</a:t>
-            </a:r>
-          </a:p>
-          <a:p>
-            <a:pPr>
-              <a:spcAft>
-                <a:spcPts val="1000"/>
-              </a:spcAft>
-              <a:defRPr sz="1700">
-                <a:solidFill>
-                  <a:srgbClr val="B0B0C8"/>
-                </a:solidFill>
-                <a:latin typeface="Calibri"/>
-              </a:defRPr>
-            </a:pPr>
-            <a:r>
-              <a:t>Adjustable retrieval threshold per use case</a:t>
-            </a:r>
-          </a:p>
-        </p:txBody>
-      </p:sp>
-      <p:sp>
-        <p:nvSpPr>
-          <p:cNvPr id="6" name="Rounded Rectangle 5"/>
+            <a:pPr algn="l">
+              <a:defRPr sz="1100" b="0">
+                <a:solidFill>
+                  <a:srgbClr val="90AACC"/>
+                </a:solidFill>
+                <a:latin typeface="Calibri"/>
+              </a:defRPr>
+            </a:pPr>
+            <a:r>
+              <a:t>KNOWLEDGE</a:t>
+            </a:r>
+          </a:p>
+        </p:txBody>
+      </p:sp>
+      <p:sp>
+        <p:nvSpPr>
+          <p:cNvPr id="5" name="TextBox 4"/>
+          <p:cNvSpPr txBox="1"/>
+          <p:nvPr/>
+        </p:nvSpPr>
+        <p:spPr>
+          <a:xfrm>
+            <a:off x="731520" y="731520"/>
+            <a:ext cx="9144000" cy="548640"/>
+          </a:xfrm>
+          <a:prstGeom prst="rect">
+            <a:avLst/>
+          </a:prstGeom>
+          <a:noFill/>
+        </p:spPr>
+        <p:txBody>
+          <a:bodyPr wrap="square">
+            <a:spAutoFit/>
+          </a:bodyPr>
+          <a:lstStyle/>
+          <a:p>
+            <a:pPr algn="l">
+              <a:defRPr sz="2800" b="1">
+                <a:solidFill>
+                  <a:srgbClr val="FFFFFF"/>
+                </a:solidFill>
+                <a:latin typeface="Calibri"/>
+              </a:defRPr>
+            </a:pPr>
+            <a:r>
+              <a:t>RAG Engine</a:t>
+            </a:r>
+          </a:p>
+        </p:txBody>
+      </p:sp>
+      <p:sp>
+        <p:nvSpPr>
+          <p:cNvPr id="6" name="Rectangle 5"/>
           <p:cNvSpPr/>
           <p:nvPr/>
         </p:nvSpPr>
         <p:spPr>
           <a:xfrm>
-            <a:off x="8229600" y="3200400"/>
-            <a:ext cx="3200400" cy="2286000"/>
-          </a:xfrm>
-          <a:prstGeom prst="roundRect">
-            <a:avLst>
-              <a:gd name="adj" fmla="val 5000"/>
-            </a:avLst>
+            <a:off x="0" y="1463040"/>
+            <a:ext cx="12191695" cy="38100"/>
+          </a:xfrm>
+          <a:prstGeom prst="rect">
+            <a:avLst/>
           </a:prstGeom>
           <a:solidFill>
-            <a:srgbClr val="111128"/>
+            <a:srgbClr val="2B6CE6"/>
           </a:solidFill>
           <a:ln>
             <a:noFill/>
@@ -9131,8 +7969,8 @@
         </p:nvSpPr>
         <p:spPr>
           <a:xfrm>
-            <a:off x="8503920" y="3474720"/>
-            <a:ext cx="2743200" cy="365760"/>
+            <a:off x="731520" y="2011680"/>
+            <a:ext cx="10058400" cy="3200400"/>
           </a:xfrm>
           <a:prstGeom prst="rect">
             <a:avLst/>
@@ -9145,30 +7983,158 @@
           </a:bodyPr>
           <a:lstStyle/>
           <a:p>
-            <a:pPr algn="l">
-              <a:defRPr sz="1400" b="1">
-                <a:solidFill>
-                  <a:srgbClr val="00D4AA"/>
-                </a:solidFill>
-                <a:latin typeface="Calibri"/>
-              </a:defRPr>
-            </a:pPr>
-            <a:r>
-              <a:t>RAG Flow</a:t>
-            </a:r>
-          </a:p>
-        </p:txBody>
-      </p:sp>
-      <p:sp>
-        <p:nvSpPr>
-          <p:cNvPr id="8" name="TextBox 7"/>
+            <a:pPr>
+              <a:spcAft>
+                <a:spcPts val="1000"/>
+              </a:spcAft>
+              <a:defRPr sz="1600">
+                <a:solidFill>
+                  <a:srgbClr val="1F2937"/>
+                </a:solidFill>
+                <a:latin typeface="Calibri"/>
+              </a:defRPr>
+            </a:pPr>
+            <a:r>
+              <a:t>Vector-based retrieval augmented generation</a:t>
+            </a:r>
+          </a:p>
+          <a:p>
+            <a:pPr>
+              <a:spcAft>
+                <a:spcPts val="1000"/>
+              </a:spcAft>
+              <a:defRPr sz="1600">
+                <a:solidFill>
+                  <a:srgbClr val="1F2937"/>
+                </a:solidFill>
+                <a:latin typeface="Calibri"/>
+              </a:defRPr>
+            </a:pPr>
+            <a:r>
+              <a:t>Configurable chunk size &amp; top-K retrieval parameters</a:t>
+            </a:r>
+          </a:p>
+          <a:p>
+            <a:pPr>
+              <a:spcAft>
+                <a:spcPts val="1000"/>
+              </a:spcAft>
+              <a:defRPr sz="1600">
+                <a:solidFill>
+                  <a:srgbClr val="1F2937"/>
+                </a:solidFill>
+                <a:latin typeface="Calibri"/>
+              </a:defRPr>
+            </a:pPr>
+            <a:r>
+              <a:t>Source-grounded citations in every AI response</a:t>
+            </a:r>
+          </a:p>
+          <a:p>
+            <a:pPr>
+              <a:spcAft>
+                <a:spcPts val="1000"/>
+              </a:spcAft>
+              <a:defRPr sz="1600">
+                <a:solidFill>
+                  <a:srgbClr val="1F2937"/>
+                </a:solidFill>
+                <a:latin typeface="Calibri"/>
+              </a:defRPr>
+            </a:pPr>
+            <a:r>
+              <a:t>Knowledge base → vector embeddings pipeline</a:t>
+            </a:r>
+          </a:p>
+          <a:p>
+            <a:pPr>
+              <a:spcAft>
+                <a:spcPts val="1000"/>
+              </a:spcAft>
+              <a:defRPr sz="1600">
+                <a:solidFill>
+                  <a:srgbClr val="1F2937"/>
+                </a:solidFill>
+                <a:latin typeface="Calibri"/>
+              </a:defRPr>
+            </a:pPr>
+            <a:r>
+              <a:t>Per-agent knowledge base assignment in YAML</a:t>
+            </a:r>
+          </a:p>
+          <a:p>
+            <a:pPr>
+              <a:spcAft>
+                <a:spcPts val="1000"/>
+              </a:spcAft>
+              <a:defRPr sz="1600">
+                <a:solidFill>
+                  <a:srgbClr val="1F2937"/>
+                </a:solidFill>
+                <a:latin typeface="Calibri"/>
+              </a:defRPr>
+            </a:pPr>
+            <a:r>
+              <a:t>Adjustable retrieval threshold per use case</a:t>
+            </a:r>
+          </a:p>
+        </p:txBody>
+      </p:sp>
+      <p:sp>
+        <p:nvSpPr>
+          <p:cNvPr id="8" name="Rounded Rectangle 7"/>
+          <p:cNvSpPr/>
+          <p:nvPr/>
+        </p:nvSpPr>
+        <p:spPr>
+          <a:xfrm>
+            <a:off x="731520" y="4754880"/>
+            <a:ext cx="10515600" cy="1371600"/>
+          </a:xfrm>
+          <a:prstGeom prst="roundRect">
+            <a:avLst>
+              <a:gd name="adj" fmla="val 4000"/>
+            </a:avLst>
+          </a:prstGeom>
+          <a:solidFill>
+            <a:srgbClr val="E8F0FE"/>
+          </a:solidFill>
+          <a:ln>
+            <a:noFill/>
+          </a:ln>
+        </p:spPr>
+        <p:style>
+          <a:lnRef idx="1">
+            <a:schemeClr val="accent1"/>
+          </a:lnRef>
+          <a:fillRef idx="3">
+            <a:schemeClr val="accent1"/>
+          </a:fillRef>
+          <a:effectRef idx="2">
+            <a:schemeClr val="accent1"/>
+          </a:effectRef>
+          <a:fontRef idx="minor">
+            <a:schemeClr val="lt1"/>
+          </a:fontRef>
+        </p:style>
+        <p:txBody>
+          <a:bodyPr rtlCol="0" anchor="ctr"/>
+          <a:lstStyle/>
+          <a:p>
+            <a:pPr algn="ctr"/>
+          </a:p>
+        </p:txBody>
+      </p:sp>
+      <p:sp>
+        <p:nvSpPr>
+          <p:cNvPr id="9" name="TextBox 8"/>
           <p:cNvSpPr txBox="1"/>
           <p:nvPr/>
         </p:nvSpPr>
         <p:spPr>
           <a:xfrm>
-            <a:off x="8503920" y="3931920"/>
-            <a:ext cx="2743200" cy="1828800"/>
+            <a:off x="1005840" y="4846320"/>
+            <a:ext cx="10058400" cy="365760"/>
           </a:xfrm>
           <a:prstGeom prst="rect">
             <a:avLst/>
@@ -9181,110 +8147,30 @@
           </a:bodyPr>
           <a:lstStyle/>
           <a:p>
-            <a:pPr>
-              <a:spcAft>
-                <a:spcPts val="400"/>
-              </a:spcAft>
-              <a:defRPr sz="1100">
-                <a:solidFill>
-                  <a:srgbClr val="B0B0C8"/>
-                </a:solidFill>
-                <a:latin typeface="Calibri"/>
-              </a:defRPr>
-            </a:pPr>
-            <a:r>
-              <a:t>Query → Embed → Retrieve → Augment → Generate</a:t>
-            </a:r>
-          </a:p>
-          <a:p>
-            <a:pPr>
-              <a:spcAft>
-                <a:spcPts val="400"/>
-              </a:spcAft>
-              <a:defRPr sz="1100">
-                <a:solidFill>
-                  <a:srgbClr val="B0B0C8"/>
-                </a:solidFill>
-                <a:latin typeface="Calibri"/>
-              </a:defRPr>
-            </a:pPr>
-          </a:p>
-          <a:p>
-            <a:pPr>
-              <a:spcAft>
-                <a:spcPts val="400"/>
-              </a:spcAft>
-              <a:defRPr sz="1100">
-                <a:solidFill>
-                  <a:srgbClr val="B0B0C8"/>
-                </a:solidFill>
-                <a:latin typeface="Calibri"/>
-              </a:defRPr>
-            </a:pPr>
-            <a:r>
-              <a:t>User question chunked,</a:t>
-            </a:r>
-          </a:p>
-          <a:p>
-            <a:pPr>
-              <a:spcAft>
-                <a:spcPts val="400"/>
-              </a:spcAft>
-              <a:defRPr sz="1100">
-                <a:solidFill>
-                  <a:srgbClr val="B0B0C8"/>
-                </a:solidFill>
-                <a:latin typeface="Calibri"/>
-              </a:defRPr>
-            </a:pPr>
-            <a:r>
-              <a:t>matched against KB,</a:t>
-            </a:r>
-          </a:p>
-          <a:p>
-            <a:pPr>
-              <a:spcAft>
-                <a:spcPts val="400"/>
-              </a:spcAft>
-              <a:defRPr sz="1100">
-                <a:solidFill>
-                  <a:srgbClr val="B0B0C8"/>
-                </a:solidFill>
-                <a:latin typeface="Calibri"/>
-              </a:defRPr>
-            </a:pPr>
-            <a:r>
-              <a:t>injected into prompt</a:t>
-            </a:r>
-          </a:p>
-          <a:p>
-            <a:pPr>
-              <a:spcAft>
-                <a:spcPts val="400"/>
-              </a:spcAft>
-              <a:defRPr sz="1100">
-                <a:solidFill>
-                  <a:srgbClr val="B0B0C8"/>
-                </a:solidFill>
-                <a:latin typeface="Calibri"/>
-              </a:defRPr>
-            </a:pPr>
-            <a:r>
-              <a:t>with source citations</a:t>
-            </a:r>
-          </a:p>
-        </p:txBody>
-      </p:sp>
-      <p:sp>
-        <p:nvSpPr>
-          <p:cNvPr id="9" name="TextBox 8"/>
+            <a:pPr algn="l">
+              <a:defRPr sz="1400" b="1">
+                <a:solidFill>
+                  <a:srgbClr val="2B6CE6"/>
+                </a:solidFill>
+                <a:latin typeface="Calibri"/>
+              </a:defRPr>
+            </a:pPr>
+            <a:r>
+              <a:t>RAG Flow</a:t>
+            </a:r>
+          </a:p>
+        </p:txBody>
+      </p:sp>
+      <p:sp>
+        <p:nvSpPr>
+          <p:cNvPr id="10" name="TextBox 9"/>
           <p:cNvSpPr txBox="1"/>
           <p:nvPr/>
         </p:nvSpPr>
         <p:spPr>
           <a:xfrm>
-            <a:off x="10972800" y="6400800"/>
-            <a:ext cx="914400" cy="274320"/>
+            <a:off x="1005840" y="5212080"/>
+            <a:ext cx="10058400" cy="640080"/>
           </a:xfrm>
           <a:prstGeom prst="rect">
             <a:avLst/>
@@ -9297,16 +8183,16 @@
           </a:bodyPr>
           <a:lstStyle/>
           <a:p>
-            <a:pPr algn="r">
-              <a:defRPr sz="1000" b="0">
-                <a:solidFill>
-                  <a:srgbClr val="6B6B8A"/>
-                </a:solidFill>
-                <a:latin typeface="Calibri"/>
-              </a:defRPr>
-            </a:pPr>
-            <a:r>
-              <a:t>06 / 16</a:t>
+            <a:pPr algn="l">
+              <a:defRPr sz="1300" b="0">
+                <a:solidFill>
+                  <a:srgbClr val="1F2937"/>
+                </a:solidFill>
+                <a:latin typeface="Calibri"/>
+              </a:defRPr>
+            </a:pPr>
+            <a:r>
+              <a:t>User Question  →  Embed  →  Vector Search  →  Retrieve Chunks  →  Augment Prompt  →  Generate Response with Citations</a:t>
             </a:r>
           </a:p>
         </p:txBody>
@@ -9325,7 +8211,7 @@
     <p:bg>
       <p:bgPr>
         <a:solidFill>
-          <a:srgbClr val="0B0B1A"/>
+          <a:srgbClr val="FFFFFF"/>
         </a:solidFill>
         <a:effectLst/>
       </p:bgPr>
@@ -9339,56 +8225,20 @@
       <p:grpSpPr/>
       <p:sp>
         <p:nvSpPr>
-          <p:cNvPr id="2" name="TextBox 1"/>
-          <p:cNvSpPr txBox="1"/>
-          <p:nvPr/>
-        </p:nvSpPr>
-        <p:spPr>
-          <a:xfrm>
-            <a:off x="731520" y="274320"/>
-            <a:ext cx="5486400" cy="365760"/>
-          </a:xfrm>
-          <a:prstGeom prst="rect">
-            <a:avLst/>
-          </a:prstGeom>
-          <a:noFill/>
-        </p:spPr>
-        <p:txBody>
-          <a:bodyPr wrap="square">
-            <a:spAutoFit/>
-          </a:bodyPr>
-          <a:lstStyle/>
-          <a:p>
-            <a:pPr algn="l">
-              <a:defRPr sz="1200" b="1">
-                <a:solidFill>
-                  <a:srgbClr val="00D4AA"/>
-                </a:solidFill>
-                <a:latin typeface="Calibri"/>
-              </a:defRPr>
-            </a:pPr>
-            <a:r>
-              <a:t>TELEPHONY</a:t>
-            </a:r>
-          </a:p>
-        </p:txBody>
-      </p:sp>
-      <p:sp>
-        <p:nvSpPr>
-          <p:cNvPr id="3" name="Rectangle 2"/>
+          <p:cNvPr id="2" name="Rectangle 1"/>
           <p:cNvSpPr/>
           <p:nvPr/>
         </p:nvSpPr>
         <p:spPr>
           <a:xfrm>
-            <a:off x="731520" y="640080"/>
-            <a:ext cx="1097280" cy="50800"/>
+            <a:off x="0" y="0"/>
+            <a:ext cx="12191695" cy="1463040"/>
           </a:xfrm>
           <a:prstGeom prst="rect">
             <a:avLst/>
           </a:prstGeom>
           <a:solidFill>
-            <a:srgbClr val="00D4AA"/>
+            <a:srgbClr val="1E3A5F"/>
           </a:solidFill>
           <a:ln>
             <a:noFill/>
@@ -9418,14 +8268,14 @@
       </p:sp>
       <p:sp>
         <p:nvSpPr>
-          <p:cNvPr id="4" name="TextBox 3"/>
+          <p:cNvPr id="3" name="TextBox 2"/>
           <p:cNvSpPr txBox="1"/>
           <p:nvPr/>
         </p:nvSpPr>
         <p:spPr>
           <a:xfrm>
-            <a:off x="731520" y="1005840"/>
-            <a:ext cx="10058400" cy="914400"/>
+            <a:off x="731520" y="182880"/>
+            <a:ext cx="2743200" cy="274320"/>
           </a:xfrm>
           <a:prstGeom prst="rect">
             <a:avLst/>
@@ -9439,7 +8289,7 @@
           <a:lstStyle/>
           <a:p>
             <a:pPr algn="l">
-              <a:defRPr sz="4000" b="1">
+              <a:defRPr sz="1100" b="1">
                 <a:solidFill>
                   <a:srgbClr val="FFFFFF"/>
                 </a:solidFill>
@@ -9447,27 +8297,99 @@
               </a:defRPr>
             </a:pPr>
             <a:r>
-              <a:t>Voice &amp; PSTN</a:t>
-            </a:r>
-          </a:p>
-        </p:txBody>
-      </p:sp>
-      <p:sp>
-        <p:nvSpPr>
-          <p:cNvPr id="5" name="Oval 4"/>
+              <a:t>06</a:t>
+            </a:r>
+          </a:p>
+        </p:txBody>
+      </p:sp>
+      <p:sp>
+        <p:nvSpPr>
+          <p:cNvPr id="4" name="TextBox 3"/>
+          <p:cNvSpPr txBox="1"/>
+          <p:nvPr/>
+        </p:nvSpPr>
+        <p:spPr>
+          <a:xfrm>
+            <a:off x="731520" y="411480"/>
+            <a:ext cx="7315200" cy="274320"/>
+          </a:xfrm>
+          <a:prstGeom prst="rect">
+            <a:avLst/>
+          </a:prstGeom>
+          <a:noFill/>
+        </p:spPr>
+        <p:txBody>
+          <a:bodyPr wrap="square">
+            <a:spAutoFit/>
+          </a:bodyPr>
+          <a:lstStyle/>
+          <a:p>
+            <a:pPr algn="l">
+              <a:defRPr sz="1100" b="0">
+                <a:solidFill>
+                  <a:srgbClr val="90AACC"/>
+                </a:solidFill>
+                <a:latin typeface="Calibri"/>
+              </a:defRPr>
+            </a:pPr>
+            <a:r>
+              <a:t>TELEPHONY</a:t>
+            </a:r>
+          </a:p>
+        </p:txBody>
+      </p:sp>
+      <p:sp>
+        <p:nvSpPr>
+          <p:cNvPr id="5" name="TextBox 4"/>
+          <p:cNvSpPr txBox="1"/>
+          <p:nvPr/>
+        </p:nvSpPr>
+        <p:spPr>
+          <a:xfrm>
+            <a:off x="731520" y="731520"/>
+            <a:ext cx="9144000" cy="548640"/>
+          </a:xfrm>
+          <a:prstGeom prst="rect">
+            <a:avLst/>
+          </a:prstGeom>
+          <a:noFill/>
+        </p:spPr>
+        <p:txBody>
+          <a:bodyPr wrap="square">
+            <a:spAutoFit/>
+          </a:bodyPr>
+          <a:lstStyle/>
+          <a:p>
+            <a:pPr algn="l">
+              <a:defRPr sz="2800" b="1">
+                <a:solidFill>
+                  <a:srgbClr val="FFFFFF"/>
+                </a:solidFill>
+                <a:latin typeface="Calibri"/>
+              </a:defRPr>
+            </a:pPr>
+            <a:r>
+              <a:t>Voice &amp; PSTN Integration</a:t>
+            </a:r>
+          </a:p>
+        </p:txBody>
+      </p:sp>
+      <p:sp>
+        <p:nvSpPr>
+          <p:cNvPr id="6" name="Rectangle 5"/>
           <p:cNvSpPr/>
           <p:nvPr/>
         </p:nvSpPr>
         <p:spPr>
           <a:xfrm>
-            <a:off x="-457200" y="3657600"/>
-            <a:ext cx="1828800" cy="1828800"/>
-          </a:xfrm>
-          <a:prstGeom prst="ellipse">
+            <a:off x="0" y="1463040"/>
+            <a:ext cx="12191695" cy="38100"/>
+          </a:xfrm>
+          <a:prstGeom prst="rect">
             <a:avLst/>
           </a:prstGeom>
           <a:solidFill>
-            <a:srgbClr val="FF6B6B"/>
+            <a:srgbClr val="2B6CE6"/>
           </a:solidFill>
           <a:ln>
             <a:noFill/>
@@ -9497,14 +8419,14 @@
       </p:sp>
       <p:sp>
         <p:nvSpPr>
-          <p:cNvPr id="6" name="TextBox 5"/>
+          <p:cNvPr id="7" name="TextBox 6"/>
           <p:cNvSpPr txBox="1"/>
           <p:nvPr/>
         </p:nvSpPr>
         <p:spPr>
           <a:xfrm>
-            <a:off x="731520" y="2011680"/>
-            <a:ext cx="10058400" cy="4114800"/>
+            <a:off x="731520" y="1828800"/>
+            <a:ext cx="10058400" cy="4572000"/>
           </a:xfrm>
           <a:prstGeom prst="rect">
             <a:avLst/>
@@ -9521,15 +8443,15 @@
               <a:spcAft>
                 <a:spcPts val="600"/>
               </a:spcAft>
-              <a:defRPr sz="1600">
-                <a:solidFill>
-                  <a:srgbClr val="B0B0C8"/>
-                </a:solidFill>
-                <a:latin typeface="Calibri"/>
-              </a:defRPr>
-            </a:pPr>
-            <a:r>
-              <a:t>Twilio Programmable Voice — production PSTN</a:t>
+              <a:defRPr sz="1400">
+                <a:solidFill>
+                  <a:srgbClr val="1F2937"/>
+                </a:solidFill>
+                <a:latin typeface="Calibri"/>
+              </a:defRPr>
+            </a:pPr>
+            <a:r>
+              <a:t>Twilio Programmable Voice — production-grade PSTN handling</a:t>
             </a:r>
           </a:p>
           <a:p>
@@ -9537,15 +8459,15 @@
               <a:spcAft>
                 <a:spcPts val="600"/>
               </a:spcAft>
-              <a:defRPr sz="1600">
-                <a:solidFill>
-                  <a:srgbClr val="B0B0C8"/>
-                </a:solidFill>
-                <a:latin typeface="Calibri"/>
-              </a:defRPr>
-            </a:pPr>
-            <a:r>
-              <a:t>Amazon Connect — CCaaS integration</a:t>
+              <a:defRPr sz="1400">
+                <a:solidFill>
+                  <a:srgbClr val="1F2937"/>
+                </a:solidFill>
+                <a:latin typeface="Calibri"/>
+              </a:defRPr>
+            </a:pPr>
+            <a:r>
+              <a:t>Amazon Connect — CCaaS integration for enterprise contact centers</a:t>
             </a:r>
           </a:p>
           <a:p>
@@ -9553,15 +8475,15 @@
               <a:spcAft>
                 <a:spcPts val="600"/>
               </a:spcAft>
-              <a:defRPr sz="1600">
-                <a:solidFill>
-                  <a:srgbClr val="B0B0C8"/>
-                </a:solidFill>
-                <a:latin typeface="Calibri"/>
-              </a:defRPr>
-            </a:pPr>
-            <a:r>
-              <a:t>Generic SIP / CCaaS — any SIP trunk supported</a:t>
+              <a:defRPr sz="1400">
+                <a:solidFill>
+                  <a:srgbClr val="1F2937"/>
+                </a:solidFill>
+                <a:latin typeface="Calibri"/>
+              </a:defRPr>
+            </a:pPr>
+            <a:r>
+              <a:t>Generic SIP / CCaaS — compatible with any SIP trunk provider</a:t>
             </a:r>
           </a:p>
           <a:p>
@@ -9569,15 +8491,15 @@
               <a:spcAft>
                 <a:spcPts val="600"/>
               </a:spcAft>
-              <a:defRPr sz="1600">
-                <a:solidFill>
-                  <a:srgbClr val="B0B0C8"/>
-                </a:solidFill>
-                <a:latin typeface="Calibri"/>
-              </a:defRPr>
-            </a:pPr>
-            <a:r>
-              <a:t>VAPI.ai &amp; Retell AI — AI voice agent overlays</a:t>
+              <a:defRPr sz="1400">
+                <a:solidFill>
+                  <a:srgbClr val="1F2937"/>
+                </a:solidFill>
+                <a:latin typeface="Calibri"/>
+              </a:defRPr>
+            </a:pPr>
+            <a:r>
+              <a:t>VAPI.ai &amp; Retell AI — AI voice agent overlay support</a:t>
             </a:r>
           </a:p>
           <a:p>
@@ -9585,15 +8507,15 @@
               <a:spcAft>
                 <a:spcPts val="600"/>
               </a:spcAft>
-              <a:defRPr sz="1600">
-                <a:solidFill>
-                  <a:srgbClr val="B0B0C8"/>
-                </a:solidFill>
-                <a:latin typeface="Calibri"/>
-              </a:defRPr>
-            </a:pPr>
-            <a:r>
-              <a:t>Built-in simulator — full voice testing without hardware</a:t>
+              <a:defRPr sz="1400">
+                <a:solidFill>
+                  <a:srgbClr val="1F2937"/>
+                </a:solidFill>
+                <a:latin typeface="Calibri"/>
+              </a:defRPr>
+            </a:pPr>
+            <a:r>
+              <a:t>Built-in voice simulator — full testing without phone hardware</a:t>
             </a:r>
           </a:p>
           <a:p>
@@ -9601,15 +8523,15 @@
               <a:spcAft>
                 <a:spcPts val="600"/>
               </a:spcAft>
-              <a:defRPr sz="1600">
-                <a:solidFill>
-                  <a:srgbClr val="B0B0C8"/>
-                </a:solidFill>
-                <a:latin typeface="Calibri"/>
-              </a:defRPr>
-            </a:pPr>
-            <a:r>
-              <a:t>Deepgram &amp; AssemblyAI for STT</a:t>
+              <a:defRPr sz="1400">
+                <a:solidFill>
+                  <a:srgbClr val="1F2937"/>
+                </a:solidFill>
+                <a:latin typeface="Calibri"/>
+              </a:defRPr>
+            </a:pPr>
+            <a:r>
+              <a:t>Deepgram &amp; AssemblyAI for speech-to-text</a:t>
             </a:r>
           </a:p>
           <a:p>
@@ -9617,15 +8539,15 @@
               <a:spcAft>
                 <a:spcPts val="600"/>
               </a:spcAft>
-              <a:defRPr sz="1600">
-                <a:solidFill>
-                  <a:srgbClr val="B0B0C8"/>
-                </a:solidFill>
-                <a:latin typeface="Calibri"/>
-              </a:defRPr>
-            </a:pPr>
-            <a:r>
-              <a:t>ElevenLabs &amp; PlayHT for TTS</a:t>
+              <a:defRPr sz="1400">
+                <a:solidFill>
+                  <a:srgbClr val="1F2937"/>
+                </a:solidFill>
+                <a:latin typeface="Calibri"/>
+              </a:defRPr>
+            </a:pPr>
+            <a:r>
+              <a:t>ElevenLabs &amp; PlayHT for text-to-speech</a:t>
             </a:r>
           </a:p>
           <a:p>
@@ -9633,15 +8555,15 @@
               <a:spcAft>
                 <a:spcPts val="600"/>
               </a:spcAft>
-              <a:defRPr sz="1600">
-                <a:solidFill>
-                  <a:srgbClr val="B0B0C8"/>
-                </a:solidFill>
-                <a:latin typeface="Calibri"/>
-              </a:defRPr>
-            </a:pPr>
-            <a:r>
-              <a:t>Call status tracking &amp; logs via REST API</a:t>
+              <a:defRPr sz="1400">
+                <a:solidFill>
+                  <a:srgbClr val="1F2937"/>
+                </a:solidFill>
+                <a:latin typeface="Calibri"/>
+              </a:defRPr>
+            </a:pPr>
+            <a:r>
+              <a:t>Call status tracking and logs via REST API endpoints</a:t>
             </a:r>
           </a:p>
           <a:p>
@@ -9649,51 +8571,15 @@
               <a:spcAft>
                 <a:spcPts val="600"/>
               </a:spcAft>
-              <a:defRPr sz="1600">
-                <a:solidFill>
-                  <a:srgbClr val="B0B0C8"/>
-                </a:solidFill>
-                <a:latin typeface="Calibri"/>
-              </a:defRPr>
-            </a:pPr>
-            <a:r>
-              <a:t>Twilio webhooks + status callbacks</a:t>
-            </a:r>
-          </a:p>
-        </p:txBody>
-      </p:sp>
-      <p:sp>
-        <p:nvSpPr>
-          <p:cNvPr id="7" name="TextBox 6"/>
-          <p:cNvSpPr txBox="1"/>
-          <p:nvPr/>
-        </p:nvSpPr>
-        <p:spPr>
-          <a:xfrm>
-            <a:off x="10972800" y="6400800"/>
-            <a:ext cx="914400" cy="274320"/>
-          </a:xfrm>
-          <a:prstGeom prst="rect">
-            <a:avLst/>
-          </a:prstGeom>
-          <a:noFill/>
-        </p:spPr>
-        <p:txBody>
-          <a:bodyPr wrap="square">
-            <a:spAutoFit/>
-          </a:bodyPr>
-          <a:lstStyle/>
-          <a:p>
-            <a:pPr algn="r">
-              <a:defRPr sz="1000" b="0">
-                <a:solidFill>
-                  <a:srgbClr val="6B6B8A"/>
-                </a:solidFill>
-                <a:latin typeface="Calibri"/>
-              </a:defRPr>
-            </a:pPr>
-            <a:r>
-              <a:t>07 / 16</a:t>
+              <a:defRPr sz="1400">
+                <a:solidFill>
+                  <a:srgbClr val="1F2937"/>
+                </a:solidFill>
+                <a:latin typeface="Calibri"/>
+              </a:defRPr>
+            </a:pPr>
+            <a:r>
+              <a:t>Twilio webhook handlers with status callbacks</a:t>
             </a:r>
           </a:p>
         </p:txBody>
@@ -9712,7 +8598,7 @@
     <p:bg>
       <p:bgPr>
         <a:solidFill>
-          <a:srgbClr val="0B0B1A"/>
+          <a:srgbClr val="FFFFFF"/>
         </a:solidFill>
         <a:effectLst/>
       </p:bgPr>
@@ -9726,56 +8612,20 @@
       <p:grpSpPr/>
       <p:sp>
         <p:nvSpPr>
-          <p:cNvPr id="2" name="TextBox 1"/>
-          <p:cNvSpPr txBox="1"/>
-          <p:nvPr/>
-        </p:nvSpPr>
-        <p:spPr>
-          <a:xfrm>
-            <a:off x="731520" y="274320"/>
-            <a:ext cx="5486400" cy="365760"/>
-          </a:xfrm>
-          <a:prstGeom prst="rect">
-            <a:avLst/>
-          </a:prstGeom>
-          <a:noFill/>
-        </p:spPr>
-        <p:txBody>
-          <a:bodyPr wrap="square">
-            <a:spAutoFit/>
-          </a:bodyPr>
-          <a:lstStyle/>
-          <a:p>
-            <a:pPr algn="l">
-              <a:defRPr sz="1200" b="1">
-                <a:solidFill>
-                  <a:srgbClr val="00D4AA"/>
-                </a:solidFill>
-                <a:latin typeface="Calibri"/>
-              </a:defRPr>
-            </a:pPr>
-            <a:r>
-              <a:t>OPTIMIZATION</a:t>
-            </a:r>
-          </a:p>
-        </p:txBody>
-      </p:sp>
-      <p:sp>
-        <p:nvSpPr>
-          <p:cNvPr id="3" name="Rectangle 2"/>
+          <p:cNvPr id="2" name="Rectangle 1"/>
           <p:cNvSpPr/>
           <p:nvPr/>
         </p:nvSpPr>
         <p:spPr>
           <a:xfrm>
-            <a:off x="731520" y="640080"/>
-            <a:ext cx="1097280" cy="50800"/>
+            <a:off x="0" y="0"/>
+            <a:ext cx="12191695" cy="1463040"/>
           </a:xfrm>
           <a:prstGeom prst="rect">
             <a:avLst/>
           </a:prstGeom>
           <a:solidFill>
-            <a:srgbClr val="00D4AA"/>
+            <a:srgbClr val="1E3A5F"/>
           </a:solidFill>
           <a:ln>
             <a:noFill/>
@@ -9805,14 +8655,14 @@
       </p:sp>
       <p:sp>
         <p:nvSpPr>
-          <p:cNvPr id="4" name="TextBox 3"/>
+          <p:cNvPr id="3" name="TextBox 2"/>
           <p:cNvSpPr txBox="1"/>
           <p:nvPr/>
         </p:nvSpPr>
         <p:spPr>
           <a:xfrm>
-            <a:off x="731520" y="1005840"/>
-            <a:ext cx="10058400" cy="914400"/>
+            <a:off x="731520" y="182880"/>
+            <a:ext cx="2743200" cy="274320"/>
           </a:xfrm>
           <a:prstGeom prst="rect">
             <a:avLst/>
@@ -9826,7 +8676,7 @@
           <a:lstStyle/>
           <a:p>
             <a:pPr algn="l">
-              <a:defRPr sz="4000" b="1">
+              <a:defRPr sz="1100" b="1">
                 <a:solidFill>
                   <a:srgbClr val="FFFFFF"/>
                 </a:solidFill>
@@ -9834,6 +8684,78 @@
               </a:defRPr>
             </a:pPr>
             <a:r>
+              <a:t>07</a:t>
+            </a:r>
+          </a:p>
+        </p:txBody>
+      </p:sp>
+      <p:sp>
+        <p:nvSpPr>
+          <p:cNvPr id="4" name="TextBox 3"/>
+          <p:cNvSpPr txBox="1"/>
+          <p:nvPr/>
+        </p:nvSpPr>
+        <p:spPr>
+          <a:xfrm>
+            <a:off x="731520" y="411480"/>
+            <a:ext cx="7315200" cy="274320"/>
+          </a:xfrm>
+          <a:prstGeom prst="rect">
+            <a:avLst/>
+          </a:prstGeom>
+          <a:noFill/>
+        </p:spPr>
+        <p:txBody>
+          <a:bodyPr wrap="square">
+            <a:spAutoFit/>
+          </a:bodyPr>
+          <a:lstStyle/>
+          <a:p>
+            <a:pPr algn="l">
+              <a:defRPr sz="1100" b="0">
+                <a:solidFill>
+                  <a:srgbClr val="90AACC"/>
+                </a:solidFill>
+                <a:latin typeface="Calibri"/>
+              </a:defRPr>
+            </a:pPr>
+            <a:r>
+              <a:t>OPTIMIZATION</a:t>
+            </a:r>
+          </a:p>
+        </p:txBody>
+      </p:sp>
+      <p:sp>
+        <p:nvSpPr>
+          <p:cNvPr id="5" name="TextBox 4"/>
+          <p:cNvSpPr txBox="1"/>
+          <p:nvPr/>
+        </p:nvSpPr>
+        <p:spPr>
+          <a:xfrm>
+            <a:off x="731520" y="731520"/>
+            <a:ext cx="9144000" cy="548640"/>
+          </a:xfrm>
+          <a:prstGeom prst="rect">
+            <a:avLst/>
+          </a:prstGeom>
+          <a:noFill/>
+        </p:spPr>
+        <p:txBody>
+          <a:bodyPr wrap="square">
+            <a:spAutoFit/>
+          </a:bodyPr>
+          <a:lstStyle/>
+          <a:p>
+            <a:pPr algn="l">
+              <a:defRPr sz="2800" b="1">
+                <a:solidFill>
+                  <a:srgbClr val="FFFFFF"/>
+                </a:solidFill>
+                <a:latin typeface="Calibri"/>
+              </a:defRPr>
+            </a:pPr>
+            <a:r>
               <a:t>Feedback Engine</a:t>
             </a:r>
           </a:p>
@@ -9841,20 +8763,20 @@
       </p:sp>
       <p:sp>
         <p:nvSpPr>
-          <p:cNvPr id="5" name="Oval 4"/>
+          <p:cNvPr id="6" name="Rectangle 5"/>
           <p:cNvSpPr/>
           <p:nvPr/>
         </p:nvSpPr>
         <p:spPr>
           <a:xfrm>
-            <a:off x="10058400" y="457200"/>
-            <a:ext cx="1371600" cy="1371600"/>
-          </a:xfrm>
-          <a:prstGeom prst="ellipse">
+            <a:off x="0" y="1463040"/>
+            <a:ext cx="12191695" cy="38100"/>
+          </a:xfrm>
+          <a:prstGeom prst="rect">
             <a:avLst/>
           </a:prstGeom>
           <a:solidFill>
-            <a:srgbClr val="00D4AA"/>
+            <a:srgbClr val="2B6CE6"/>
           </a:solidFill>
           <a:ln>
             <a:noFill/>
@@ -9884,7 +8806,7 @@
       </p:sp>
       <p:sp>
         <p:nvSpPr>
-          <p:cNvPr id="6" name="TextBox 5"/>
+          <p:cNvPr id="7" name="TextBox 6"/>
           <p:cNvSpPr txBox="1"/>
           <p:nvPr/>
         </p:nvSpPr>
@@ -9906,104 +8828,104 @@
           <a:p>
             <a:pPr>
               <a:spcAft>
-                <a:spcPts val="800"/>
+                <a:spcPts val="1000"/>
               </a:spcAft>
-              <a:defRPr sz="1700">
-                <a:solidFill>
-                  <a:srgbClr val="B0B0C8"/>
-                </a:solidFill>
-                <a:latin typeface="Calibri"/>
-              </a:defRPr>
-            </a:pPr>
-            <a:r>
-              <a:t>User rates responses — 👍 / 👎 / CSAT score</a:t>
+              <a:defRPr sz="1600">
+                <a:solidFill>
+                  <a:srgbClr val="1F2937"/>
+                </a:solidFill>
+                <a:latin typeface="Calibri"/>
+              </a:defRPr>
+            </a:pPr>
+            <a:r>
+              <a:t>Users rate responses with thumbs up / down or CSAT score</a:t>
             </a:r>
           </a:p>
           <a:p>
             <a:pPr>
               <a:spcAft>
-                <a:spcPts val="800"/>
+                <a:spcPts val="1000"/>
               </a:spcAft>
-              <a:defRPr sz="1700">
-                <a:solidFill>
-                  <a:srgbClr val="B0B0C8"/>
-                </a:solidFill>
-                <a:latin typeface="Calibri"/>
-              </a:defRPr>
-            </a:pPr>
-            <a:r>
-              <a:t>CSAT dynamically tunes agent temperature</a:t>
+              <a:defRPr sz="1600">
+                <a:solidFill>
+                  <a:srgbClr val="1F2937"/>
+                </a:solidFill>
+                <a:latin typeface="Calibri"/>
+              </a:defRPr>
+            </a:pPr>
+            <a:r>
+              <a:t>CSAT ratings dynamically tune agent temperature</a:t>
             </a:r>
           </a:p>
           <a:p>
             <a:pPr>
               <a:spcAft>
-                <a:spcPts val="800"/>
+                <a:spcPts val="1000"/>
               </a:spcAft>
-              <a:defRPr sz="1700">
-                <a:solidFill>
-                  <a:srgbClr val="B0B0C8"/>
-                </a:solidFill>
-                <a:latin typeface="Calibri"/>
-              </a:defRPr>
-            </a:pPr>
-            <a:r>
-              <a:t>Adjusts RAG retrieval threshold based on feedback data</a:t>
+              <a:defRPr sz="1600">
+                <a:solidFill>
+                  <a:srgbClr val="1F2937"/>
+                </a:solidFill>
+                <a:latin typeface="Calibri"/>
+              </a:defRPr>
+            </a:pPr>
+            <a:r>
+              <a:t>Adjusts RAG retrieval threshold based on feedback trends</a:t>
             </a:r>
           </a:p>
           <a:p>
             <a:pPr>
               <a:spcAft>
-                <a:spcPts val="800"/>
+                <a:spcPts val="1000"/>
               </a:spcAft>
-              <a:defRPr sz="1700">
-                <a:solidFill>
-                  <a:srgbClr val="B0B0C8"/>
-                </a:solidFill>
-                <a:latin typeface="Calibri"/>
-              </a:defRPr>
-            </a:pPr>
-            <a:r>
-              <a:t>Sentiment tracking across sessions &amp; channels</a:t>
+              <a:defRPr sz="1600">
+                <a:solidFill>
+                  <a:srgbClr val="1F2937"/>
+                </a:solidFill>
+                <a:latin typeface="Calibri"/>
+              </a:defRPr>
+            </a:pPr>
+            <a:r>
+              <a:t>Sentiment tracking across sessions and channels</a:t>
             </a:r>
           </a:p>
           <a:p>
             <a:pPr>
               <a:spcAft>
-                <a:spcPts val="800"/>
+                <a:spcPts val="1000"/>
               </a:spcAft>
-              <a:defRPr sz="1700">
-                <a:solidFill>
-                  <a:srgbClr val="B0B0C8"/>
-                </a:solidFill>
-                <a:latin typeface="Calibri"/>
-              </a:defRPr>
-            </a:pPr>
-            <a:r>
-              <a:t>All feedback logged for dashboard &amp; analysis</a:t>
+              <a:defRPr sz="1600">
+                <a:solidFill>
+                  <a:srgbClr val="1F2937"/>
+                </a:solidFill>
+                <a:latin typeface="Calibri"/>
+              </a:defRPr>
+            </a:pPr>
+            <a:r>
+              <a:t>All feedback logged for dashboard and analysis</a:t>
             </a:r>
           </a:p>
           <a:p>
             <a:pPr>
               <a:spcAft>
-                <a:spcPts val="800"/>
+                <a:spcPts val="1000"/>
               </a:spcAft>
-              <a:defRPr sz="1700">
-                <a:solidFill>
-                  <a:srgbClr val="B0B0C8"/>
-                </a:solidFill>
-                <a:latin typeface="Calibri"/>
-              </a:defRPr>
-            </a:pPr>
-            <a:r>
-              <a:t>Enables continuous improvement without manual tuning</a:t>
-            </a:r>
-          </a:p>
-        </p:txBody>
-      </p:sp>
-      <p:sp>
-        <p:nvSpPr>
-          <p:cNvPr id="7" name="Rounded Rectangle 6"/>
+              <a:defRPr sz="1600">
+                <a:solidFill>
+                  <a:srgbClr val="1F2937"/>
+                </a:solidFill>
+                <a:latin typeface="Calibri"/>
+              </a:defRPr>
+            </a:pPr>
+            <a:r>
+              <a:t>Enables continuous AI improvement without manual tuning</a:t>
+            </a:r>
+          </a:p>
+        </p:txBody>
+      </p:sp>
+      <p:sp>
+        <p:nvSpPr>
+          <p:cNvPr id="8" name="Rounded Rectangle 7"/>
           <p:cNvSpPr/>
           <p:nvPr/>
         </p:nvSpPr>
@@ -10014,11 +8936,11 @@
           </a:xfrm>
           <a:prstGeom prst="roundRect">
             <a:avLst>
-              <a:gd name="adj" fmla="val 5000"/>
+              <a:gd name="adj" fmla="val 4000"/>
             </a:avLst>
           </a:prstGeom>
           <a:solidFill>
-            <a:srgbClr val="111128"/>
+            <a:srgbClr val="F0F2F5"/>
           </a:solidFill>
           <a:ln>
             <a:noFill/>
@@ -10048,13 +8970,13 @@
       </p:sp>
       <p:sp>
         <p:nvSpPr>
-          <p:cNvPr id="8" name="TextBox 7"/>
+          <p:cNvPr id="9" name="TextBox 8"/>
           <p:cNvSpPr txBox="1"/>
           <p:nvPr/>
         </p:nvSpPr>
         <p:spPr>
           <a:xfrm>
-            <a:off x="1005840" y="4937760"/>
+            <a:off x="1005840" y="4846320"/>
             <a:ext cx="10058400" cy="365760"/>
           </a:xfrm>
           <a:prstGeom prst="rect">
@@ -10071,7 +8993,7 @@
             <a:pPr algn="l">
               <a:defRPr sz="1400" b="1">
                 <a:solidFill>
-                  <a:srgbClr val="00D4AA"/>
+                  <a:srgbClr val="2B6CE6"/>
                 </a:solidFill>
                 <a:latin typeface="Calibri"/>
               </a:defRPr>
@@ -10084,13 +9006,13 @@
       </p:sp>
       <p:sp>
         <p:nvSpPr>
-          <p:cNvPr id="9" name="TextBox 8"/>
+          <p:cNvPr id="10" name="TextBox 9"/>
           <p:cNvSpPr txBox="1"/>
           <p:nvPr/>
         </p:nvSpPr>
         <p:spPr>
           <a:xfrm>
-            <a:off x="1005840" y="5303520"/>
+            <a:off x="1005840" y="5212080"/>
             <a:ext cx="10058400" cy="640080"/>
           </a:xfrm>
           <a:prstGeom prst="rect">
@@ -10105,51 +9027,15 @@
           <a:lstStyle/>
           <a:p>
             <a:pPr algn="l">
-              <a:defRPr sz="1400" b="0">
-                <a:solidFill>
-                  <a:srgbClr val="B0B0C8"/>
+              <a:defRPr sz="1300" b="0">
+                <a:solidFill>
+                  <a:srgbClr val="1F2937"/>
                 </a:solidFill>
                 <a:latin typeface="Calibri"/>
               </a:defRPr>
             </a:pPr>
             <a:r>
               <a:t>Rating Submitted  →  Temperature Adjusted  →  RAG Threshold Tuned  →  Next Response Improves</a:t>
-            </a:r>
-          </a:p>
-        </p:txBody>
-      </p:sp>
-      <p:sp>
-        <p:nvSpPr>
-          <p:cNvPr id="10" name="TextBox 9"/>
-          <p:cNvSpPr txBox="1"/>
-          <p:nvPr/>
-        </p:nvSpPr>
-        <p:spPr>
-          <a:xfrm>
-            <a:off x="10972800" y="6400800"/>
-            <a:ext cx="914400" cy="274320"/>
-          </a:xfrm>
-          <a:prstGeom prst="rect">
-            <a:avLst/>
-          </a:prstGeom>
-          <a:noFill/>
-        </p:spPr>
-        <p:txBody>
-          <a:bodyPr wrap="square">
-            <a:spAutoFit/>
-          </a:bodyPr>
-          <a:lstStyle/>
-          <a:p>
-            <a:pPr algn="r">
-              <a:defRPr sz="1000" b="0">
-                <a:solidFill>
-                  <a:srgbClr val="6B6B8A"/>
-                </a:solidFill>
-                <a:latin typeface="Calibri"/>
-              </a:defRPr>
-            </a:pPr>
-            <a:r>
-              <a:t>08 / 16</a:t>
             </a:r>
           </a:p>
         </p:txBody>
@@ -10168,7 +9054,7 @@
     <p:bg>
       <p:bgPr>
         <a:solidFill>
-          <a:srgbClr val="0B0B1A"/>
+          <a:srgbClr val="FFFFFF"/>
         </a:solidFill>
         <a:effectLst/>
       </p:bgPr>
@@ -10182,56 +9068,20 @@
       <p:grpSpPr/>
       <p:sp>
         <p:nvSpPr>
-          <p:cNvPr id="2" name="TextBox 1"/>
-          <p:cNvSpPr txBox="1"/>
-          <p:nvPr/>
-        </p:nvSpPr>
-        <p:spPr>
-          <a:xfrm>
-            <a:off x="731520" y="274320"/>
-            <a:ext cx="5486400" cy="365760"/>
-          </a:xfrm>
-          <a:prstGeom prst="rect">
-            <a:avLst/>
-          </a:prstGeom>
-          <a:noFill/>
-        </p:spPr>
-        <p:txBody>
-          <a:bodyPr wrap="square">
-            <a:spAutoFit/>
-          </a:bodyPr>
-          <a:lstStyle/>
-          <a:p>
-            <a:pPr algn="l">
-              <a:defRPr sz="1200" b="1">
-                <a:solidFill>
-                  <a:srgbClr val="00D4AA"/>
-                </a:solidFill>
-                <a:latin typeface="Calibri"/>
-              </a:defRPr>
-            </a:pPr>
-            <a:r>
-              <a:t>SECURITY</a:t>
-            </a:r>
-          </a:p>
-        </p:txBody>
-      </p:sp>
-      <p:sp>
-        <p:nvSpPr>
-          <p:cNvPr id="3" name="Rectangle 2"/>
+          <p:cNvPr id="2" name="Rectangle 1"/>
           <p:cNvSpPr/>
           <p:nvPr/>
         </p:nvSpPr>
         <p:spPr>
           <a:xfrm>
-            <a:off x="731520" y="640080"/>
-            <a:ext cx="1097280" cy="50800"/>
+            <a:off x="0" y="0"/>
+            <a:ext cx="12191695" cy="1463040"/>
           </a:xfrm>
           <a:prstGeom prst="rect">
             <a:avLst/>
           </a:prstGeom>
           <a:solidFill>
-            <a:srgbClr val="00D4AA"/>
+            <a:srgbClr val="1E3A5F"/>
           </a:solidFill>
           <a:ln>
             <a:noFill/>
@@ -10261,14 +9111,14 @@
       </p:sp>
       <p:sp>
         <p:nvSpPr>
-          <p:cNvPr id="4" name="TextBox 3"/>
+          <p:cNvPr id="3" name="TextBox 2"/>
           <p:cNvSpPr txBox="1"/>
           <p:nvPr/>
         </p:nvSpPr>
         <p:spPr>
           <a:xfrm>
-            <a:off x="731520" y="1005840"/>
-            <a:ext cx="10058400" cy="914400"/>
+            <a:off x="731520" y="182880"/>
+            <a:ext cx="2743200" cy="274320"/>
           </a:xfrm>
           <a:prstGeom prst="rect">
             <a:avLst/>
@@ -10282,7 +9132,7 @@
           <a:lstStyle/>
           <a:p>
             <a:pPr algn="l">
-              <a:defRPr sz="4000" b="1">
+              <a:defRPr sz="1100" b="1">
                 <a:solidFill>
                   <a:srgbClr val="FFFFFF"/>
                 </a:solidFill>
@@ -10290,6 +9140,78 @@
               </a:defRPr>
             </a:pPr>
             <a:r>
+              <a:t>08</a:t>
+            </a:r>
+          </a:p>
+        </p:txBody>
+      </p:sp>
+      <p:sp>
+        <p:nvSpPr>
+          <p:cNvPr id="4" name="TextBox 3"/>
+          <p:cNvSpPr txBox="1"/>
+          <p:nvPr/>
+        </p:nvSpPr>
+        <p:spPr>
+          <a:xfrm>
+            <a:off x="731520" y="411480"/>
+            <a:ext cx="7315200" cy="274320"/>
+          </a:xfrm>
+          <a:prstGeom prst="rect">
+            <a:avLst/>
+          </a:prstGeom>
+          <a:noFill/>
+        </p:spPr>
+        <p:txBody>
+          <a:bodyPr wrap="square">
+            <a:spAutoFit/>
+          </a:bodyPr>
+          <a:lstStyle/>
+          <a:p>
+            <a:pPr algn="l">
+              <a:defRPr sz="1100" b="0">
+                <a:solidFill>
+                  <a:srgbClr val="90AACC"/>
+                </a:solidFill>
+                <a:latin typeface="Calibri"/>
+              </a:defRPr>
+            </a:pPr>
+            <a:r>
+              <a:t>SECURITY</a:t>
+            </a:r>
+          </a:p>
+        </p:txBody>
+      </p:sp>
+      <p:sp>
+        <p:nvSpPr>
+          <p:cNvPr id="5" name="TextBox 4"/>
+          <p:cNvSpPr txBox="1"/>
+          <p:nvPr/>
+        </p:nvSpPr>
+        <p:spPr>
+          <a:xfrm>
+            <a:off x="731520" y="731520"/>
+            <a:ext cx="9144000" cy="548640"/>
+          </a:xfrm>
+          <a:prstGeom prst="rect">
+            <a:avLst/>
+          </a:prstGeom>
+          <a:noFill/>
+        </p:spPr>
+        <p:txBody>
+          <a:bodyPr wrap="square">
+            <a:spAutoFit/>
+          </a:bodyPr>
+          <a:lstStyle/>
+          <a:p>
+            <a:pPr algn="l">
+              <a:defRPr sz="2800" b="1">
+                <a:solidFill>
+                  <a:srgbClr val="FFFFFF"/>
+                </a:solidFill>
+                <a:latin typeface="Calibri"/>
+              </a:defRPr>
+            </a:pPr>
+            <a:r>
               <a:t>Vault &amp; Credential Management</a:t>
             </a:r>
           </a:p>
@@ -10297,7 +9219,50 @@
       </p:sp>
       <p:sp>
         <p:nvSpPr>
-          <p:cNvPr id="5" name="TextBox 4"/>
+          <p:cNvPr id="6" name="Rectangle 5"/>
+          <p:cNvSpPr/>
+          <p:nvPr/>
+        </p:nvSpPr>
+        <p:spPr>
+          <a:xfrm>
+            <a:off x="0" y="1463040"/>
+            <a:ext cx="12191695" cy="38100"/>
+          </a:xfrm>
+          <a:prstGeom prst="rect">
+            <a:avLst/>
+          </a:prstGeom>
+          <a:solidFill>
+            <a:srgbClr val="2B6CE6"/>
+          </a:solidFill>
+          <a:ln>
+            <a:noFill/>
+          </a:ln>
+        </p:spPr>
+        <p:style>
+          <a:lnRef idx="1">
+            <a:schemeClr val="accent1"/>
+          </a:lnRef>
+          <a:fillRef idx="3">
+            <a:schemeClr val="accent1"/>
+          </a:fillRef>
+          <a:effectRef idx="2">
+            <a:schemeClr val="accent1"/>
+          </a:effectRef>
+          <a:fontRef idx="minor">
+            <a:schemeClr val="lt1"/>
+          </a:fontRef>
+        </p:style>
+        <p:txBody>
+          <a:bodyPr rtlCol="0" anchor="ctr"/>
+          <a:lstStyle/>
+          <a:p>
+            <a:pPr algn="ctr"/>
+          </a:p>
+        </p:txBody>
+      </p:sp>
+      <p:sp>
+        <p:nvSpPr>
+          <p:cNvPr id="7" name="TextBox 6"/>
           <p:cNvSpPr txBox="1"/>
           <p:nvPr/>
         </p:nvSpPr>
@@ -10323,13 +9288,13 @@
               </a:spcAft>
               <a:defRPr sz="1600">
                 <a:solidFill>
-                  <a:srgbClr val="B0B0C8"/>
-                </a:solidFill>
-                <a:latin typeface="Calibri"/>
-              </a:defRPr>
-            </a:pPr>
-            <a:r>
-              <a:t>AES-256-GCM encrypted vault — all credentials at rest</a:t>
+                  <a:srgbClr val="1F2937"/>
+                </a:solidFill>
+                <a:latin typeface="Calibri"/>
+              </a:defRPr>
+            </a:pPr>
+            <a:r>
+              <a:t>AES-256-GCM encrypted vault — all credentials encrypted at rest</a:t>
             </a:r>
           </a:p>
           <a:p>
@@ -10339,13 +9304,13 @@
               </a:spcAft>
               <a:defRPr sz="1600">
                 <a:solidFill>
-                  <a:srgbClr val="B0B0C8"/>
-                </a:solidFill>
-                <a:latin typeface="Calibri"/>
-              </a:defRPr>
-            </a:pPr>
-            <a:r>
-              <a:t>REST API for CRUD on integration credentials</a:t>
+                  <a:srgbClr val="1F2937"/>
+                </a:solidFill>
+                <a:latin typeface="Calibri"/>
+              </a:defRPr>
+            </a:pPr>
+            <a:r>
+              <a:t>REST API for credential CRUD operations</a:t>
             </a:r>
           </a:p>
           <a:p>
@@ -10355,7 +9320,7 @@
               </a:spcAft>
               <a:defRPr sz="1600">
                 <a:solidFill>
-                  <a:srgbClr val="B0B0C8"/>
+                  <a:srgbClr val="1F2937"/>
                 </a:solidFill>
                 <a:latin typeface="Calibri"/>
               </a:defRPr>
@@ -10371,13 +9336,13 @@
               </a:spcAft>
               <a:defRPr sz="1600">
                 <a:solidFill>
-                  <a:srgbClr val="B0B0C8"/>
-                </a:solidFill>
-                <a:latin typeface="Calibri"/>
-              </a:defRPr>
-            </a:pPr>
-            <a:r>
-              <a:t>Pydantic input validation on every endpoint</a:t>
+                  <a:srgbClr val="1F2937"/>
+                </a:solidFill>
+                <a:latin typeface="Calibri"/>
+              </a:defRPr>
+            </a:pPr>
+            <a:r>
+              <a:t>Pydantic input validation on every API endpoint</a:t>
             </a:r>
           </a:p>
           <a:p>
@@ -10387,7 +9352,7 @@
               </a:spcAft>
               <a:defRPr sz="1600">
                 <a:solidFill>
-                  <a:srgbClr val="B0B0C8"/>
+                  <a:srgbClr val="1F2937"/>
                 </a:solidFill>
                 <a:latin typeface="Calibri"/>
               </a:defRPr>
@@ -10403,13 +9368,13 @@
               </a:spcAft>
               <a:defRPr sz="1600">
                 <a:solidFill>
-                  <a:srgbClr val="B0B0C8"/>
-                </a:solidFill>
-                <a:latin typeface="Calibri"/>
-              </a:defRPr>
-            </a:pPr>
-            <a:r>
-              <a:t>.env never committed — all secrets externalized</a:t>
+                  <a:srgbClr val="1F2937"/>
+                </a:solidFill>
+                <a:latin typeface="Calibri"/>
+              </a:defRPr>
+            </a:pPr>
+            <a:r>
+              <a:t>Environment files never committed to version control</a:t>
             </a:r>
           </a:p>
           <a:p>
@@ -10419,265 +9384,13 @@
               </a:spcAft>
               <a:defRPr sz="1600">
                 <a:solidFill>
-                  <a:srgbClr val="B0B0C8"/>
-                </a:solidFill>
-                <a:latin typeface="Calibri"/>
-              </a:defRPr>
-            </a:pPr>
-            <a:r>
-              <a:t>No plaintext keys stored in memory beyond request scope</a:t>
-            </a:r>
-          </a:p>
-        </p:txBody>
-      </p:sp>
-      <p:sp>
-        <p:nvSpPr>
-          <p:cNvPr id="6" name="Rounded Rectangle 5"/>
-          <p:cNvSpPr/>
-          <p:nvPr/>
-        </p:nvSpPr>
-        <p:spPr>
-          <a:xfrm>
-            <a:off x="8686800" y="3200400"/>
-            <a:ext cx="2743200" cy="2560320"/>
-          </a:xfrm>
-          <a:prstGeom prst="roundRect">
-            <a:avLst>
-              <a:gd name="adj" fmla="val 5000"/>
-            </a:avLst>
-          </a:prstGeom>
-          <a:solidFill>
-            <a:srgbClr val="111128"/>
-          </a:solidFill>
-          <a:ln>
-            <a:noFill/>
-          </a:ln>
-        </p:spPr>
-        <p:style>
-          <a:lnRef idx="1">
-            <a:schemeClr val="accent1"/>
-          </a:lnRef>
-          <a:fillRef idx="3">
-            <a:schemeClr val="accent1"/>
-          </a:fillRef>
-          <a:effectRef idx="2">
-            <a:schemeClr val="accent1"/>
-          </a:effectRef>
-          <a:fontRef idx="minor">
-            <a:schemeClr val="lt1"/>
-          </a:fontRef>
-        </p:style>
-        <p:txBody>
-          <a:bodyPr rtlCol="0" anchor="ctr"/>
-          <a:lstStyle/>
-          <a:p>
-            <a:pPr algn="ctr"/>
-          </a:p>
-        </p:txBody>
-      </p:sp>
-      <p:sp>
-        <p:nvSpPr>
-          <p:cNvPr id="7" name="TextBox 6"/>
-          <p:cNvSpPr txBox="1"/>
-          <p:nvPr/>
-        </p:nvSpPr>
-        <p:spPr>
-          <a:xfrm>
-            <a:off x="8961120" y="3383280"/>
-            <a:ext cx="2286000" cy="365760"/>
-          </a:xfrm>
-          <a:prstGeom prst="rect">
-            <a:avLst/>
-          </a:prstGeom>
-          <a:noFill/>
-        </p:spPr>
-        <p:txBody>
-          <a:bodyPr wrap="square">
-            <a:spAutoFit/>
-          </a:bodyPr>
-          <a:lstStyle/>
-          <a:p>
-            <a:pPr algn="l">
-              <a:defRPr sz="1300" b="1">
-                <a:solidFill>
-                  <a:srgbClr val="00D4AA"/>
-                </a:solidFill>
-                <a:latin typeface="Calibri"/>
-              </a:defRPr>
-            </a:pPr>
-            <a:r>
-              <a:t>Encryption Flow</a:t>
-            </a:r>
-          </a:p>
-        </p:txBody>
-      </p:sp>
-      <p:sp>
-        <p:nvSpPr>
-          <p:cNvPr id="8" name="TextBox 7"/>
-          <p:cNvSpPr txBox="1"/>
-          <p:nvPr/>
-        </p:nvSpPr>
-        <p:spPr>
-          <a:xfrm>
-            <a:off x="8961120" y="3840480"/>
-            <a:ext cx="2286000" cy="1828800"/>
-          </a:xfrm>
-          <a:prstGeom prst="rect">
-            <a:avLst/>
-          </a:prstGeom>
-          <a:noFill/>
-        </p:spPr>
-        <p:txBody>
-          <a:bodyPr wrap="square">
-            <a:spAutoFit/>
-          </a:bodyPr>
-          <a:lstStyle/>
-          <a:p>
-            <a:pPr>
-              <a:spcAft>
-                <a:spcPts val="200"/>
-              </a:spcAft>
-              <a:defRPr sz="1100">
-                <a:solidFill>
-                  <a:srgbClr val="B0B0C8"/>
-                </a:solidFill>
-                <a:latin typeface="Calibri"/>
-              </a:defRPr>
-            </a:pPr>
-            <a:r>
-              <a:t>Key in .env</a:t>
-            </a:r>
-          </a:p>
-          <a:p>
-            <a:pPr>
-              <a:spcAft>
-                <a:spcPts val="200"/>
-              </a:spcAft>
-              <a:defRPr sz="1100">
-                <a:solidFill>
-                  <a:srgbClr val="B0B0C8"/>
-                </a:solidFill>
-                <a:latin typeface="Calibri"/>
-              </a:defRPr>
-            </a:pPr>
-            <a:r>
-              <a:t>  ↓</a:t>
-            </a:r>
-          </a:p>
-          <a:p>
-            <a:pPr>
-              <a:spcAft>
-                <a:spcPts val="200"/>
-              </a:spcAft>
-              <a:defRPr sz="1100">
-                <a:solidFill>
-                  <a:srgbClr val="B0B0C8"/>
-                </a:solidFill>
-                <a:latin typeface="Calibri"/>
-              </a:defRPr>
-            </a:pPr>
-            <a:r>
-              <a:t>AES-256-GCM</a:t>
-            </a:r>
-          </a:p>
-          <a:p>
-            <a:pPr>
-              <a:spcAft>
-                <a:spcPts val="200"/>
-              </a:spcAft>
-              <a:defRPr sz="1100">
-                <a:solidFill>
-                  <a:srgbClr val="B0B0C8"/>
-                </a:solidFill>
-                <a:latin typeface="Calibri"/>
-              </a:defRPr>
-            </a:pPr>
-            <a:r>
-              <a:t>  ↓</a:t>
-            </a:r>
-          </a:p>
-          <a:p>
-            <a:pPr>
-              <a:spcAft>
-                <a:spcPts val="200"/>
-              </a:spcAft>
-              <a:defRPr sz="1100">
-                <a:solidFill>
-                  <a:srgbClr val="B0B0C8"/>
-                </a:solidFill>
-                <a:latin typeface="Calibri"/>
-              </a:defRPr>
-            </a:pPr>
-            <a:r>
-              <a:t>Ciphertext → DB</a:t>
-            </a:r>
-          </a:p>
-          <a:p>
-            <a:pPr>
-              <a:spcAft>
-                <a:spcPts val="200"/>
-              </a:spcAft>
-              <a:defRPr sz="1100">
-                <a:solidFill>
-                  <a:srgbClr val="B0B0C8"/>
-                </a:solidFill>
-                <a:latin typeface="Calibri"/>
-              </a:defRPr>
-            </a:pPr>
-            <a:r>
-              <a:t>  ↓</a:t>
-            </a:r>
-          </a:p>
-          <a:p>
-            <a:pPr>
-              <a:spcAft>
-                <a:spcPts val="200"/>
-              </a:spcAft>
-              <a:defRPr sz="1100">
-                <a:solidFill>
-                  <a:srgbClr val="B0B0C8"/>
-                </a:solidFill>
-                <a:latin typeface="Calibri"/>
-              </a:defRPr>
-            </a:pPr>
-            <a:r>
-              <a:t>Decrypt on read</a:t>
-            </a:r>
-          </a:p>
-        </p:txBody>
-      </p:sp>
-      <p:sp>
-        <p:nvSpPr>
-          <p:cNvPr id="9" name="TextBox 8"/>
-          <p:cNvSpPr txBox="1"/>
-          <p:nvPr/>
-        </p:nvSpPr>
-        <p:spPr>
-          <a:xfrm>
-            <a:off x="10972800" y="6400800"/>
-            <a:ext cx="914400" cy="274320"/>
-          </a:xfrm>
-          <a:prstGeom prst="rect">
-            <a:avLst/>
-          </a:prstGeom>
-          <a:noFill/>
-        </p:spPr>
-        <p:txBody>
-          <a:bodyPr wrap="square">
-            <a:spAutoFit/>
-          </a:bodyPr>
-          <a:lstStyle/>
-          <a:p>
-            <a:pPr algn="r">
-              <a:defRPr sz="1000" b="0">
-                <a:solidFill>
-                  <a:srgbClr val="6B6B8A"/>
-                </a:solidFill>
-                <a:latin typeface="Calibri"/>
-              </a:defRPr>
-            </a:pPr>
-            <a:r>
-              <a:t>09 / 16</a:t>
+                  <a:srgbClr val="1F2937"/>
+                </a:solidFill>
+                <a:latin typeface="Calibri"/>
+              </a:defRPr>
+            </a:pPr>
+            <a:r>
+              <a:t>No plaintext secrets in memory beyond request scope</a:t>
             </a:r>
           </a:p>
         </p:txBody>

--- a/Nexus_Overview.pptx
+++ b/Nexus_Overview.pptx
@@ -5439,7 +5439,7 @@
               </a:defRPr>
             </a:pPr>
             <a:r>
-              <a:t>158+ unit tests covering all routers, services, and LLM providers</a:t>
+              <a:t>95+ unit tests covering all routers, services, and LLM providers</a:t>
             </a:r>
           </a:p>
           <a:p>

--- a/Nexus_Overview.pptx
+++ b/Nexus_Overview.pptx
@@ -3255,7 +3255,7 @@
           <a:lstStyle/>
           <a:p>
             <a:pPr algn="l">
-              <a:defRPr sz="2200" b="0">
+              <a:defRPr sz="2000" b="0">
                 <a:solidFill>
                   <a:srgbClr val="90AACC"/>
                 </a:solidFill>
@@ -3263,7 +3263,7 @@
               </a:defRPr>
             </a:pPr>
             <a:r>
-              <a:t>Open-Source Omnichannel AI Agent Platform</a:t>
+              <a:t>Purpose-built AI agents. One CX platform. (Open-source)</a:t>
             </a:r>
           </a:p>
         </p:txBody>
@@ -6274,12 +6274,17 @@
               </a:defRPr>
             </a:pPr>
             <a:r>
-              <a:t>Nexus is an open-source omnichannel AI agent platform for customer support. It solves the problem of fragmented support tools by providing a single AI-powered orchestrator that handles conversations across chat, copilot, and voice from one runtime.</a:t>
+              <a:t>Nexus is an open-source Agentic CX platform for customer experience teams. It solves the problem of fragmented support tools by providing a single AI-powered orchestrator that runs customer and agent workflows across chat, copilot, and voice.</a:t>
             </a:r>
             <a:br/>
             <a:br/>
             <a:r>
-              <a:t>One knowledge base, one feedback loop, one console — no more switching between siloed systems. Nexus ships with a built-in mock LLM so the entire platform runs without any API keys, making it fully functional for local development and testing out of the box.</a:t>
+              <a:t>Purpose-built agents can resolve customer inquiries end-to-end, guide frontline teams in real time, and support operations with evaluation and insights — all grounded with a shared knowledge layer (RAG).</a:t>
+            </a:r>
+            <a:br/>
+            <a:br/>
+            <a:r>
+              <a:t>Nexus ships with a built-in mock LLM so the platform runs without any API keys, making it fully functional for local development and testing out of the box.</a:t>
             </a:r>
           </a:p>
         </p:txBody>
